--- a/templates/Template_Tech_Dark_Glass.pptx
+++ b/templates/Template_Tech_Dark_Glass.pptx
@@ -7,9 +7,13 @@
   <p:sldIdLst>
     <p:sldId id="256" r:id="rId2"/>
     <p:sldId id="257" r:id="rId3"/>
+    <p:sldId id="258" r:id="rId4"/>
+    <p:sldId id="259" r:id="rId5"/>
+    <p:sldId id="260" r:id="rId6"/>
+    <p:sldId id="261" r:id="rId7"/>
   </p:sldIdLst>
   <p:notesMasterIdLst>
-    <p:notesMasterId r:id="rId4"/>
+    <p:notesMasterId r:id="rId8"/>
   </p:notesMasterIdLst>
   <p:sldSz cx="12192000" cy="6858000"/>
   <p:notesSz cx="6858000" cy="12192000"/>
@@ -503,8 +507,8 @@
           <a:p>
             <a:r>
               <a:rPr lang="en-US" dirty="0"/>
-              <a:t>1. Tech Cover Slide
-note: [오프닝 멘트] 대규모 트래픽 환경에서 데이터 정합성을 유지하기 위한 이벤트 드라이븐 아키텍처 설계 전략을 공유합니다.</a:t>
+              <a:t>1. Tech Hero Cover
+note: [오프닝 멘트] 대규모 분산 환경에서 데이터 일관성과 처리량을 극대화하는 아키텍처 패턴을 공유합니다.</a:t>
             </a:r>
             <a:endParaRPr lang="en-US" dirty="0"/>
           </a:p>
@@ -592,8 +596,8 @@
           <a:p>
             <a:r>
               <a:rPr lang="en-US" dirty="0"/>
-              <a:t>2. Tech Agenda Slide
-note: [목차 안내] 동기 호출의 병목 현상부터 Saga 패턴 분산 트랜잭션 구현까지 단계별로 살펴보겠습니다.</a:t>
+              <a:t>2. Tech Agenda (Asymmetric Split)
+note: [아젠다 안내] 1부 동기 병목 분석부터 4부 프로덕션 튜닝까지 4단계로 진행합니다.</a:t>
             </a:r>
             <a:endParaRPr lang="en-US" dirty="0"/>
           </a:p>
@@ -617,6 +621,362 @@
             <a:fld id="{F7021451-1387-4CA6-816F-3879F97B5CBC}" type="slidenum">
               <a:rPr lang="en-US"/>
               <a:t>2</a:t>
+            </a:fld>
+            <a:endParaRPr lang="en-US"/>
+          </a:p>
+        </p:txBody>
+      </p:sp>
+    </p:spTree>
+    <p:extLst>
+      <p:ext uri="{BB962C8B-B14F-4D97-AF65-F5344CB8AC3E}">
+        <p14:creationId xmlns:p14="http://schemas.microsoft.com/office/powerpoint/2010/main" val="1024086991"/>
+      </p:ext>
+    </p:extLst>
+  </p:cSld>
+  <p:clrMapOvr>
+    <a:masterClrMapping/>
+  </p:clrMapOvr>
+</p:notes>
+</file>
+
+<file path=ppt/notesSlides/notesSlide3.xml><?xml version="1.0" encoding="utf-8"?>
+<p:notes xmlns:a="http://schemas.openxmlformats.org/drawingml/2006/main" xmlns:r="http://schemas.openxmlformats.org/officeDocument/2006/relationships" xmlns:p="http://schemas.openxmlformats.org/presentationml/2006/main">
+  <p:cSld>
+    <p:spTree>
+      <p:nvGrpSpPr>
+        <p:cNvPr id="1" name=""/>
+        <p:cNvGrpSpPr/>
+        <p:nvPr/>
+      </p:nvGrpSpPr>
+      <p:grpSpPr>
+        <a:xfrm>
+          <a:off x="0" y="0"/>
+          <a:ext cx="0" cy="0"/>
+          <a:chOff x="0" y="0"/>
+          <a:chExt cx="0" cy="0"/>
+        </a:xfrm>
+      </p:grpSpPr>
+      <p:sp>
+        <p:nvSpPr>
+          <p:cNvPr id="2" name="Slide Image Placeholder 1"/>
+          <p:cNvSpPr>
+            <a:spLocks noGrp="1" noRot="1" noChangeAspect="1"/>
+          </p:cNvSpPr>
+          <p:nvPr>
+            <p:ph type="sldImg"/>
+          </p:nvPr>
+        </p:nvSpPr>
+        <p:spPr/>
+      </p:sp>
+      <p:sp>
+        <p:nvSpPr>
+          <p:cNvPr id="3" name="Notes Placeholder 2"/>
+          <p:cNvSpPr>
+            <a:spLocks noGrp="1"/>
+          </p:cNvSpPr>
+          <p:nvPr>
+            <p:ph type="body" idx="1"/>
+          </p:nvPr>
+        </p:nvSpPr>
+        <p:spPr/>
+        <p:txBody>
+          <a:bodyPr/>
+          <a:lstStyle/>
+          <a:p>
+            <a:r>
+              <a:rPr lang="en-US" dirty="0"/>
+              <a:t>3. Problem Statement (3 Cards)
+note: [문제점 설명] 동기 호출 기반 마이크로서비스가 겪는 3대 치명적 병목을 설명합니다.</a:t>
+            </a:r>
+            <a:endParaRPr lang="en-US" dirty="0"/>
+          </a:p>
+        </p:txBody>
+      </p:sp>
+      <p:sp>
+        <p:nvSpPr>
+          <p:cNvPr id="4" name="Slide Number Placeholder 3"/>
+          <p:cNvSpPr>
+            <a:spLocks noGrp="1"/>
+          </p:cNvSpPr>
+          <p:nvPr>
+            <p:ph type="sldNum" sz="quarter" idx="10"/>
+          </p:nvPr>
+        </p:nvSpPr>
+        <p:spPr/>
+        <p:txBody>
+          <a:bodyPr/>
+          <a:lstStyle/>
+          <a:p>
+            <a:fld id="{F7021451-1387-4CA6-816F-3879F97B5CBC}" type="slidenum">
+              <a:rPr lang="en-US"/>
+              <a:t>3</a:t>
+            </a:fld>
+            <a:endParaRPr lang="en-US"/>
+          </a:p>
+        </p:txBody>
+      </p:sp>
+    </p:spTree>
+    <p:extLst>
+      <p:ext uri="{BB962C8B-B14F-4D97-AF65-F5344CB8AC3E}">
+        <p14:creationId xmlns:p14="http://schemas.microsoft.com/office/powerpoint/2010/main" val="1024086991"/>
+      </p:ext>
+    </p:extLst>
+  </p:cSld>
+  <p:clrMapOvr>
+    <a:masterClrMapping/>
+  </p:clrMapOvr>
+</p:notes>
+</file>
+
+<file path=ppt/notesSlides/notesSlide4.xml><?xml version="1.0" encoding="utf-8"?>
+<p:notes xmlns:a="http://schemas.openxmlformats.org/drawingml/2006/main" xmlns:r="http://schemas.openxmlformats.org/officeDocument/2006/relationships" xmlns:p="http://schemas.openxmlformats.org/presentationml/2006/main">
+  <p:cSld>
+    <p:spTree>
+      <p:nvGrpSpPr>
+        <p:cNvPr id="1" name=""/>
+        <p:cNvGrpSpPr/>
+        <p:nvPr/>
+      </p:nvGrpSpPr>
+      <p:grpSpPr>
+        <a:xfrm>
+          <a:off x="0" y="0"/>
+          <a:ext cx="0" cy="0"/>
+          <a:chOff x="0" y="0"/>
+          <a:chExt cx="0" cy="0"/>
+        </a:xfrm>
+      </p:grpSpPr>
+      <p:sp>
+        <p:nvSpPr>
+          <p:cNvPr id="2" name="Slide Image Placeholder 1"/>
+          <p:cNvSpPr>
+            <a:spLocks noGrp="1" noRot="1" noChangeAspect="1"/>
+          </p:cNvSpPr>
+          <p:nvPr>
+            <p:ph type="sldImg"/>
+          </p:nvPr>
+        </p:nvSpPr>
+        <p:spPr/>
+      </p:sp>
+      <p:sp>
+        <p:nvSpPr>
+          <p:cNvPr id="3" name="Notes Placeholder 2"/>
+          <p:cNvSpPr>
+            <a:spLocks noGrp="1"/>
+          </p:cNvSpPr>
+          <p:nvPr>
+            <p:ph type="body" idx="1"/>
+          </p:nvPr>
+        </p:nvSpPr>
+        <p:spPr/>
+        <p:txBody>
+          <a:bodyPr/>
+          <a:lstStyle/>
+          <a:p>
+            <a:r>
+              <a:rPr lang="en-US" dirty="0"/>
+              <a:t>4. Architecture &amp; Pipeline (Horizontal Flow + Roles)
+note: [아키텍처 파이프라인] Outbox 패턴과 Saga 엔진의 유기적 상호작용을 설명합니다.</a:t>
+            </a:r>
+            <a:endParaRPr lang="en-US" dirty="0"/>
+          </a:p>
+        </p:txBody>
+      </p:sp>
+      <p:sp>
+        <p:nvSpPr>
+          <p:cNvPr id="4" name="Slide Number Placeholder 3"/>
+          <p:cNvSpPr>
+            <a:spLocks noGrp="1"/>
+          </p:cNvSpPr>
+          <p:nvPr>
+            <p:ph type="sldNum" sz="quarter" idx="10"/>
+          </p:nvPr>
+        </p:nvSpPr>
+        <p:spPr/>
+        <p:txBody>
+          <a:bodyPr/>
+          <a:lstStyle/>
+          <a:p>
+            <a:fld id="{F7021451-1387-4CA6-816F-3879F97B5CBC}" type="slidenum">
+              <a:rPr lang="en-US"/>
+              <a:t>4</a:t>
+            </a:fld>
+            <a:endParaRPr lang="en-US"/>
+          </a:p>
+        </p:txBody>
+      </p:sp>
+    </p:spTree>
+    <p:extLst>
+      <p:ext uri="{BB962C8B-B14F-4D97-AF65-F5344CB8AC3E}">
+        <p14:creationId xmlns:p14="http://schemas.microsoft.com/office/powerpoint/2010/main" val="1024086991"/>
+      </p:ext>
+    </p:extLst>
+  </p:cSld>
+  <p:clrMapOvr>
+    <a:masterClrMapping/>
+  </p:clrMapOvr>
+</p:notes>
+</file>
+
+<file path=ppt/notesSlides/notesSlide5.xml><?xml version="1.0" encoding="utf-8"?>
+<p:notes xmlns:a="http://schemas.openxmlformats.org/drawingml/2006/main" xmlns:r="http://schemas.openxmlformats.org/officeDocument/2006/relationships" xmlns:p="http://schemas.openxmlformats.org/presentationml/2006/main">
+  <p:cSld>
+    <p:spTree>
+      <p:nvGrpSpPr>
+        <p:cNvPr id="1" name=""/>
+        <p:cNvGrpSpPr/>
+        <p:nvPr/>
+      </p:nvGrpSpPr>
+      <p:grpSpPr>
+        <a:xfrm>
+          <a:off x="0" y="0"/>
+          <a:ext cx="0" cy="0"/>
+          <a:chOff x="0" y="0"/>
+          <a:chExt cx="0" cy="0"/>
+        </a:xfrm>
+      </p:grpSpPr>
+      <p:sp>
+        <p:nvSpPr>
+          <p:cNvPr id="2" name="Slide Image Placeholder 1"/>
+          <p:cNvSpPr>
+            <a:spLocks noGrp="1" noRot="1" noChangeAspect="1"/>
+          </p:cNvSpPr>
+          <p:nvPr>
+            <p:ph type="sldImg"/>
+          </p:nvPr>
+        </p:nvSpPr>
+        <p:spPr/>
+      </p:sp>
+      <p:sp>
+        <p:nvSpPr>
+          <p:cNvPr id="3" name="Notes Placeholder 2"/>
+          <p:cNvSpPr>
+            <a:spLocks noGrp="1"/>
+          </p:cNvSpPr>
+          <p:nvPr>
+            <p:ph type="body" idx="1"/>
+          </p:nvPr>
+        </p:nvSpPr>
+        <p:spPr/>
+        <p:txBody>
+          <a:bodyPr/>
+          <a:lstStyle/>
+          <a:p>
+            <a:r>
+              <a:rPr lang="en-US" dirty="0"/>
+              <a:t>5. Benchmark Performance Stats (Big Stats)
+note: [성능 벤치마크] 초당 12만 TPS, P99 18ms, 99.99% 가용성 검증 결과를 발표합니다.</a:t>
+            </a:r>
+            <a:endParaRPr lang="en-US" dirty="0"/>
+          </a:p>
+        </p:txBody>
+      </p:sp>
+      <p:sp>
+        <p:nvSpPr>
+          <p:cNvPr id="4" name="Slide Number Placeholder 3"/>
+          <p:cNvSpPr>
+            <a:spLocks noGrp="1"/>
+          </p:cNvSpPr>
+          <p:nvPr>
+            <p:ph type="sldNum" sz="quarter" idx="10"/>
+          </p:nvPr>
+        </p:nvSpPr>
+        <p:spPr/>
+        <p:txBody>
+          <a:bodyPr/>
+          <a:lstStyle/>
+          <a:p>
+            <a:fld id="{F7021451-1387-4CA6-816F-3879F97B5CBC}" type="slidenum">
+              <a:rPr lang="en-US"/>
+              <a:t>5</a:t>
+            </a:fld>
+            <a:endParaRPr lang="en-US"/>
+          </a:p>
+        </p:txBody>
+      </p:sp>
+    </p:spTree>
+    <p:extLst>
+      <p:ext uri="{BB962C8B-B14F-4D97-AF65-F5344CB8AC3E}">
+        <p14:creationId xmlns:p14="http://schemas.microsoft.com/office/powerpoint/2010/main" val="1024086991"/>
+      </p:ext>
+    </p:extLst>
+  </p:cSld>
+  <p:clrMapOvr>
+    <a:masterClrMapping/>
+  </p:clrMapOvr>
+</p:notes>
+</file>
+
+<file path=ppt/notesSlides/notesSlide6.xml><?xml version="1.0" encoding="utf-8"?>
+<p:notes xmlns:a="http://schemas.openxmlformats.org/drawingml/2006/main" xmlns:r="http://schemas.openxmlformats.org/officeDocument/2006/relationships" xmlns:p="http://schemas.openxmlformats.org/presentationml/2006/main">
+  <p:cSld>
+    <p:spTree>
+      <p:nvGrpSpPr>
+        <p:cNvPr id="1" name=""/>
+        <p:cNvGrpSpPr/>
+        <p:nvPr/>
+      </p:nvGrpSpPr>
+      <p:grpSpPr>
+        <a:xfrm>
+          <a:off x="0" y="0"/>
+          <a:ext cx="0" cy="0"/>
+          <a:chOff x="0" y="0"/>
+          <a:chExt cx="0" cy="0"/>
+        </a:xfrm>
+      </p:grpSpPr>
+      <p:sp>
+        <p:nvSpPr>
+          <p:cNvPr id="2" name="Slide Image Placeholder 1"/>
+          <p:cNvSpPr>
+            <a:spLocks noGrp="1" noRot="1" noChangeAspect="1"/>
+          </p:cNvSpPr>
+          <p:nvPr>
+            <p:ph type="sldImg"/>
+          </p:nvPr>
+        </p:nvSpPr>
+        <p:spPr/>
+      </p:sp>
+      <p:sp>
+        <p:nvSpPr>
+          <p:cNvPr id="3" name="Notes Placeholder 2"/>
+          <p:cNvSpPr>
+            <a:spLocks noGrp="1"/>
+          </p:cNvSpPr>
+          <p:nvPr>
+            <p:ph type="body" idx="1"/>
+          </p:nvPr>
+        </p:nvSpPr>
+        <p:spPr/>
+        <p:txBody>
+          <a:bodyPr/>
+          <a:lstStyle/>
+          <a:p>
+            <a:r>
+              <a:rPr lang="en-US" dirty="0"/>
+              <a:t>6. Executive Closing &amp; Q&amp;A Hub
+note: [마무리 멘트] 3가지 핵심 아키텍처 원칙과 GitHub 저장소 링크를 안내하며 세션을 마칩니다. 질문을 환영합니다. 감사합니다.</a:t>
+            </a:r>
+            <a:endParaRPr lang="en-US" dirty="0"/>
+          </a:p>
+        </p:txBody>
+      </p:sp>
+      <p:sp>
+        <p:nvSpPr>
+          <p:cNvPr id="4" name="Slide Number Placeholder 3"/>
+          <p:cNvSpPr>
+            <a:spLocks noGrp="1"/>
+          </p:cNvSpPr>
+          <p:nvPr>
+            <p:ph type="sldNum" sz="quarter" idx="10"/>
+          </p:nvPr>
+        </p:nvSpPr>
+        <p:spPr/>
+        <p:txBody>
+          <a:bodyPr/>
+          <a:lstStyle/>
+          <a:p>
+            <a:fld id="{F7021451-1387-4CA6-816F-3879F97B5CBC}" type="slidenum">
+              <a:rPr lang="en-US"/>
+              <a:t>6</a:t>
             </a:fld>
             <a:endParaRPr lang="en-US"/>
           </a:p>
@@ -984,6 +1344,162 @@
 <file path=ppt/slides/slide2.xml><?xml version="1.0" encoding="utf-8"?>
 <p:sld xmlns:a="http://schemas.openxmlformats.org/drawingml/2006/main" xmlns:r="http://schemas.openxmlformats.org/officeDocument/2006/relationships" xmlns:p="http://schemas.openxmlformats.org/presentationml/2006/main">
   <p:cSld name="Slide 2">
+    <p:bg>
+      <p:bgPr>
+        <a:blipFill dpi="0" rotWithShape="1">
+          <a:blip r:embed="rId1">
+            <a:lum/>
+          </a:blip>
+          <a:srcRect/>
+          <a:stretch>
+            <a:fillRect/>
+          </a:stretch>
+        </a:blipFill>
+        <a:effectLst/>
+      </p:bgPr>
+    </p:bg>
+    <p:spTree>
+      <p:nvGrpSpPr>
+        <p:cNvPr id="1" name=""/>
+        <p:cNvGrpSpPr/>
+        <p:nvPr/>
+      </p:nvGrpSpPr>
+      <p:grpSpPr>
+        <a:xfrm>
+          <a:off x="0" y="0"/>
+          <a:ext cx="0" cy="0"/>
+          <a:chOff x="0" y="0"/>
+          <a:chExt cx="0" cy="0"/>
+        </a:xfrm>
+      </p:grpSpPr>
+    </p:spTree>
+  </p:cSld>
+  <p:clrMapOvr>
+    <a:masterClrMapping/>
+  </p:clrMapOvr>
+</p:sld>
+</file>
+
+<file path=ppt/slides/slide3.xml><?xml version="1.0" encoding="utf-8"?>
+<p:sld xmlns:a="http://schemas.openxmlformats.org/drawingml/2006/main" xmlns:r="http://schemas.openxmlformats.org/officeDocument/2006/relationships" xmlns:p="http://schemas.openxmlformats.org/presentationml/2006/main">
+  <p:cSld name="Slide 3">
+    <p:bg>
+      <p:bgPr>
+        <a:blipFill dpi="0" rotWithShape="1">
+          <a:blip r:embed="rId1">
+            <a:lum/>
+          </a:blip>
+          <a:srcRect/>
+          <a:stretch>
+            <a:fillRect/>
+          </a:stretch>
+        </a:blipFill>
+        <a:effectLst/>
+      </p:bgPr>
+    </p:bg>
+    <p:spTree>
+      <p:nvGrpSpPr>
+        <p:cNvPr id="1" name=""/>
+        <p:cNvGrpSpPr/>
+        <p:nvPr/>
+      </p:nvGrpSpPr>
+      <p:grpSpPr>
+        <a:xfrm>
+          <a:off x="0" y="0"/>
+          <a:ext cx="0" cy="0"/>
+          <a:chOff x="0" y="0"/>
+          <a:chExt cx="0" cy="0"/>
+        </a:xfrm>
+      </p:grpSpPr>
+    </p:spTree>
+  </p:cSld>
+  <p:clrMapOvr>
+    <a:masterClrMapping/>
+  </p:clrMapOvr>
+</p:sld>
+</file>
+
+<file path=ppt/slides/slide4.xml><?xml version="1.0" encoding="utf-8"?>
+<p:sld xmlns:a="http://schemas.openxmlformats.org/drawingml/2006/main" xmlns:r="http://schemas.openxmlformats.org/officeDocument/2006/relationships" xmlns:p="http://schemas.openxmlformats.org/presentationml/2006/main">
+  <p:cSld name="Slide 4">
+    <p:bg>
+      <p:bgPr>
+        <a:blipFill dpi="0" rotWithShape="1">
+          <a:blip r:embed="rId1">
+            <a:lum/>
+          </a:blip>
+          <a:srcRect/>
+          <a:stretch>
+            <a:fillRect/>
+          </a:stretch>
+        </a:blipFill>
+        <a:effectLst/>
+      </p:bgPr>
+    </p:bg>
+    <p:spTree>
+      <p:nvGrpSpPr>
+        <p:cNvPr id="1" name=""/>
+        <p:cNvGrpSpPr/>
+        <p:nvPr/>
+      </p:nvGrpSpPr>
+      <p:grpSpPr>
+        <a:xfrm>
+          <a:off x="0" y="0"/>
+          <a:ext cx="0" cy="0"/>
+          <a:chOff x="0" y="0"/>
+          <a:chExt cx="0" cy="0"/>
+        </a:xfrm>
+      </p:grpSpPr>
+    </p:spTree>
+  </p:cSld>
+  <p:clrMapOvr>
+    <a:masterClrMapping/>
+  </p:clrMapOvr>
+</p:sld>
+</file>
+
+<file path=ppt/slides/slide5.xml><?xml version="1.0" encoding="utf-8"?>
+<p:sld xmlns:a="http://schemas.openxmlformats.org/drawingml/2006/main" xmlns:r="http://schemas.openxmlformats.org/officeDocument/2006/relationships" xmlns:p="http://schemas.openxmlformats.org/presentationml/2006/main">
+  <p:cSld name="Slide 5">
+    <p:bg>
+      <p:bgPr>
+        <a:blipFill dpi="0" rotWithShape="1">
+          <a:blip r:embed="rId1">
+            <a:lum/>
+          </a:blip>
+          <a:srcRect/>
+          <a:stretch>
+            <a:fillRect/>
+          </a:stretch>
+        </a:blipFill>
+        <a:effectLst/>
+      </p:bgPr>
+    </p:bg>
+    <p:spTree>
+      <p:nvGrpSpPr>
+        <p:cNvPr id="1" name=""/>
+        <p:cNvGrpSpPr/>
+        <p:nvPr/>
+      </p:nvGrpSpPr>
+      <p:grpSpPr>
+        <a:xfrm>
+          <a:off x="0" y="0"/>
+          <a:ext cx="0" cy="0"/>
+          <a:chOff x="0" y="0"/>
+          <a:chExt cx="0" cy="0"/>
+        </a:xfrm>
+      </p:grpSpPr>
+    </p:spTree>
+  </p:cSld>
+  <p:clrMapOvr>
+    <a:masterClrMapping/>
+  </p:clrMapOvr>
+</p:sld>
+</file>
+
+<file path=ppt/slides/slide6.xml><?xml version="1.0" encoding="utf-8"?>
+<p:sld xmlns:a="http://schemas.openxmlformats.org/drawingml/2006/main" xmlns:r="http://schemas.openxmlformats.org/officeDocument/2006/relationships" xmlns:p="http://schemas.openxmlformats.org/presentationml/2006/main">
+  <p:cSld name="Slide 6">
     <p:bg>
       <p:bgPr>
         <a:blipFill dpi="0" rotWithShape="1">

--- a/templates/Template_Tech_Dark_Glass.pptx
+++ b/templates/Template_Tech_Dark_Glass.pptx
@@ -507,8 +507,7 @@
           <a:p>
             <a:r>
               <a:rPr lang="en-US" dirty="0"/>
-              <a:t>1. Tech Hero Cover
-note: [오프닝 멘트] 대규모 분산 환경에서 데이터 일관성과 처리량을 극대화하는 아키텍처 패턴을 공유합니다.</a:t>
+              <a:t>[오프닝 멘트] 대규모 분산 환경에서 데이터 일관성과 처리량을 극대화하는 아키텍처 패턴을 공유합니다.</a:t>
             </a:r>
             <a:endParaRPr lang="en-US" dirty="0"/>
           </a:p>
@@ -596,8 +595,7 @@
           <a:p>
             <a:r>
               <a:rPr lang="en-US" dirty="0"/>
-              <a:t>2. Tech Agenda (Asymmetric Split)
-note: [아젠다 안내] 1부 동기 병목 분석부터 4부 프로덕션 튜닝까지 4단계로 진행합니다.</a:t>
+              <a:t>[아젠다 안내] 1부 동기 병목 분석부터 4부 프로덕션 튜닝까지 4단계로 진행합니다.</a:t>
             </a:r>
             <a:endParaRPr lang="en-US" dirty="0"/>
           </a:p>
@@ -685,8 +683,7 @@
           <a:p>
             <a:r>
               <a:rPr lang="en-US" dirty="0"/>
-              <a:t>3. Problem Statement (3 Cards)
-note: [문제점 설명] 동기 호출 기반 마이크로서비스가 겪는 3대 치명적 병목을 설명합니다.</a:t>
+              <a:t>[문제점 설명] 동기 호출 기반 마이크로서비스가 겪는 3대 치명적 병목을 설명합니다.</a:t>
             </a:r>
             <a:endParaRPr lang="en-US" dirty="0"/>
           </a:p>
@@ -774,8 +771,7 @@
           <a:p>
             <a:r>
               <a:rPr lang="en-US" dirty="0"/>
-              <a:t>4. Architecture &amp; Pipeline (Horizontal Flow + Roles)
-note: [아키텍처 파이프라인] Outbox 패턴과 Saga 엔진의 유기적 상호작용을 설명합니다.</a:t>
+              <a:t>[아키텍처 파이프라인] Outbox 패턴과 Saga 엔진의 유기적 상호작용을 설명합니다.</a:t>
             </a:r>
             <a:endParaRPr lang="en-US" dirty="0"/>
           </a:p>
@@ -863,8 +859,7 @@
           <a:p>
             <a:r>
               <a:rPr lang="en-US" dirty="0"/>
-              <a:t>5. Benchmark Performance Stats (Big Stats)
-note: [성능 벤치마크] 초당 12만 TPS, P99 18ms, 99.99% 가용성 검증 결과를 발표합니다.</a:t>
+              <a:t>[성능 벤치마크] 초당 12만 TPS, P99 18ms, 99.99% 가용성 검증 결과를 발표합니다.</a:t>
             </a:r>
             <a:endParaRPr lang="en-US" dirty="0"/>
           </a:p>
@@ -952,8 +947,7 @@
           <a:p>
             <a:r>
               <a:rPr lang="en-US" dirty="0"/>
-              <a:t>6. Executive Closing &amp; Q&amp;A Hub
-note: [마무리 멘트] 3가지 핵심 아키텍처 원칙과 GitHub 저장소 링크를 안내하며 세션을 마칩니다. 질문을 환영합니다. 감사합니다.</a:t>
+              <a:t>[마무리 멘트] 3가지 핵심 아키텍처 원칙과 GitHub 저장소 링크를 안내하며 세션을 마칩니다. 질문을 환영합니다. 감사합니다.</a:t>
             </a:r>
             <a:endParaRPr lang="en-US" dirty="0"/>
           </a:p>
@@ -1307,16 +1301,9 @@
   <p:cSld name="Slide 1">
     <p:bg>
       <p:bgPr>
-        <a:blipFill dpi="0" rotWithShape="1">
-          <a:blip r:embed="rId1">
-            <a:lum/>
-          </a:blip>
-          <a:srcRect/>
-          <a:stretch>
-            <a:fillRect/>
-          </a:stretch>
-        </a:blipFill>
-        <a:effectLst/>
+        <a:solidFill>
+          <a:srgbClr val="4E92F5"/>
+        </a:solidFill>
       </p:bgPr>
     </p:bg>
     <p:spTree>
@@ -1333,6 +1320,554 @@
           <a:chExt cx="0" cy="0"/>
         </a:xfrm>
       </p:grpSpPr>
+      <p:sp>
+        <p:nvSpPr>
+          <p:cNvPr id="2" name="Shape 0"/>
+          <p:cNvSpPr/>
+          <p:nvPr/>
+        </p:nvSpPr>
+        <p:spPr>
+          <a:xfrm>
+            <a:off x="552480" y="438180"/>
+            <a:ext cx="3401751" cy="418521"/>
+          </a:xfrm>
+          <a:prstGeom prst="roundRect">
+            <a:avLst>
+              <a:gd name="adj" fmla="val 50011"/>
+            </a:avLst>
+          </a:prstGeom>
+          <a:solidFill>
+            <a:srgbClr val="38BDF8">
+              <a:alpha val="15000"/>
+            </a:srgbClr>
+          </a:solidFill>
+          <a:ln w="9525">
+            <a:solidFill>
+              <a:srgbClr val="38BDF8">
+                <a:alpha val="35000"/>
+              </a:srgbClr>
+            </a:solidFill>
+            <a:prstDash val="solid"/>
+          </a:ln>
+        </p:spPr>
+      </p:sp>
+      <p:sp>
+        <p:nvSpPr>
+          <p:cNvPr id="3" name="Text 1"/>
+          <p:cNvSpPr txBox="1"/>
+          <p:nvPr/>
+        </p:nvSpPr>
+        <p:spPr>
+          <a:xfrm>
+            <a:off x="676290" y="481432"/>
+            <a:ext cx="3384377" cy="323149"/>
+          </a:xfrm>
+          <a:prstGeom prst="rect">
+            <a:avLst/>
+          </a:prstGeom>
+          <a:noFill/>
+          <a:ln/>
+        </p:spPr>
+        <p:txBody>
+          <a:bodyPr wrap="none" lIns="0" tIns="0" rIns="0" bIns="0" rtlCol="0" anchor="t"/>
+          <a:lstStyle/>
+          <a:p>
+            <a:pPr algn="l" indent="0" marL="0">
+              <a:lnSpc>
+                <a:spcPts val="2545"/>
+              </a:lnSpc>
+              <a:buNone/>
+            </a:pPr>
+            <a:r>
+              <a:rPr lang="en-US" sz="1697" b="1" spc="34" kern="0" dirty="0">
+                <a:solidFill>
+                  <a:srgbClr val="38BDF8"/>
+                </a:solidFill>
+                <a:latin typeface="Malgun Gothic" pitchFamily="34" charset="0"/>
+                <a:ea typeface="Malgun Gothic" pitchFamily="34" charset="-122"/>
+                <a:cs typeface="Malgun Gothic" pitchFamily="34" charset="-120"/>
+              </a:rPr>
+              <a:t>ENGINEERING TECH SESSION</a:t>
+            </a:r>
+            <a:endParaRPr lang="en-US" sz="1697" dirty="0"/>
+          </a:p>
+        </p:txBody>
+      </p:sp>
+      <p:sp>
+        <p:nvSpPr>
+          <p:cNvPr id="4" name="Text 2"/>
+          <p:cNvSpPr txBox="1"/>
+          <p:nvPr/>
+        </p:nvSpPr>
+        <p:spPr>
+          <a:xfrm>
+            <a:off x="533370" y="1040679"/>
+            <a:ext cx="11125230" cy="1682953"/>
+          </a:xfrm>
+          <a:prstGeom prst="rect">
+            <a:avLst/>
+          </a:prstGeom>
+          <a:noFill/>
+          <a:ln/>
+        </p:spPr>
+        <p:txBody>
+          <a:bodyPr wrap="square" lIns="0" tIns="0" rIns="0" bIns="0" rtlCol="0" anchor="t"/>
+          <a:lstStyle/>
+          <a:p>
+            <a:pPr algn="l" indent="0" marL="0">
+              <a:lnSpc>
+                <a:spcPts val="6626"/>
+              </a:lnSpc>
+              <a:buNone/>
+            </a:pPr>
+            <a:r>
+              <a:rPr lang="en-US" sz="5177" b="1" spc="-155" kern="0" dirty="0">
+                <a:solidFill>
+                  <a:srgbClr val="FFFFFF"/>
+                </a:solidFill>
+                <a:latin typeface="Malgun Gothic" pitchFamily="34" charset="0"/>
+                <a:ea typeface="Malgun Gothic" pitchFamily="34" charset="-122"/>
+                <a:cs typeface="Malgun Gothic" pitchFamily="34" charset="-120"/>
+              </a:rPr>
+              <a:t>차세대 분산 시스템을 위한</a:t>
+            </a:r>
+            <a:pPr algn="l" indent="0" marL="0">
+              <a:lnSpc>
+                <a:spcPts val="6626"/>
+              </a:lnSpc>
+              <a:buNone/>
+            </a:pPr>
+            <a:endParaRPr lang="en-US" sz="5177" dirty="0"/>
+          </a:p>
+          <a:p>
+            <a:pPr algn="l" indent="0" marL="0">
+              <a:lnSpc>
+                <a:spcPts val="6626"/>
+              </a:lnSpc>
+              <a:buNone/>
+            </a:pPr>
+            <a:r>
+              <a:rPr lang="en-US" sz="5177" b="1" spc="-155" kern="0" dirty="0">
+                <a:solidFill>
+                  <a:srgbClr val="FFFFFF"/>
+                </a:solidFill>
+                <a:latin typeface="Malgun Gothic" pitchFamily="34" charset="0"/>
+                <a:ea typeface="Malgun Gothic" pitchFamily="34" charset="-122"/>
+                <a:cs typeface="Malgun Gothic" pitchFamily="34" charset="-120"/>
+              </a:rPr>
+              <a:t> </a:t>
+            </a:r>
+            <a:endParaRPr lang="en-US" sz="5177" dirty="0"/>
+          </a:p>
+          <a:p>
+            <a:pPr algn="l" indent="0" marL="0">
+              <a:lnSpc>
+                <a:spcPts val="6626"/>
+              </a:lnSpc>
+              <a:buNone/>
+            </a:pPr>
+            <a:r>
+              <a:rPr lang="en-US" sz="5177" b="1" spc="-155" kern="0" dirty="0">
+                <a:solidFill>
+                  <a:srgbClr val="38BDF8"/>
+                </a:solidFill>
+                <a:latin typeface="Malgun Gothic" pitchFamily="34" charset="0"/>
+                <a:ea typeface="Malgun Gothic" pitchFamily="34" charset="-122"/>
+                <a:cs typeface="Malgun Gothic" pitchFamily="34" charset="-120"/>
+              </a:rPr>
+              <a:t>고성능 이벤트 드라이븐 아키텍처</a:t>
+            </a:r>
+            <a:endParaRPr lang="en-US" sz="5177" dirty="0"/>
+          </a:p>
+        </p:txBody>
+      </p:sp>
+      <p:sp>
+        <p:nvSpPr>
+          <p:cNvPr id="5" name="Text 3"/>
+          <p:cNvSpPr txBox="1"/>
+          <p:nvPr/>
+        </p:nvSpPr>
+        <p:spPr>
+          <a:xfrm>
+            <a:off x="533370" y="3032425"/>
+            <a:ext cx="11993088" cy="256032"/>
+          </a:xfrm>
+          <a:prstGeom prst="rect">
+            <a:avLst/>
+          </a:prstGeom>
+          <a:noFill/>
+          <a:ln/>
+        </p:spPr>
+        <p:txBody>
+          <a:bodyPr wrap="none" lIns="0" tIns="0" rIns="0" bIns="0" rtlCol="0" anchor="t"/>
+          <a:lstStyle/>
+          <a:p>
+            <a:pPr algn="l" indent="0" marL="0">
+              <a:lnSpc>
+                <a:spcPts val="2016"/>
+              </a:lnSpc>
+              <a:buNone/>
+            </a:pPr>
+            <a:r>
+              <a:rPr lang="en-US" sz="1344" spc="-54" kern="0" dirty="0">
+                <a:solidFill>
+                  <a:srgbClr val="94A3B8"/>
+                </a:solidFill>
+                <a:latin typeface="Malgun Gothic" pitchFamily="34" charset="0"/>
+                <a:ea typeface="Malgun Gothic" pitchFamily="34" charset="-122"/>
+                <a:cs typeface="Malgun Gothic" pitchFamily="34" charset="-120"/>
+              </a:rPr>
+              <a:t>마이크로서비스 환경에서 데이터 일관성과 처리량을 동시에 확보하는 설계 패턴</a:t>
+            </a:r>
+            <a:endParaRPr lang="en-US" sz="1344" dirty="0"/>
+          </a:p>
+        </p:txBody>
+      </p:sp>
+      <p:sp>
+        <p:nvSpPr>
+          <p:cNvPr id="6" name="Shape 4"/>
+          <p:cNvSpPr/>
+          <p:nvPr/>
+        </p:nvSpPr>
+        <p:spPr>
+          <a:xfrm>
+            <a:off x="552480" y="5153284"/>
+            <a:ext cx="3678448" cy="1285555"/>
+          </a:xfrm>
+          <a:prstGeom prst="roundRect">
+            <a:avLst>
+              <a:gd name="adj" fmla="val 8891"/>
+            </a:avLst>
+          </a:prstGeom>
+          <a:solidFill>
+            <a:srgbClr val="161E2E">
+              <a:alpha val="85000"/>
+            </a:srgbClr>
+          </a:solidFill>
+          <a:ln w="9525">
+            <a:solidFill>
+              <a:srgbClr val="FFFFFF">
+                <a:alpha val="9000"/>
+              </a:srgbClr>
+            </a:solidFill>
+            <a:prstDash val="solid"/>
+          </a:ln>
+        </p:spPr>
+      </p:sp>
+      <p:sp>
+        <p:nvSpPr>
+          <p:cNvPr id="7" name="Text 5"/>
+          <p:cNvSpPr txBox="1"/>
+          <p:nvPr/>
+        </p:nvSpPr>
+        <p:spPr>
+          <a:xfrm>
+            <a:off x="714421" y="5457139"/>
+            <a:ext cx="3600907" cy="290048"/>
+          </a:xfrm>
+          <a:prstGeom prst="rect">
+            <a:avLst/>
+          </a:prstGeom>
+          <a:noFill/>
+          <a:ln/>
+        </p:spPr>
+        <p:txBody>
+          <a:bodyPr wrap="none" lIns="0" tIns="0" rIns="0" bIns="0" rtlCol="0" anchor="t"/>
+          <a:lstStyle/>
+          <a:p>
+            <a:pPr algn="l" indent="0" marL="0">
+              <a:lnSpc>
+                <a:spcPts val="2284"/>
+              </a:lnSpc>
+              <a:buNone/>
+            </a:pPr>
+            <a:r>
+              <a:rPr lang="en-US" sz="1523" b="1" spc="76" kern="0" dirty="0">
+                <a:solidFill>
+                  <a:srgbClr val="38BDF8"/>
+                </a:solidFill>
+                <a:latin typeface="Malgun Gothic" pitchFamily="34" charset="0"/>
+                <a:ea typeface="Malgun Gothic" pitchFamily="34" charset="-122"/>
+                <a:cs typeface="Malgun Gothic" pitchFamily="34" charset="-120"/>
+              </a:rPr>
+              <a:t>PRESENTER &amp; TEAM</a:t>
+            </a:r>
+            <a:endParaRPr lang="en-US" sz="1523" dirty="0"/>
+          </a:p>
+        </p:txBody>
+      </p:sp>
+      <p:sp>
+        <p:nvSpPr>
+          <p:cNvPr id="8" name="Text 6"/>
+          <p:cNvSpPr txBox="1"/>
+          <p:nvPr/>
+        </p:nvSpPr>
+        <p:spPr>
+          <a:xfrm>
+            <a:off x="714421" y="5766938"/>
+            <a:ext cx="3600907" cy="364663"/>
+          </a:xfrm>
+          <a:prstGeom prst="rect">
+            <a:avLst/>
+          </a:prstGeom>
+          <a:noFill/>
+          <a:ln/>
+        </p:spPr>
+        <p:txBody>
+          <a:bodyPr wrap="none" lIns="0" tIns="0" rIns="0" bIns="0" rtlCol="0" anchor="t"/>
+          <a:lstStyle/>
+          <a:p>
+            <a:pPr algn="l" indent="0" marL="0">
+              <a:lnSpc>
+                <a:spcPts val="2871"/>
+              </a:lnSpc>
+              <a:buNone/>
+            </a:pPr>
+            <a:r>
+              <a:rPr lang="en-US" sz="1914" b="1" spc="-54" kern="0" dirty="0">
+                <a:solidFill>
+                  <a:srgbClr val="FFFFFF"/>
+                </a:solidFill>
+                <a:latin typeface="Malgun Gothic" pitchFamily="34" charset="0"/>
+                <a:ea typeface="Malgun Gothic" pitchFamily="34" charset="-122"/>
+                <a:cs typeface="Malgun Gothic" pitchFamily="34" charset="-120"/>
+              </a:rPr>
+              <a:t>Backend Platform Team</a:t>
+            </a:r>
+            <a:endParaRPr lang="en-US" sz="1914" dirty="0"/>
+          </a:p>
+        </p:txBody>
+      </p:sp>
+      <p:sp>
+        <p:nvSpPr>
+          <p:cNvPr id="9" name="Shape 7"/>
+          <p:cNvSpPr/>
+          <p:nvPr/>
+        </p:nvSpPr>
+        <p:spPr>
+          <a:xfrm>
+            <a:off x="4364248" y="5153284"/>
+            <a:ext cx="3065435" cy="1285555"/>
+          </a:xfrm>
+          <a:prstGeom prst="roundRect">
+            <a:avLst>
+              <a:gd name="adj" fmla="val 8891"/>
+            </a:avLst>
+          </a:prstGeom>
+          <a:solidFill>
+            <a:srgbClr val="161E2E">
+              <a:alpha val="85000"/>
+            </a:srgbClr>
+          </a:solidFill>
+          <a:ln w="9525">
+            <a:solidFill>
+              <a:srgbClr val="FFFFFF">
+                <a:alpha val="9000"/>
+              </a:srgbClr>
+            </a:solidFill>
+            <a:prstDash val="solid"/>
+          </a:ln>
+        </p:spPr>
+      </p:sp>
+      <p:sp>
+        <p:nvSpPr>
+          <p:cNvPr id="10" name="Text 8"/>
+          <p:cNvSpPr txBox="1"/>
+          <p:nvPr/>
+        </p:nvSpPr>
+        <p:spPr>
+          <a:xfrm>
+            <a:off x="4526189" y="5275082"/>
+            <a:ext cx="2938790" cy="290048"/>
+          </a:xfrm>
+          <a:prstGeom prst="rect">
+            <a:avLst/>
+          </a:prstGeom>
+          <a:noFill/>
+          <a:ln/>
+        </p:spPr>
+        <p:txBody>
+          <a:bodyPr wrap="none" lIns="0" tIns="0" rIns="0" bIns="0" rtlCol="0" anchor="t"/>
+          <a:lstStyle/>
+          <a:p>
+            <a:pPr algn="l" indent="0" marL="0">
+              <a:lnSpc>
+                <a:spcPts val="2284"/>
+              </a:lnSpc>
+              <a:buNone/>
+            </a:pPr>
+            <a:r>
+              <a:rPr lang="en-US" sz="1523" b="1" spc="76" kern="0" dirty="0">
+                <a:solidFill>
+                  <a:srgbClr val="38BDF8"/>
+                </a:solidFill>
+                <a:latin typeface="Malgun Gothic" pitchFamily="34" charset="0"/>
+                <a:ea typeface="Malgun Gothic" pitchFamily="34" charset="-122"/>
+                <a:cs typeface="Malgun Gothic" pitchFamily="34" charset="-120"/>
+              </a:rPr>
+              <a:t>SESSION &amp; DATE</a:t>
+            </a:r>
+            <a:endParaRPr lang="en-US" sz="1523" dirty="0"/>
+          </a:p>
+        </p:txBody>
+      </p:sp>
+      <p:sp>
+        <p:nvSpPr>
+          <p:cNvPr id="11" name="Text 9"/>
+          <p:cNvSpPr txBox="1"/>
+          <p:nvPr/>
+        </p:nvSpPr>
+        <p:spPr>
+          <a:xfrm>
+            <a:off x="4526189" y="5584698"/>
+            <a:ext cx="2741554" cy="729234"/>
+          </a:xfrm>
+          <a:prstGeom prst="rect">
+            <a:avLst/>
+          </a:prstGeom>
+          <a:noFill/>
+          <a:ln/>
+        </p:spPr>
+        <p:txBody>
+          <a:bodyPr wrap="square" lIns="0" tIns="0" rIns="0" bIns="0" rtlCol="0" anchor="t"/>
+          <a:lstStyle/>
+          <a:p>
+            <a:pPr algn="l" indent="0" marL="0">
+              <a:lnSpc>
+                <a:spcPts val="2871"/>
+              </a:lnSpc>
+              <a:buNone/>
+            </a:pPr>
+            <a:r>
+              <a:rPr lang="en-US" sz="1914" b="1" spc="-54" kern="0" dirty="0">
+                <a:solidFill>
+                  <a:srgbClr val="FFFFFF"/>
+                </a:solidFill>
+                <a:latin typeface="Malgun Gothic" pitchFamily="34" charset="0"/>
+                <a:ea typeface="Malgun Gothic" pitchFamily="34" charset="-122"/>
+                <a:cs typeface="Malgun Gothic" pitchFamily="34" charset="-120"/>
+              </a:rPr>
+              <a:t>Tech Architecture • 2026.08</a:t>
+            </a:r>
+            <a:endParaRPr lang="en-US" sz="1914" dirty="0"/>
+          </a:p>
+        </p:txBody>
+      </p:sp>
+      <p:sp>
+        <p:nvSpPr>
+          <p:cNvPr id="12" name="Shape 10"/>
+          <p:cNvSpPr/>
+          <p:nvPr/>
+        </p:nvSpPr>
+        <p:spPr>
+          <a:xfrm>
+            <a:off x="7563002" y="5153284"/>
+            <a:ext cx="4076487" cy="1285555"/>
+          </a:xfrm>
+          <a:prstGeom prst="roundRect">
+            <a:avLst>
+              <a:gd name="adj" fmla="val 8891"/>
+            </a:avLst>
+          </a:prstGeom>
+          <a:solidFill>
+            <a:srgbClr val="161E2E">
+              <a:alpha val="85000"/>
+            </a:srgbClr>
+          </a:solidFill>
+          <a:ln w="9525">
+            <a:solidFill>
+              <a:srgbClr val="38BDF8">
+                <a:alpha val="30000"/>
+              </a:srgbClr>
+            </a:solidFill>
+            <a:prstDash val="solid"/>
+          </a:ln>
+        </p:spPr>
+      </p:sp>
+      <p:sp>
+        <p:nvSpPr>
+          <p:cNvPr id="13" name="Text 11"/>
+          <p:cNvSpPr txBox="1"/>
+          <p:nvPr/>
+        </p:nvSpPr>
+        <p:spPr>
+          <a:xfrm>
+            <a:off x="7724943" y="5457139"/>
+            <a:ext cx="4030767" cy="290048"/>
+          </a:xfrm>
+          <a:prstGeom prst="rect">
+            <a:avLst/>
+          </a:prstGeom>
+          <a:noFill/>
+          <a:ln/>
+        </p:spPr>
+        <p:txBody>
+          <a:bodyPr wrap="none" lIns="0" tIns="0" rIns="0" bIns="0" rtlCol="0" anchor="t"/>
+          <a:lstStyle/>
+          <a:p>
+            <a:pPr algn="l" indent="0" marL="0">
+              <a:lnSpc>
+                <a:spcPts val="2284"/>
+              </a:lnSpc>
+              <a:buNone/>
+            </a:pPr>
+            <a:r>
+              <a:rPr lang="en-US" sz="1523" b="1" spc="76" kern="0" dirty="0">
+                <a:solidFill>
+                  <a:srgbClr val="00F0FF"/>
+                </a:solidFill>
+                <a:latin typeface="Malgun Gothic" pitchFamily="34" charset="0"/>
+                <a:ea typeface="Malgun Gothic" pitchFamily="34" charset="-122"/>
+                <a:cs typeface="Malgun Gothic" pitchFamily="34" charset="-120"/>
+              </a:rPr>
+              <a:t>REPOSITORY &amp; DOCS</a:t>
+            </a:r>
+            <a:endParaRPr lang="en-US" sz="1523" dirty="0"/>
+          </a:p>
+        </p:txBody>
+      </p:sp>
+      <p:sp>
+        <p:nvSpPr>
+          <p:cNvPr id="14" name="Text 12"/>
+          <p:cNvSpPr txBox="1"/>
+          <p:nvPr/>
+        </p:nvSpPr>
+        <p:spPr>
+          <a:xfrm>
+            <a:off x="7724943" y="5766938"/>
+            <a:ext cx="4030767" cy="364663"/>
+          </a:xfrm>
+          <a:prstGeom prst="rect">
+            <a:avLst/>
+          </a:prstGeom>
+          <a:noFill/>
+          <a:ln/>
+        </p:spPr>
+        <p:txBody>
+          <a:bodyPr wrap="none" lIns="0" tIns="0" rIns="0" bIns="0" rtlCol="0" anchor="t"/>
+          <a:lstStyle/>
+          <a:p>
+            <a:pPr algn="l" indent="0" marL="0">
+              <a:lnSpc>
+                <a:spcPts val="2871"/>
+              </a:lnSpc>
+              <a:buNone/>
+            </a:pPr>
+            <a:r>
+              <a:rPr lang="en-US" sz="1914" b="1" spc="-54" kern="0" dirty="0">
+                <a:solidFill>
+                  <a:srgbClr val="38BDF8"/>
+                </a:solidFill>
+                <a:latin typeface="Malgun Gothic" pitchFamily="34" charset="0"/>
+                <a:ea typeface="Malgun Gothic" pitchFamily="34" charset="-122"/>
+                <a:cs typeface="Malgun Gothic" pitchFamily="34" charset="-120"/>
+              </a:rPr>
+              <a:t>github.com/company/architecture</a:t>
+            </a:r>
+            <a:endParaRPr lang="en-US" sz="1914" dirty="0"/>
+          </a:p>
+        </p:txBody>
+      </p:sp>
     </p:spTree>
   </p:cSld>
   <p:clrMapOvr>
@@ -1346,16 +1881,9 @@
   <p:cSld name="Slide 2">
     <p:bg>
       <p:bgPr>
-        <a:blipFill dpi="0" rotWithShape="1">
-          <a:blip r:embed="rId1">
-            <a:lum/>
-          </a:blip>
-          <a:srcRect/>
-          <a:stretch>
-            <a:fillRect/>
-          </a:stretch>
-        </a:blipFill>
-        <a:effectLst/>
+        <a:solidFill>
+          <a:srgbClr val="4E92F5"/>
+        </a:solidFill>
       </p:bgPr>
     </p:bg>
     <p:spTree>
@@ -1372,6 +1900,1227 @@
           <a:chExt cx="0" cy="0"/>
         </a:xfrm>
       </p:grpSpPr>
+      <p:sp>
+        <p:nvSpPr>
+          <p:cNvPr id="2" name="Shape 0"/>
+          <p:cNvSpPr/>
+          <p:nvPr/>
+        </p:nvSpPr>
+        <p:spPr>
+          <a:xfrm>
+            <a:off x="552480" y="1638330"/>
+            <a:ext cx="1207831" cy="418521"/>
+          </a:xfrm>
+          <a:prstGeom prst="roundRect">
+            <a:avLst>
+              <a:gd name="adj" fmla="val 50011"/>
+            </a:avLst>
+          </a:prstGeom>
+          <a:solidFill>
+            <a:srgbClr val="38BDF8">
+              <a:alpha val="15000"/>
+            </a:srgbClr>
+          </a:solidFill>
+          <a:ln w="9525">
+            <a:solidFill>
+              <a:srgbClr val="38BDF8">
+                <a:alpha val="35000"/>
+              </a:srgbClr>
+            </a:solidFill>
+            <a:prstDash val="solid"/>
+          </a:ln>
+        </p:spPr>
+      </p:sp>
+      <p:sp>
+        <p:nvSpPr>
+          <p:cNvPr id="3" name="Text 1"/>
+          <p:cNvSpPr txBox="1"/>
+          <p:nvPr/>
+        </p:nvSpPr>
+        <p:spPr>
+          <a:xfrm>
+            <a:off x="676290" y="1681490"/>
+            <a:ext cx="1014893" cy="323149"/>
+          </a:xfrm>
+          <a:prstGeom prst="rect">
+            <a:avLst/>
+          </a:prstGeom>
+          <a:noFill/>
+          <a:ln/>
+        </p:spPr>
+        <p:txBody>
+          <a:bodyPr wrap="none" lIns="0" tIns="0" rIns="0" bIns="0" rtlCol="0" anchor="t"/>
+          <a:lstStyle/>
+          <a:p>
+            <a:pPr algn="l" indent="0" marL="0">
+              <a:lnSpc>
+                <a:spcPts val="2545"/>
+              </a:lnSpc>
+              <a:buNone/>
+            </a:pPr>
+            <a:r>
+              <a:rPr lang="en-US" sz="1697" b="1" spc="34" kern="0" dirty="0">
+                <a:solidFill>
+                  <a:srgbClr val="38BDF8"/>
+                </a:solidFill>
+                <a:latin typeface="Malgun Gothic" pitchFamily="34" charset="0"/>
+                <a:ea typeface="Malgun Gothic" pitchFamily="34" charset="-122"/>
+                <a:cs typeface="Malgun Gothic" pitchFamily="34" charset="-120"/>
+              </a:rPr>
+              <a:t>AGENDA</a:t>
+            </a:r>
+            <a:endParaRPr lang="en-US" sz="1697" dirty="0"/>
+          </a:p>
+        </p:txBody>
+      </p:sp>
+      <p:sp>
+        <p:nvSpPr>
+          <p:cNvPr id="4" name="Text 2"/>
+          <p:cNvSpPr txBox="1"/>
+          <p:nvPr/>
+        </p:nvSpPr>
+        <p:spPr>
+          <a:xfrm>
+            <a:off x="533370" y="2188982"/>
+            <a:ext cx="2693640" cy="621518"/>
+          </a:xfrm>
+          <a:prstGeom prst="rect">
+            <a:avLst/>
+          </a:prstGeom>
+          <a:noFill/>
+          <a:ln/>
+        </p:spPr>
+        <p:txBody>
+          <a:bodyPr wrap="none" lIns="0" tIns="0" rIns="0" bIns="0" rtlCol="0" anchor="t"/>
+          <a:lstStyle/>
+          <a:p>
+            <a:pPr algn="l" indent="0" marL="0">
+              <a:lnSpc>
+                <a:spcPts val="4894"/>
+              </a:lnSpc>
+              <a:buNone/>
+            </a:pPr>
+            <a:r>
+              <a:rPr lang="en-US" sz="3263" b="1" spc="261" kern="0" dirty="0">
+                <a:solidFill>
+                  <a:srgbClr val="FFFFFF"/>
+                </a:solidFill>
+                <a:latin typeface="Malgun Gothic" pitchFamily="34" charset="0"/>
+                <a:ea typeface="Malgun Gothic" pitchFamily="34" charset="-122"/>
+                <a:cs typeface="Malgun Gothic" pitchFamily="34" charset="-120"/>
+              </a:rPr>
+              <a:t>CONTENTS</a:t>
+            </a:r>
+            <a:endParaRPr lang="en-US" sz="3263" dirty="0"/>
+          </a:p>
+        </p:txBody>
+      </p:sp>
+      <p:sp>
+        <p:nvSpPr>
+          <p:cNvPr id="5" name="Text 3"/>
+          <p:cNvSpPr txBox="1"/>
+          <p:nvPr/>
+        </p:nvSpPr>
+        <p:spPr>
+          <a:xfrm>
+            <a:off x="533370" y="2882463"/>
+            <a:ext cx="2514600" cy="402336"/>
+          </a:xfrm>
+          <a:prstGeom prst="rect">
+            <a:avLst/>
+          </a:prstGeom>
+          <a:noFill/>
+          <a:ln/>
+        </p:spPr>
+        <p:txBody>
+          <a:bodyPr wrap="square" lIns="0" tIns="0" rIns="0" bIns="0" rtlCol="0" anchor="t"/>
+          <a:lstStyle/>
+          <a:p>
+            <a:pPr algn="l" indent="0" marL="0">
+              <a:lnSpc>
+                <a:spcPts val="1584"/>
+              </a:lnSpc>
+              <a:buNone/>
+            </a:pPr>
+            <a:r>
+              <a:rPr lang="en-US" sz="1056" spc="-54" kern="0" dirty="0">
+                <a:solidFill>
+                  <a:srgbClr val="94A3B8"/>
+                </a:solidFill>
+                <a:latin typeface="Malgun Gothic" pitchFamily="34" charset="0"/>
+                <a:ea typeface="Malgun Gothic" pitchFamily="34" charset="-122"/>
+                <a:cs typeface="Malgun Gothic" pitchFamily="34" charset="-120"/>
+              </a:rPr>
+              <a:t>동기 병목 극복부터</a:t>
+            </a:r>
+            <a:endParaRPr lang="en-US" sz="1056" dirty="0"/>
+          </a:p>
+          <a:p>
+            <a:pPr algn="l" indent="0" marL="0">
+              <a:lnSpc>
+                <a:spcPts val="1584"/>
+              </a:lnSpc>
+              <a:buNone/>
+            </a:pPr>
+            <a:r>
+              <a:rPr lang="en-US" sz="1056" spc="-54" kern="0" dirty="0">
+                <a:solidFill>
+                  <a:srgbClr val="94A3B8"/>
+                </a:solidFill>
+                <a:latin typeface="Malgun Gothic" pitchFamily="34" charset="0"/>
+                <a:ea typeface="Malgun Gothic" pitchFamily="34" charset="-122"/>
+                <a:cs typeface="Malgun Gothic" pitchFamily="34" charset="-120"/>
+              </a:rPr>
+              <a:t>프로덕션 튜닝까지 4단계</a:t>
+            </a:r>
+            <a:endParaRPr lang="en-US" sz="1056" dirty="0"/>
+          </a:p>
+        </p:txBody>
+      </p:sp>
+      <p:sp>
+        <p:nvSpPr>
+          <p:cNvPr id="6" name="Shape 4"/>
+          <p:cNvSpPr/>
+          <p:nvPr/>
+        </p:nvSpPr>
+        <p:spPr>
+          <a:xfrm>
+            <a:off x="552480" y="4686300"/>
+            <a:ext cx="95280" cy="95280"/>
+          </a:xfrm>
+          <a:prstGeom prst="roundRect">
+            <a:avLst>
+              <a:gd name="adj" fmla="val 50000"/>
+            </a:avLst>
+          </a:prstGeom>
+          <a:solidFill>
+            <a:srgbClr val="6366F1"/>
+          </a:solidFill>
+          <a:ln/>
+        </p:spPr>
+      </p:sp>
+      <p:sp>
+        <p:nvSpPr>
+          <p:cNvPr id="7" name="Shape 5"/>
+          <p:cNvSpPr/>
+          <p:nvPr/>
+        </p:nvSpPr>
+        <p:spPr>
+          <a:xfrm>
+            <a:off x="761970" y="4724430"/>
+            <a:ext cx="571500" cy="19020"/>
+          </a:xfrm>
+          <a:prstGeom prst="rect">
+            <a:avLst/>
+          </a:prstGeom>
+          <a:solidFill>
+            <a:srgbClr val="6366F1">
+              <a:alpha val="50000"/>
+            </a:srgbClr>
+          </a:solidFill>
+          <a:ln/>
+        </p:spPr>
+      </p:sp>
+      <p:sp>
+        <p:nvSpPr>
+          <p:cNvPr id="8" name="Shape 6"/>
+          <p:cNvSpPr/>
+          <p:nvPr/>
+        </p:nvSpPr>
+        <p:spPr>
+          <a:xfrm>
+            <a:off x="552480" y="4914900"/>
+            <a:ext cx="95280" cy="95280"/>
+          </a:xfrm>
+          <a:prstGeom prst="roundRect">
+            <a:avLst>
+              <a:gd name="adj" fmla="val 50000"/>
+            </a:avLst>
+          </a:prstGeom>
+          <a:solidFill>
+            <a:srgbClr val="38BDF8"/>
+          </a:solidFill>
+          <a:ln/>
+        </p:spPr>
+      </p:sp>
+      <p:sp>
+        <p:nvSpPr>
+          <p:cNvPr id="9" name="Shape 7"/>
+          <p:cNvSpPr/>
+          <p:nvPr/>
+        </p:nvSpPr>
+        <p:spPr>
+          <a:xfrm>
+            <a:off x="761970" y="4953030"/>
+            <a:ext cx="952530" cy="19020"/>
+          </a:xfrm>
+          <a:prstGeom prst="rect">
+            <a:avLst/>
+          </a:prstGeom>
+          <a:solidFill>
+            <a:srgbClr val="38BDF8">
+              <a:alpha val="60000"/>
+            </a:srgbClr>
+          </a:solidFill>
+          <a:ln/>
+        </p:spPr>
+      </p:sp>
+      <p:sp>
+        <p:nvSpPr>
+          <p:cNvPr id="10" name="Shape 8"/>
+          <p:cNvSpPr/>
+          <p:nvPr/>
+        </p:nvSpPr>
+        <p:spPr>
+          <a:xfrm>
+            <a:off x="552480" y="5143500"/>
+            <a:ext cx="95280" cy="95280"/>
+          </a:xfrm>
+          <a:prstGeom prst="roundRect">
+            <a:avLst>
+              <a:gd name="adj" fmla="val 50000"/>
+            </a:avLst>
+          </a:prstGeom>
+          <a:solidFill>
+            <a:srgbClr val="6366F1"/>
+          </a:solidFill>
+          <a:ln/>
+        </p:spPr>
+      </p:sp>
+      <p:sp>
+        <p:nvSpPr>
+          <p:cNvPr id="11" name="Shape 9"/>
+          <p:cNvSpPr/>
+          <p:nvPr/>
+        </p:nvSpPr>
+        <p:spPr>
+          <a:xfrm>
+            <a:off x="761970" y="5181630"/>
+            <a:ext cx="428671" cy="19020"/>
+          </a:xfrm>
+          <a:prstGeom prst="rect">
+            <a:avLst/>
+          </a:prstGeom>
+          <a:solidFill>
+            <a:srgbClr val="6366F1">
+              <a:alpha val="50000"/>
+            </a:srgbClr>
+          </a:solidFill>
+          <a:ln/>
+        </p:spPr>
+      </p:sp>
+      <p:sp>
+        <p:nvSpPr>
+          <p:cNvPr id="12" name="Shape 10"/>
+          <p:cNvSpPr/>
+          <p:nvPr/>
+        </p:nvSpPr>
+        <p:spPr>
+          <a:xfrm>
+            <a:off x="3486150" y="1163848"/>
+            <a:ext cx="4000500" cy="2188982"/>
+          </a:xfrm>
+          <a:prstGeom prst="roundRect">
+            <a:avLst>
+              <a:gd name="adj" fmla="val 6090"/>
+            </a:avLst>
+          </a:prstGeom>
+          <a:solidFill>
+            <a:srgbClr val="161E2E">
+              <a:alpha val="82000"/>
+            </a:srgbClr>
+          </a:solidFill>
+          <a:ln w="9525">
+            <a:solidFill>
+              <a:srgbClr val="FFFFFF">
+                <a:alpha val="9000"/>
+              </a:srgbClr>
+            </a:solidFill>
+            <a:prstDash val="solid"/>
+          </a:ln>
+        </p:spPr>
+      </p:sp>
+      <p:sp>
+        <p:nvSpPr>
+          <p:cNvPr id="13" name="Shape 11"/>
+          <p:cNvSpPr/>
+          <p:nvPr/>
+        </p:nvSpPr>
+        <p:spPr>
+          <a:xfrm>
+            <a:off x="3705240" y="1363919"/>
+            <a:ext cx="247620" cy="247620"/>
+          </a:xfrm>
+          <a:prstGeom prst="roundRect">
+            <a:avLst>
+              <a:gd name="adj" fmla="val 50000"/>
+            </a:avLst>
+          </a:prstGeom>
+          <a:solidFill>
+            <a:srgbClr val="00F0FF">
+              <a:alpha val="15000"/>
+            </a:srgbClr>
+          </a:solidFill>
+          <a:ln w="9525">
+            <a:solidFill>
+              <a:srgbClr val="00F0FF">
+                <a:alpha val="40000"/>
+              </a:srgbClr>
+            </a:solidFill>
+            <a:prstDash val="solid"/>
+          </a:ln>
+        </p:spPr>
+      </p:sp>
+      <p:sp>
+        <p:nvSpPr>
+          <p:cNvPr id="14" name="Text 12"/>
+          <p:cNvSpPr txBox="1"/>
+          <p:nvPr/>
+        </p:nvSpPr>
+        <p:spPr>
+          <a:xfrm>
+            <a:off x="3695730" y="1329355"/>
+            <a:ext cx="304770" cy="310805"/>
+          </a:xfrm>
+          <a:prstGeom prst="rect">
+            <a:avLst/>
+          </a:prstGeom>
+          <a:noFill/>
+          <a:ln/>
+        </p:spPr>
+        <p:txBody>
+          <a:bodyPr wrap="none" lIns="0" tIns="0" rIns="0" bIns="0" rtlCol="0" anchor="t"/>
+          <a:lstStyle/>
+          <a:p>
+            <a:pPr algn="l" indent="0" marL="0">
+              <a:lnSpc>
+                <a:spcPts val="2447"/>
+              </a:lnSpc>
+              <a:buNone/>
+            </a:pPr>
+            <a:r>
+              <a:rPr lang="en-US" sz="1631" b="1" spc="-54" kern="0" dirty="0">
+                <a:solidFill>
+                  <a:srgbClr val="00F0FF"/>
+                </a:solidFill>
+                <a:latin typeface="Malgun Gothic" pitchFamily="34" charset="0"/>
+                <a:ea typeface="Malgun Gothic" pitchFamily="34" charset="-122"/>
+                <a:cs typeface="Malgun Gothic" pitchFamily="34" charset="-120"/>
+              </a:rPr>
+              <a:t>01</a:t>
+            </a:r>
+            <a:endParaRPr lang="en-US" sz="1631" dirty="0"/>
+          </a:p>
+        </p:txBody>
+      </p:sp>
+      <p:sp>
+        <p:nvSpPr>
+          <p:cNvPr id="15" name="Text 13"/>
+          <p:cNvSpPr txBox="1"/>
+          <p:nvPr/>
+        </p:nvSpPr>
+        <p:spPr>
+          <a:xfrm>
+            <a:off x="3686221" y="1684691"/>
+            <a:ext cx="3866358" cy="406085"/>
+          </a:xfrm>
+          <a:prstGeom prst="rect">
+            <a:avLst/>
+          </a:prstGeom>
+          <a:noFill/>
+          <a:ln/>
+        </p:spPr>
+        <p:txBody>
+          <a:bodyPr wrap="none" lIns="0" tIns="0" rIns="0" bIns="0" rtlCol="0" anchor="t"/>
+          <a:lstStyle/>
+          <a:p>
+            <a:pPr algn="l" indent="0" marL="0">
+              <a:lnSpc>
+                <a:spcPts val="3197"/>
+              </a:lnSpc>
+              <a:buNone/>
+            </a:pPr>
+            <a:r>
+              <a:rPr lang="en-US" sz="2132" b="1" spc="-43" kern="0" dirty="0">
+                <a:solidFill>
+                  <a:srgbClr val="FFFFFF"/>
+                </a:solidFill>
+                <a:latin typeface="Malgun Gothic" pitchFamily="34" charset="0"/>
+                <a:ea typeface="Malgun Gothic" pitchFamily="34" charset="-122"/>
+                <a:cs typeface="Malgun Gothic" pitchFamily="34" charset="-120"/>
+              </a:rPr>
+              <a:t>동기 호출의 병목 한계</a:t>
+            </a:r>
+            <a:endParaRPr lang="en-US" sz="2132" dirty="0"/>
+          </a:p>
+        </p:txBody>
+      </p:sp>
+      <p:sp>
+        <p:nvSpPr>
+          <p:cNvPr id="16" name="Text 14"/>
+          <p:cNvSpPr txBox="1"/>
+          <p:nvPr/>
+        </p:nvSpPr>
+        <p:spPr>
+          <a:xfrm>
+            <a:off x="3686221" y="2150577"/>
+            <a:ext cx="3600450" cy="1001817"/>
+          </a:xfrm>
+          <a:prstGeom prst="rect">
+            <a:avLst/>
+          </a:prstGeom>
+          <a:noFill/>
+          <a:ln/>
+        </p:spPr>
+        <p:txBody>
+          <a:bodyPr wrap="square" lIns="0" tIns="0" rIns="0" bIns="0" rtlCol="0" anchor="t"/>
+          <a:lstStyle/>
+          <a:p>
+            <a:pPr algn="l" indent="0" marL="0">
+              <a:lnSpc>
+                <a:spcPts val="2630"/>
+              </a:lnSpc>
+              <a:buNone/>
+            </a:pPr>
+            <a:r>
+              <a:rPr lang="en-US" sz="1697" spc="-54" kern="0" dirty="0">
+                <a:solidFill>
+                  <a:srgbClr val="94A3B8"/>
+                </a:solidFill>
+                <a:latin typeface="Malgun Gothic" pitchFamily="34" charset="0"/>
+                <a:ea typeface="Malgun Gothic" pitchFamily="34" charset="-122"/>
+                <a:cs typeface="Malgun Gothic" pitchFamily="34" charset="-120"/>
+              </a:rPr>
+              <a:t>• REST 체인에 따른 연쇄 지연</a:t>
+            </a:r>
+            <a:endParaRPr lang="en-US" sz="1697" dirty="0"/>
+          </a:p>
+          <a:p>
+            <a:pPr algn="l" indent="0" marL="0">
+              <a:lnSpc>
+                <a:spcPts val="2630"/>
+              </a:lnSpc>
+              <a:buNone/>
+            </a:pPr>
+            <a:r>
+              <a:rPr lang="en-US" sz="1697" spc="-54" kern="0" dirty="0">
+                <a:solidFill>
+                  <a:srgbClr val="94A3B8"/>
+                </a:solidFill>
+                <a:latin typeface="Malgun Gothic" pitchFamily="34" charset="0"/>
+                <a:ea typeface="Malgun Gothic" pitchFamily="34" charset="-122"/>
+                <a:cs typeface="Malgun Gothic" pitchFamily="34" charset="-120"/>
+              </a:rPr>
+              <a:t>• 서비스 간 강한 결합도 위험</a:t>
+            </a:r>
+            <a:endParaRPr lang="en-US" sz="1697" dirty="0"/>
+          </a:p>
+          <a:p>
+            <a:pPr algn="l" indent="0" marL="0">
+              <a:lnSpc>
+                <a:spcPts val="2630"/>
+              </a:lnSpc>
+              <a:buNone/>
+            </a:pPr>
+            <a:r>
+              <a:rPr lang="en-US" sz="1697" spc="-54" kern="0" dirty="0">
+                <a:solidFill>
+                  <a:srgbClr val="94A3B8"/>
+                </a:solidFill>
+                <a:latin typeface="Malgun Gothic" pitchFamily="34" charset="0"/>
+                <a:ea typeface="Malgun Gothic" pitchFamily="34" charset="-122"/>
+                <a:cs typeface="Malgun Gothic" pitchFamily="34" charset="-120"/>
+              </a:rPr>
+              <a:t>• 부분 장애 시 전체 시스템 마비</a:t>
+            </a:r>
+            <a:endParaRPr lang="en-US" sz="1697" dirty="0"/>
+          </a:p>
+        </p:txBody>
+      </p:sp>
+      <p:sp>
+        <p:nvSpPr>
+          <p:cNvPr id="17" name="Shape 15"/>
+          <p:cNvSpPr/>
+          <p:nvPr/>
+        </p:nvSpPr>
+        <p:spPr>
+          <a:xfrm>
+            <a:off x="7639080" y="1163848"/>
+            <a:ext cx="4000500" cy="2188982"/>
+          </a:xfrm>
+          <a:prstGeom prst="roundRect">
+            <a:avLst>
+              <a:gd name="adj" fmla="val 6090"/>
+            </a:avLst>
+          </a:prstGeom>
+          <a:solidFill>
+            <a:srgbClr val="161E2E">
+              <a:alpha val="82000"/>
+            </a:srgbClr>
+          </a:solidFill>
+          <a:ln w="9525">
+            <a:solidFill>
+              <a:srgbClr val="FFFFFF">
+                <a:alpha val="9000"/>
+              </a:srgbClr>
+            </a:solidFill>
+            <a:prstDash val="solid"/>
+          </a:ln>
+        </p:spPr>
+      </p:sp>
+      <p:sp>
+        <p:nvSpPr>
+          <p:cNvPr id="18" name="Shape 16"/>
+          <p:cNvSpPr/>
+          <p:nvPr/>
+        </p:nvSpPr>
+        <p:spPr>
+          <a:xfrm>
+            <a:off x="7858171" y="1363919"/>
+            <a:ext cx="247620" cy="247620"/>
+          </a:xfrm>
+          <a:prstGeom prst="roundRect">
+            <a:avLst>
+              <a:gd name="adj" fmla="val 50000"/>
+            </a:avLst>
+          </a:prstGeom>
+          <a:solidFill>
+            <a:srgbClr val="A78BFA">
+              <a:alpha val="15000"/>
+            </a:srgbClr>
+          </a:solidFill>
+          <a:ln w="9525">
+            <a:solidFill>
+              <a:srgbClr val="A78BFA">
+                <a:alpha val="40000"/>
+              </a:srgbClr>
+            </a:solidFill>
+            <a:prstDash val="solid"/>
+          </a:ln>
+        </p:spPr>
+      </p:sp>
+      <p:sp>
+        <p:nvSpPr>
+          <p:cNvPr id="19" name="Text 17"/>
+          <p:cNvSpPr txBox="1"/>
+          <p:nvPr/>
+        </p:nvSpPr>
+        <p:spPr>
+          <a:xfrm>
+            <a:off x="7848570" y="1329355"/>
+            <a:ext cx="304770" cy="310805"/>
+          </a:xfrm>
+          <a:prstGeom prst="rect">
+            <a:avLst/>
+          </a:prstGeom>
+          <a:noFill/>
+          <a:ln/>
+        </p:spPr>
+        <p:txBody>
+          <a:bodyPr wrap="none" lIns="0" tIns="0" rIns="0" bIns="0" rtlCol="0" anchor="t"/>
+          <a:lstStyle/>
+          <a:p>
+            <a:pPr algn="l" indent="0" marL="0">
+              <a:lnSpc>
+                <a:spcPts val="2447"/>
+              </a:lnSpc>
+              <a:buNone/>
+            </a:pPr>
+            <a:r>
+              <a:rPr lang="en-US" sz="1631" b="1" spc="-54" kern="0" dirty="0">
+                <a:solidFill>
+                  <a:srgbClr val="A78BFA"/>
+                </a:solidFill>
+                <a:latin typeface="Malgun Gothic" pitchFamily="34" charset="0"/>
+                <a:ea typeface="Malgun Gothic" pitchFamily="34" charset="-122"/>
+                <a:cs typeface="Malgun Gothic" pitchFamily="34" charset="-120"/>
+              </a:rPr>
+              <a:t>02</a:t>
+            </a:r>
+            <a:endParaRPr lang="en-US" sz="1631" dirty="0"/>
+          </a:p>
+        </p:txBody>
+      </p:sp>
+      <p:sp>
+        <p:nvSpPr>
+          <p:cNvPr id="20" name="Text 18"/>
+          <p:cNvSpPr txBox="1"/>
+          <p:nvPr/>
+        </p:nvSpPr>
+        <p:spPr>
+          <a:xfrm>
+            <a:off x="7839060" y="1684691"/>
+            <a:ext cx="3866358" cy="406085"/>
+          </a:xfrm>
+          <a:prstGeom prst="rect">
+            <a:avLst/>
+          </a:prstGeom>
+          <a:noFill/>
+          <a:ln/>
+        </p:spPr>
+        <p:txBody>
+          <a:bodyPr wrap="none" lIns="0" tIns="0" rIns="0" bIns="0" rtlCol="0" anchor="t"/>
+          <a:lstStyle/>
+          <a:p>
+            <a:pPr algn="l" indent="0" marL="0">
+              <a:lnSpc>
+                <a:spcPts val="3197"/>
+              </a:lnSpc>
+              <a:buNone/>
+            </a:pPr>
+            <a:r>
+              <a:rPr lang="en-US" sz="2132" b="1" spc="-43" kern="0" dirty="0">
+                <a:solidFill>
+                  <a:srgbClr val="FFFFFF"/>
+                </a:solidFill>
+                <a:latin typeface="Malgun Gothic" pitchFamily="34" charset="0"/>
+                <a:ea typeface="Malgun Gothic" pitchFamily="34" charset="-122"/>
+                <a:cs typeface="Malgun Gothic" pitchFamily="34" charset="-120"/>
+              </a:rPr>
+              <a:t>이벤트 브로커 스트리밍</a:t>
+            </a:r>
+            <a:endParaRPr lang="en-US" sz="2132" dirty="0"/>
+          </a:p>
+        </p:txBody>
+      </p:sp>
+      <p:sp>
+        <p:nvSpPr>
+          <p:cNvPr id="21" name="Text 19"/>
+          <p:cNvSpPr txBox="1"/>
+          <p:nvPr/>
+        </p:nvSpPr>
+        <p:spPr>
+          <a:xfrm>
+            <a:off x="7839060" y="2150577"/>
+            <a:ext cx="3600450" cy="1001817"/>
+          </a:xfrm>
+          <a:prstGeom prst="rect">
+            <a:avLst/>
+          </a:prstGeom>
+          <a:noFill/>
+          <a:ln/>
+        </p:spPr>
+        <p:txBody>
+          <a:bodyPr wrap="square" lIns="0" tIns="0" rIns="0" bIns="0" rtlCol="0" anchor="t"/>
+          <a:lstStyle/>
+          <a:p>
+            <a:pPr algn="l" indent="0" marL="0">
+              <a:lnSpc>
+                <a:spcPts val="2630"/>
+              </a:lnSpc>
+              <a:buNone/>
+            </a:pPr>
+            <a:r>
+              <a:rPr lang="en-US" sz="1697" spc="-54" kern="0" dirty="0">
+                <a:solidFill>
+                  <a:srgbClr val="94A3B8"/>
+                </a:solidFill>
+                <a:latin typeface="Malgun Gothic" pitchFamily="34" charset="0"/>
+                <a:ea typeface="Malgun Gothic" pitchFamily="34" charset="-122"/>
+                <a:cs typeface="Malgun Gothic" pitchFamily="34" charset="-120"/>
+              </a:rPr>
+              <a:t>• Kafka 파티셔닝 및 순서 보장</a:t>
+            </a:r>
+            <a:endParaRPr lang="en-US" sz="1697" dirty="0"/>
+          </a:p>
+          <a:p>
+            <a:pPr algn="l" indent="0" marL="0">
+              <a:lnSpc>
+                <a:spcPts val="2630"/>
+              </a:lnSpc>
+              <a:buNone/>
+            </a:pPr>
+            <a:r>
+              <a:rPr lang="en-US" sz="1697" spc="-54" kern="0" dirty="0">
+                <a:solidFill>
+                  <a:srgbClr val="94A3B8"/>
+                </a:solidFill>
+                <a:latin typeface="Malgun Gothic" pitchFamily="34" charset="0"/>
+                <a:ea typeface="Malgun Gothic" pitchFamily="34" charset="-122"/>
+                <a:cs typeface="Malgun Gothic" pitchFamily="34" charset="-120"/>
+              </a:rPr>
+              <a:t>• Idempotent Consumer 설계</a:t>
+            </a:r>
+            <a:endParaRPr lang="en-US" sz="1697" dirty="0"/>
+          </a:p>
+          <a:p>
+            <a:pPr algn="l" indent="0" marL="0">
+              <a:lnSpc>
+                <a:spcPts val="2630"/>
+              </a:lnSpc>
+              <a:buNone/>
+            </a:pPr>
+            <a:r>
+              <a:rPr lang="en-US" sz="1697" spc="-54" kern="0" dirty="0">
+                <a:solidFill>
+                  <a:srgbClr val="94A3B8"/>
+                </a:solidFill>
+                <a:latin typeface="Malgun Gothic" pitchFamily="34" charset="0"/>
+                <a:ea typeface="Malgun Gothic" pitchFamily="34" charset="-122"/>
+                <a:cs typeface="Malgun Gothic" pitchFamily="34" charset="-120"/>
+              </a:rPr>
+              <a:t>• Transactional Outbox 패턴</a:t>
+            </a:r>
+            <a:endParaRPr lang="en-US" sz="1697" dirty="0"/>
+          </a:p>
+        </p:txBody>
+      </p:sp>
+      <p:sp>
+        <p:nvSpPr>
+          <p:cNvPr id="22" name="Shape 20"/>
+          <p:cNvSpPr/>
+          <p:nvPr/>
+        </p:nvSpPr>
+        <p:spPr>
+          <a:xfrm>
+            <a:off x="3486150" y="3505170"/>
+            <a:ext cx="4000500" cy="2188982"/>
+          </a:xfrm>
+          <a:prstGeom prst="roundRect">
+            <a:avLst>
+              <a:gd name="adj" fmla="val 6090"/>
+            </a:avLst>
+          </a:prstGeom>
+          <a:solidFill>
+            <a:srgbClr val="161E2E">
+              <a:alpha val="82000"/>
+            </a:srgbClr>
+          </a:solidFill>
+          <a:ln w="9525">
+            <a:solidFill>
+              <a:srgbClr val="FFFFFF">
+                <a:alpha val="9000"/>
+              </a:srgbClr>
+            </a:solidFill>
+            <a:prstDash val="solid"/>
+          </a:ln>
+        </p:spPr>
+      </p:sp>
+      <p:sp>
+        <p:nvSpPr>
+          <p:cNvPr id="23" name="Shape 21"/>
+          <p:cNvSpPr/>
+          <p:nvPr/>
+        </p:nvSpPr>
+        <p:spPr>
+          <a:xfrm>
+            <a:off x="3705240" y="3705240"/>
+            <a:ext cx="247620" cy="247620"/>
+          </a:xfrm>
+          <a:prstGeom prst="roundRect">
+            <a:avLst>
+              <a:gd name="adj" fmla="val 50000"/>
+            </a:avLst>
+          </a:prstGeom>
+          <a:solidFill>
+            <a:srgbClr val="38BDF8">
+              <a:alpha val="15000"/>
+            </a:srgbClr>
+          </a:solidFill>
+          <a:ln w="9525">
+            <a:solidFill>
+              <a:srgbClr val="38BDF8">
+                <a:alpha val="40000"/>
+              </a:srgbClr>
+            </a:solidFill>
+            <a:prstDash val="solid"/>
+          </a:ln>
+        </p:spPr>
+      </p:sp>
+      <p:sp>
+        <p:nvSpPr>
+          <p:cNvPr id="24" name="Text 22"/>
+          <p:cNvSpPr txBox="1"/>
+          <p:nvPr/>
+        </p:nvSpPr>
+        <p:spPr>
+          <a:xfrm>
+            <a:off x="3695730" y="3670767"/>
+            <a:ext cx="304770" cy="310805"/>
+          </a:xfrm>
+          <a:prstGeom prst="rect">
+            <a:avLst/>
+          </a:prstGeom>
+          <a:noFill/>
+          <a:ln/>
+        </p:spPr>
+        <p:txBody>
+          <a:bodyPr wrap="none" lIns="0" tIns="0" rIns="0" bIns="0" rtlCol="0" anchor="t"/>
+          <a:lstStyle/>
+          <a:p>
+            <a:pPr algn="l" indent="0" marL="0">
+              <a:lnSpc>
+                <a:spcPts val="2447"/>
+              </a:lnSpc>
+              <a:buNone/>
+            </a:pPr>
+            <a:r>
+              <a:rPr lang="en-US" sz="1631" b="1" spc="-54" kern="0" dirty="0">
+                <a:solidFill>
+                  <a:srgbClr val="38BDF8"/>
+                </a:solidFill>
+                <a:latin typeface="Malgun Gothic" pitchFamily="34" charset="0"/>
+                <a:ea typeface="Malgun Gothic" pitchFamily="34" charset="-122"/>
+                <a:cs typeface="Malgun Gothic" pitchFamily="34" charset="-120"/>
+              </a:rPr>
+              <a:t>03</a:t>
+            </a:r>
+            <a:endParaRPr lang="en-US" sz="1631" dirty="0"/>
+          </a:p>
+        </p:txBody>
+      </p:sp>
+      <p:sp>
+        <p:nvSpPr>
+          <p:cNvPr id="25" name="Text 23"/>
+          <p:cNvSpPr txBox="1"/>
+          <p:nvPr/>
+        </p:nvSpPr>
+        <p:spPr>
+          <a:xfrm>
+            <a:off x="3686221" y="4026012"/>
+            <a:ext cx="3866358" cy="406085"/>
+          </a:xfrm>
+          <a:prstGeom prst="rect">
+            <a:avLst/>
+          </a:prstGeom>
+          <a:noFill/>
+          <a:ln/>
+        </p:spPr>
+        <p:txBody>
+          <a:bodyPr wrap="none" lIns="0" tIns="0" rIns="0" bIns="0" rtlCol="0" anchor="t"/>
+          <a:lstStyle/>
+          <a:p>
+            <a:pPr algn="l" indent="0" marL="0">
+              <a:lnSpc>
+                <a:spcPts val="3197"/>
+              </a:lnSpc>
+              <a:buNone/>
+            </a:pPr>
+            <a:r>
+              <a:rPr lang="en-US" sz="2132" b="1" spc="-43" kern="0" dirty="0">
+                <a:solidFill>
+                  <a:srgbClr val="FFFFFF"/>
+                </a:solidFill>
+                <a:latin typeface="Malgun Gothic" pitchFamily="34" charset="0"/>
+                <a:ea typeface="Malgun Gothic" pitchFamily="34" charset="-122"/>
+                <a:cs typeface="Malgun Gothic" pitchFamily="34" charset="-120"/>
+              </a:rPr>
+              <a:t>Saga 패턴 분산 트랜잭션</a:t>
+            </a:r>
+            <a:endParaRPr lang="en-US" sz="2132" dirty="0"/>
+          </a:p>
+        </p:txBody>
+      </p:sp>
+      <p:sp>
+        <p:nvSpPr>
+          <p:cNvPr id="26" name="Text 24"/>
+          <p:cNvSpPr txBox="1"/>
+          <p:nvPr/>
+        </p:nvSpPr>
+        <p:spPr>
+          <a:xfrm>
+            <a:off x="3686221" y="4491990"/>
+            <a:ext cx="3600450" cy="1001817"/>
+          </a:xfrm>
+          <a:prstGeom prst="rect">
+            <a:avLst/>
+          </a:prstGeom>
+          <a:noFill/>
+          <a:ln/>
+        </p:spPr>
+        <p:txBody>
+          <a:bodyPr wrap="square" lIns="0" tIns="0" rIns="0" bIns="0" rtlCol="0" anchor="t"/>
+          <a:lstStyle/>
+          <a:p>
+            <a:pPr algn="l" indent="0" marL="0">
+              <a:lnSpc>
+                <a:spcPts val="2630"/>
+              </a:lnSpc>
+              <a:buNone/>
+            </a:pPr>
+            <a:r>
+              <a:rPr lang="en-US" sz="1697" spc="-54" kern="0" dirty="0">
+                <a:solidFill>
+                  <a:srgbClr val="94A3B8"/>
+                </a:solidFill>
+                <a:latin typeface="Malgun Gothic" pitchFamily="34" charset="0"/>
+                <a:ea typeface="Malgun Gothic" pitchFamily="34" charset="-122"/>
+                <a:cs typeface="Malgun Gothic" pitchFamily="34" charset="-120"/>
+              </a:rPr>
+              <a:t>• 오케스트레이션 vs 코레오그래피</a:t>
+            </a:r>
+            <a:endParaRPr lang="en-US" sz="1697" dirty="0"/>
+          </a:p>
+          <a:p>
+            <a:pPr algn="l" indent="0" marL="0">
+              <a:lnSpc>
+                <a:spcPts val="2630"/>
+              </a:lnSpc>
+              <a:buNone/>
+            </a:pPr>
+            <a:r>
+              <a:rPr lang="en-US" sz="1697" spc="-54" kern="0" dirty="0">
+                <a:solidFill>
+                  <a:srgbClr val="94A3B8"/>
+                </a:solidFill>
+                <a:latin typeface="Malgun Gothic" pitchFamily="34" charset="0"/>
+                <a:ea typeface="Malgun Gothic" pitchFamily="34" charset="-122"/>
+                <a:cs typeface="Malgun Gothic" pitchFamily="34" charset="-120"/>
+              </a:rPr>
+              <a:t>• 보상 트랜잭션(Compensation)</a:t>
+            </a:r>
+            <a:endParaRPr lang="en-US" sz="1697" dirty="0"/>
+          </a:p>
+          <a:p>
+            <a:pPr algn="l" indent="0" marL="0">
+              <a:lnSpc>
+                <a:spcPts val="2630"/>
+              </a:lnSpc>
+              <a:buNone/>
+            </a:pPr>
+            <a:r>
+              <a:rPr lang="en-US" sz="1697" spc="-54" kern="0" dirty="0">
+                <a:solidFill>
+                  <a:srgbClr val="94A3B8"/>
+                </a:solidFill>
+                <a:latin typeface="Malgun Gothic" pitchFamily="34" charset="0"/>
+                <a:ea typeface="Malgun Gothic" pitchFamily="34" charset="-122"/>
+                <a:cs typeface="Malgun Gothic" pitchFamily="34" charset="-120"/>
+              </a:rPr>
+              <a:t>• 최종 일관성(Eventual Consistency)</a:t>
+            </a:r>
+            <a:endParaRPr lang="en-US" sz="1697" dirty="0"/>
+          </a:p>
+        </p:txBody>
+      </p:sp>
+      <p:sp>
+        <p:nvSpPr>
+          <p:cNvPr id="27" name="Shape 25"/>
+          <p:cNvSpPr/>
+          <p:nvPr/>
+        </p:nvSpPr>
+        <p:spPr>
+          <a:xfrm>
+            <a:off x="7639080" y="3505170"/>
+            <a:ext cx="4000500" cy="2188982"/>
+          </a:xfrm>
+          <a:prstGeom prst="roundRect">
+            <a:avLst>
+              <a:gd name="adj" fmla="val 6090"/>
+            </a:avLst>
+          </a:prstGeom>
+          <a:solidFill>
+            <a:srgbClr val="161E2E">
+              <a:alpha val="82000"/>
+            </a:srgbClr>
+          </a:solidFill>
+          <a:ln w="9525">
+            <a:solidFill>
+              <a:srgbClr val="FFFFFF">
+                <a:alpha val="9000"/>
+              </a:srgbClr>
+            </a:solidFill>
+            <a:prstDash val="solid"/>
+          </a:ln>
+        </p:spPr>
+      </p:sp>
+      <p:sp>
+        <p:nvSpPr>
+          <p:cNvPr id="28" name="Shape 26"/>
+          <p:cNvSpPr/>
+          <p:nvPr/>
+        </p:nvSpPr>
+        <p:spPr>
+          <a:xfrm>
+            <a:off x="7858171" y="3705240"/>
+            <a:ext cx="247620" cy="247620"/>
+          </a:xfrm>
+          <a:prstGeom prst="roundRect">
+            <a:avLst>
+              <a:gd name="adj" fmla="val 50000"/>
+            </a:avLst>
+          </a:prstGeom>
+          <a:solidFill>
+            <a:srgbClr val="34D399">
+              <a:alpha val="15000"/>
+            </a:srgbClr>
+          </a:solidFill>
+          <a:ln w="9525">
+            <a:solidFill>
+              <a:srgbClr val="34D399">
+                <a:alpha val="40000"/>
+              </a:srgbClr>
+            </a:solidFill>
+            <a:prstDash val="solid"/>
+          </a:ln>
+        </p:spPr>
+      </p:sp>
+      <p:sp>
+        <p:nvSpPr>
+          <p:cNvPr id="29" name="Text 27"/>
+          <p:cNvSpPr txBox="1"/>
+          <p:nvPr/>
+        </p:nvSpPr>
+        <p:spPr>
+          <a:xfrm>
+            <a:off x="7848570" y="3670767"/>
+            <a:ext cx="304770" cy="310805"/>
+          </a:xfrm>
+          <a:prstGeom prst="rect">
+            <a:avLst/>
+          </a:prstGeom>
+          <a:noFill/>
+          <a:ln/>
+        </p:spPr>
+        <p:txBody>
+          <a:bodyPr wrap="none" lIns="0" tIns="0" rIns="0" bIns="0" rtlCol="0" anchor="t"/>
+          <a:lstStyle/>
+          <a:p>
+            <a:pPr algn="l" indent="0" marL="0">
+              <a:lnSpc>
+                <a:spcPts val="2447"/>
+              </a:lnSpc>
+              <a:buNone/>
+            </a:pPr>
+            <a:r>
+              <a:rPr lang="en-US" sz="1631" b="1" spc="-54" kern="0" dirty="0">
+                <a:solidFill>
+                  <a:srgbClr val="34D399"/>
+                </a:solidFill>
+                <a:latin typeface="Malgun Gothic" pitchFamily="34" charset="0"/>
+                <a:ea typeface="Malgun Gothic" pitchFamily="34" charset="-122"/>
+                <a:cs typeface="Malgun Gothic" pitchFamily="34" charset="-120"/>
+              </a:rPr>
+              <a:t>04</a:t>
+            </a:r>
+            <a:endParaRPr lang="en-US" sz="1631" dirty="0"/>
+          </a:p>
+        </p:txBody>
+      </p:sp>
+      <p:sp>
+        <p:nvSpPr>
+          <p:cNvPr id="30" name="Text 28"/>
+          <p:cNvSpPr txBox="1"/>
+          <p:nvPr/>
+        </p:nvSpPr>
+        <p:spPr>
+          <a:xfrm>
+            <a:off x="7839060" y="4026012"/>
+            <a:ext cx="3866358" cy="406085"/>
+          </a:xfrm>
+          <a:prstGeom prst="rect">
+            <a:avLst/>
+          </a:prstGeom>
+          <a:noFill/>
+          <a:ln/>
+        </p:spPr>
+        <p:txBody>
+          <a:bodyPr wrap="none" lIns="0" tIns="0" rIns="0" bIns="0" rtlCol="0" anchor="t"/>
+          <a:lstStyle/>
+          <a:p>
+            <a:pPr algn="l" indent="0" marL="0">
+              <a:lnSpc>
+                <a:spcPts val="3197"/>
+              </a:lnSpc>
+              <a:buNone/>
+            </a:pPr>
+            <a:r>
+              <a:rPr lang="en-US" sz="2132" b="1" spc="-43" kern="0" dirty="0">
+                <a:solidFill>
+                  <a:srgbClr val="FFFFFF"/>
+                </a:solidFill>
+                <a:latin typeface="Malgun Gothic" pitchFamily="34" charset="0"/>
+                <a:ea typeface="Malgun Gothic" pitchFamily="34" charset="-122"/>
+                <a:cs typeface="Malgun Gothic" pitchFamily="34" charset="-120"/>
+              </a:rPr>
+              <a:t>모니터링 &amp; 프로덕션 튜닝</a:t>
+            </a:r>
+            <a:endParaRPr lang="en-US" sz="2132" dirty="0"/>
+          </a:p>
+        </p:txBody>
+      </p:sp>
+      <p:sp>
+        <p:nvSpPr>
+          <p:cNvPr id="31" name="Text 29"/>
+          <p:cNvSpPr txBox="1"/>
+          <p:nvPr/>
+        </p:nvSpPr>
+        <p:spPr>
+          <a:xfrm>
+            <a:off x="7839060" y="4491990"/>
+            <a:ext cx="3600450" cy="1001817"/>
+          </a:xfrm>
+          <a:prstGeom prst="rect">
+            <a:avLst/>
+          </a:prstGeom>
+          <a:noFill/>
+          <a:ln/>
+        </p:spPr>
+        <p:txBody>
+          <a:bodyPr wrap="square" lIns="0" tIns="0" rIns="0" bIns="0" rtlCol="0" anchor="t"/>
+          <a:lstStyle/>
+          <a:p>
+            <a:pPr algn="l" indent="0" marL="0">
+              <a:lnSpc>
+                <a:spcPts val="2630"/>
+              </a:lnSpc>
+              <a:buNone/>
+            </a:pPr>
+            <a:r>
+              <a:rPr lang="en-US" sz="1697" spc="-54" kern="0" dirty="0">
+                <a:solidFill>
+                  <a:srgbClr val="94A3B8"/>
+                </a:solidFill>
+                <a:latin typeface="Malgun Gothic" pitchFamily="34" charset="0"/>
+                <a:ea typeface="Malgun Gothic" pitchFamily="34" charset="-122"/>
+                <a:cs typeface="Malgun Gothic" pitchFamily="34" charset="-120"/>
+              </a:rPr>
+              <a:t>• OpenTelemetry 분산 추적</a:t>
+            </a:r>
+            <a:endParaRPr lang="en-US" sz="1697" dirty="0"/>
+          </a:p>
+          <a:p>
+            <a:pPr algn="l" indent="0" marL="0">
+              <a:lnSpc>
+                <a:spcPts val="2630"/>
+              </a:lnSpc>
+              <a:buNone/>
+            </a:pPr>
+            <a:r>
+              <a:rPr lang="en-US" sz="1697" spc="-54" kern="0" dirty="0">
+                <a:solidFill>
+                  <a:srgbClr val="94A3B8"/>
+                </a:solidFill>
+                <a:latin typeface="Malgun Gothic" pitchFamily="34" charset="0"/>
+                <a:ea typeface="Malgun Gothic" pitchFamily="34" charset="-122"/>
+                <a:cs typeface="Malgun Gothic" pitchFamily="34" charset="-120"/>
+              </a:rPr>
+              <a:t>• 컨슈머 랙 자동 오토스케일링</a:t>
+            </a:r>
+            <a:endParaRPr lang="en-US" sz="1697" dirty="0"/>
+          </a:p>
+          <a:p>
+            <a:pPr algn="l" indent="0" marL="0">
+              <a:lnSpc>
+                <a:spcPts val="2630"/>
+              </a:lnSpc>
+              <a:buNone/>
+            </a:pPr>
+            <a:r>
+              <a:rPr lang="en-US" sz="1697" spc="-54" kern="0" dirty="0">
+                <a:solidFill>
+                  <a:srgbClr val="94A3B8"/>
+                </a:solidFill>
+                <a:latin typeface="Malgun Gothic" pitchFamily="34" charset="0"/>
+                <a:ea typeface="Malgun Gothic" pitchFamily="34" charset="-122"/>
+                <a:cs typeface="Malgun Gothic" pitchFamily="34" charset="-120"/>
+              </a:rPr>
+              <a:t>• 데드레터 큐(DLQ) 장애 격리</a:t>
+            </a:r>
+            <a:endParaRPr lang="en-US" sz="1697" dirty="0"/>
+          </a:p>
+        </p:txBody>
+      </p:sp>
     </p:spTree>
   </p:cSld>
   <p:clrMapOvr>
@@ -1385,16 +3134,9 @@
   <p:cSld name="Slide 3">
     <p:bg>
       <p:bgPr>
-        <a:blipFill dpi="0" rotWithShape="1">
-          <a:blip r:embed="rId1">
-            <a:lum/>
-          </a:blip>
-          <a:srcRect/>
-          <a:stretch>
-            <a:fillRect/>
-          </a:stretch>
-        </a:blipFill>
-        <a:effectLst/>
+        <a:solidFill>
+          <a:srgbClr val="4E92F5"/>
+        </a:solidFill>
       </p:bgPr>
     </p:bg>
     <p:spTree>
@@ -1411,6 +3153,1153 @@
           <a:chExt cx="0" cy="0"/>
         </a:xfrm>
       </p:grpSpPr>
+      <p:sp>
+        <p:nvSpPr>
+          <p:cNvPr id="2" name="Shape 0"/>
+          <p:cNvSpPr/>
+          <p:nvPr/>
+        </p:nvSpPr>
+        <p:spPr>
+          <a:xfrm>
+            <a:off x="4742901" y="1012881"/>
+            <a:ext cx="2706350" cy="418521"/>
+          </a:xfrm>
+          <a:prstGeom prst="roundRect">
+            <a:avLst>
+              <a:gd name="adj" fmla="val 50011"/>
+            </a:avLst>
+          </a:prstGeom>
+          <a:solidFill>
+            <a:srgbClr val="F87171">
+              <a:alpha val="15000"/>
+            </a:srgbClr>
+          </a:solidFill>
+          <a:ln w="9525">
+            <a:solidFill>
+              <a:srgbClr val="F87171">
+                <a:alpha val="35000"/>
+              </a:srgbClr>
+            </a:solidFill>
+            <a:prstDash val="solid"/>
+          </a:ln>
+        </p:spPr>
+      </p:sp>
+      <p:sp>
+        <p:nvSpPr>
+          <p:cNvPr id="3" name="Text 1"/>
+          <p:cNvSpPr txBox="1"/>
+          <p:nvPr/>
+        </p:nvSpPr>
+        <p:spPr>
+          <a:xfrm>
+            <a:off x="4692152" y="1056132"/>
+            <a:ext cx="2807848" cy="323149"/>
+          </a:xfrm>
+          <a:prstGeom prst="rect">
+            <a:avLst/>
+          </a:prstGeom>
+          <a:noFill/>
+          <a:ln/>
+        </p:spPr>
+        <p:txBody>
+          <a:bodyPr wrap="none" lIns="0" tIns="0" rIns="0" bIns="0" rtlCol="0" anchor="t"/>
+          <a:lstStyle/>
+          <a:p>
+            <a:pPr algn="ctr" indent="0" marL="0">
+              <a:lnSpc>
+                <a:spcPts val="2545"/>
+              </a:lnSpc>
+              <a:buNone/>
+            </a:pPr>
+            <a:r>
+              <a:rPr lang="en-US" sz="1697" b="1" spc="34" kern="0" dirty="0">
+                <a:solidFill>
+                  <a:srgbClr val="F87171"/>
+                </a:solidFill>
+                <a:latin typeface="Malgun Gothic" pitchFamily="34" charset="0"/>
+                <a:ea typeface="Malgun Gothic" pitchFamily="34" charset="-122"/>
+                <a:cs typeface="Malgun Gothic" pitchFamily="34" charset="-120"/>
+              </a:rPr>
+              <a:t>SYSTEM BOTTLENECK</a:t>
+            </a:r>
+            <a:endParaRPr lang="en-US" sz="1697" dirty="0"/>
+          </a:p>
+        </p:txBody>
+      </p:sp>
+      <p:sp>
+        <p:nvSpPr>
+          <p:cNvPr id="4" name="Text 2"/>
+          <p:cNvSpPr txBox="1"/>
+          <p:nvPr/>
+        </p:nvSpPr>
+        <p:spPr>
+          <a:xfrm>
+            <a:off x="-334488" y="1507480"/>
+            <a:ext cx="12861036" cy="590611"/>
+          </a:xfrm>
+          <a:prstGeom prst="rect">
+            <a:avLst/>
+          </a:prstGeom>
+          <a:noFill/>
+          <a:ln/>
+        </p:spPr>
+        <p:txBody>
+          <a:bodyPr wrap="none" lIns="0" tIns="0" rIns="0" bIns="0" rtlCol="0" anchor="t"/>
+          <a:lstStyle/>
+          <a:p>
+            <a:pPr algn="ctr" indent="0" marL="0">
+              <a:lnSpc>
+                <a:spcPts val="4651"/>
+              </a:lnSpc>
+              <a:buNone/>
+            </a:pPr>
+            <a:r>
+              <a:rPr lang="en-US" sz="3524" b="1" spc="-88" kern="0" dirty="0">
+                <a:solidFill>
+                  <a:srgbClr val="FFFFFF"/>
+                </a:solidFill>
+                <a:latin typeface="Malgun Gothic" pitchFamily="34" charset="0"/>
+                <a:ea typeface="Malgun Gothic" pitchFamily="34" charset="-122"/>
+                <a:cs typeface="Malgun Gothic" pitchFamily="34" charset="-120"/>
+              </a:rPr>
+              <a:t>동기식 REST API 체인이 초래하는 3대 구조적 위험</a:t>
+            </a:r>
+            <a:endParaRPr lang="en-US" sz="3524" dirty="0"/>
+          </a:p>
+        </p:txBody>
+      </p:sp>
+      <p:sp>
+        <p:nvSpPr>
+          <p:cNvPr id="5" name="Text 3"/>
+          <p:cNvSpPr txBox="1"/>
+          <p:nvPr/>
+        </p:nvSpPr>
+        <p:spPr>
+          <a:xfrm>
+            <a:off x="-334488" y="2281337"/>
+            <a:ext cx="12861036" cy="397764"/>
+          </a:xfrm>
+          <a:prstGeom prst="rect">
+            <a:avLst/>
+          </a:prstGeom>
+          <a:noFill/>
+          <a:ln/>
+        </p:spPr>
+        <p:txBody>
+          <a:bodyPr wrap="none" lIns="0" tIns="0" rIns="0" bIns="0" rtlCol="0" anchor="t"/>
+          <a:lstStyle/>
+          <a:p>
+            <a:pPr algn="ctr" indent="0" marL="0">
+              <a:lnSpc>
+                <a:spcPts val="3132"/>
+              </a:lnSpc>
+              <a:buNone/>
+            </a:pPr>
+            <a:r>
+              <a:rPr lang="en-US" sz="2088" spc="-54" kern="0" dirty="0">
+                <a:solidFill>
+                  <a:srgbClr val="94A3B8"/>
+                </a:solidFill>
+                <a:latin typeface="Malgun Gothic" pitchFamily="34" charset="0"/>
+                <a:ea typeface="Malgun Gothic" pitchFamily="34" charset="-122"/>
+                <a:cs typeface="Malgun Gothic" pitchFamily="34" charset="-120"/>
+              </a:rPr>
+              <a:t>트래픽 폭증 시 단일 서비스 지연이 전체 마이크로서비스로 전파되어 연쇄 장애를 유발합니다.</a:t>
+            </a:r>
+            <a:endParaRPr lang="en-US" sz="2088" dirty="0"/>
+          </a:p>
+        </p:txBody>
+      </p:sp>
+      <p:sp>
+        <p:nvSpPr>
+          <p:cNvPr id="6" name="Shape 4"/>
+          <p:cNvSpPr/>
+          <p:nvPr/>
+        </p:nvSpPr>
+        <p:spPr>
+          <a:xfrm>
+            <a:off x="552480" y="2916204"/>
+            <a:ext cx="3594049" cy="2948026"/>
+          </a:xfrm>
+          <a:prstGeom prst="roundRect">
+            <a:avLst>
+              <a:gd name="adj" fmla="val 4522"/>
+            </a:avLst>
+          </a:prstGeom>
+          <a:solidFill>
+            <a:srgbClr val="161E2E">
+              <a:alpha val="82000"/>
+            </a:srgbClr>
+          </a:solidFill>
+          <a:ln/>
+        </p:spPr>
+      </p:sp>
+      <p:sp>
+        <p:nvSpPr>
+          <p:cNvPr id="7" name="Shape 5"/>
+          <p:cNvSpPr/>
+          <p:nvPr/>
+        </p:nvSpPr>
+        <p:spPr>
+          <a:xfrm>
+            <a:off x="552480" y="2916204"/>
+            <a:ext cx="3594049" cy="28621"/>
+          </a:xfrm>
+          <a:prstGeom prst="rect">
+            <a:avLst/>
+          </a:prstGeom>
+          <a:solidFill>
+            <a:srgbClr val="F87171"/>
+          </a:solidFill>
+          <a:ln/>
+        </p:spPr>
+      </p:sp>
+      <p:sp>
+        <p:nvSpPr>
+          <p:cNvPr id="8" name="Shape 6"/>
+          <p:cNvSpPr/>
+          <p:nvPr/>
+        </p:nvSpPr>
+        <p:spPr>
+          <a:xfrm>
+            <a:off x="4137020" y="2916204"/>
+            <a:ext cx="9510" cy="2948026"/>
+          </a:xfrm>
+          <a:prstGeom prst="rect">
+            <a:avLst/>
+          </a:prstGeom>
+          <a:solidFill>
+            <a:srgbClr val="FFFFFF">
+              <a:alpha val="9000"/>
+            </a:srgbClr>
+          </a:solidFill>
+          <a:ln/>
+        </p:spPr>
+      </p:sp>
+      <p:sp>
+        <p:nvSpPr>
+          <p:cNvPr id="9" name="Shape 7"/>
+          <p:cNvSpPr/>
+          <p:nvPr/>
+        </p:nvSpPr>
+        <p:spPr>
+          <a:xfrm>
+            <a:off x="552480" y="5854629"/>
+            <a:ext cx="3594049" cy="9510"/>
+          </a:xfrm>
+          <a:prstGeom prst="rect">
+            <a:avLst/>
+          </a:prstGeom>
+          <a:solidFill>
+            <a:srgbClr val="FFFFFF">
+              <a:alpha val="9000"/>
+            </a:srgbClr>
+          </a:solidFill>
+          <a:ln/>
+        </p:spPr>
+      </p:sp>
+      <p:sp>
+        <p:nvSpPr>
+          <p:cNvPr id="10" name="Shape 8"/>
+          <p:cNvSpPr/>
+          <p:nvPr/>
+        </p:nvSpPr>
+        <p:spPr>
+          <a:xfrm>
+            <a:off x="552480" y="2916204"/>
+            <a:ext cx="9510" cy="2948026"/>
+          </a:xfrm>
+          <a:prstGeom prst="rect">
+            <a:avLst/>
+          </a:prstGeom>
+          <a:solidFill>
+            <a:srgbClr val="FFFFFF">
+              <a:alpha val="9000"/>
+            </a:srgbClr>
+          </a:solidFill>
+          <a:ln/>
+        </p:spPr>
+      </p:sp>
+      <p:sp>
+        <p:nvSpPr>
+          <p:cNvPr id="11" name="Shape 9"/>
+          <p:cNvSpPr/>
+          <p:nvPr/>
+        </p:nvSpPr>
+        <p:spPr>
+          <a:xfrm>
+            <a:off x="771571" y="3135295"/>
+            <a:ext cx="247620" cy="247620"/>
+          </a:xfrm>
+          <a:prstGeom prst="roundRect">
+            <a:avLst>
+              <a:gd name="adj" fmla="val 50000"/>
+            </a:avLst>
+          </a:prstGeom>
+          <a:solidFill>
+            <a:srgbClr val="F87171">
+              <a:alpha val="15000"/>
+            </a:srgbClr>
+          </a:solidFill>
+          <a:ln w="9525">
+            <a:solidFill>
+              <a:srgbClr val="F87171">
+                <a:alpha val="40000"/>
+              </a:srgbClr>
+            </a:solidFill>
+            <a:prstDash val="solid"/>
+          </a:ln>
+        </p:spPr>
+      </p:sp>
+      <p:sp>
+        <p:nvSpPr>
+          <p:cNvPr id="12" name="Text 10"/>
+          <p:cNvSpPr txBox="1"/>
+          <p:nvPr/>
+        </p:nvSpPr>
+        <p:spPr>
+          <a:xfrm>
+            <a:off x="761970" y="3100639"/>
+            <a:ext cx="304770" cy="310805"/>
+          </a:xfrm>
+          <a:prstGeom prst="rect">
+            <a:avLst/>
+          </a:prstGeom>
+          <a:noFill/>
+          <a:ln/>
+        </p:spPr>
+        <p:txBody>
+          <a:bodyPr wrap="none" lIns="0" tIns="0" rIns="0" bIns="0" rtlCol="0" anchor="t"/>
+          <a:lstStyle/>
+          <a:p>
+            <a:pPr algn="l" indent="0" marL="0">
+              <a:lnSpc>
+                <a:spcPts val="2447"/>
+              </a:lnSpc>
+              <a:buNone/>
+            </a:pPr>
+            <a:r>
+              <a:rPr lang="en-US" sz="1631" b="1" spc="-54" kern="0" dirty="0">
+                <a:solidFill>
+                  <a:srgbClr val="F87171"/>
+                </a:solidFill>
+                <a:latin typeface="Malgun Gothic" pitchFamily="34" charset="0"/>
+                <a:ea typeface="Malgun Gothic" pitchFamily="34" charset="-122"/>
+                <a:cs typeface="Malgun Gothic" pitchFamily="34" charset="-120"/>
+              </a:rPr>
+              <a:t>01</a:t>
+            </a:r>
+            <a:endParaRPr lang="en-US" sz="1631" dirty="0"/>
+          </a:p>
+        </p:txBody>
+      </p:sp>
+      <p:sp>
+        <p:nvSpPr>
+          <p:cNvPr id="13" name="Text 11"/>
+          <p:cNvSpPr txBox="1"/>
+          <p:nvPr/>
+        </p:nvSpPr>
+        <p:spPr>
+          <a:xfrm>
+            <a:off x="752460" y="3456066"/>
+            <a:ext cx="3193999" cy="812079"/>
+          </a:xfrm>
+          <a:prstGeom prst="rect">
+            <a:avLst/>
+          </a:prstGeom>
+          <a:noFill/>
+          <a:ln/>
+        </p:spPr>
+        <p:txBody>
+          <a:bodyPr wrap="square" lIns="0" tIns="0" rIns="0" bIns="0" rtlCol="0" anchor="t"/>
+          <a:lstStyle/>
+          <a:p>
+            <a:pPr algn="l" indent="0" marL="0">
+              <a:lnSpc>
+                <a:spcPts val="3197"/>
+              </a:lnSpc>
+              <a:buNone/>
+            </a:pPr>
+            <a:r>
+              <a:rPr lang="en-US" sz="2132" b="1" spc="-43" kern="0" dirty="0">
+                <a:solidFill>
+                  <a:srgbClr val="FFFFFF"/>
+                </a:solidFill>
+                <a:latin typeface="Malgun Gothic" pitchFamily="34" charset="0"/>
+                <a:ea typeface="Malgun Gothic" pitchFamily="34" charset="-122"/>
+                <a:cs typeface="Malgun Gothic" pitchFamily="34" charset="-120"/>
+              </a:rPr>
+              <a:t>계단식 연쇄 장애 (Cascading)</a:t>
+            </a:r>
+            <a:endParaRPr lang="en-US" sz="2132" dirty="0"/>
+          </a:p>
+        </p:txBody>
+      </p:sp>
+      <p:sp>
+        <p:nvSpPr>
+          <p:cNvPr id="14" name="Text 12"/>
+          <p:cNvSpPr txBox="1"/>
+          <p:nvPr/>
+        </p:nvSpPr>
+        <p:spPr>
+          <a:xfrm>
+            <a:off x="752460" y="4327947"/>
+            <a:ext cx="3193999" cy="1335756"/>
+          </a:xfrm>
+          <a:prstGeom prst="rect">
+            <a:avLst/>
+          </a:prstGeom>
+          <a:noFill/>
+          <a:ln/>
+        </p:spPr>
+        <p:txBody>
+          <a:bodyPr wrap="square" lIns="0" tIns="0" rIns="0" bIns="0" rtlCol="0" anchor="t"/>
+          <a:lstStyle/>
+          <a:p>
+            <a:pPr algn="l" indent="0" marL="0">
+              <a:lnSpc>
+                <a:spcPts val="2630"/>
+              </a:lnSpc>
+              <a:buNone/>
+            </a:pPr>
+            <a:r>
+              <a:rPr lang="en-US" sz="1697" spc="-54" kern="0" dirty="0">
+                <a:solidFill>
+                  <a:srgbClr val="94A3B8"/>
+                </a:solidFill>
+                <a:latin typeface="Malgun Gothic" pitchFamily="34" charset="0"/>
+                <a:ea typeface="Malgun Gothic" pitchFamily="34" charset="-122"/>
+                <a:cs typeface="Malgun Gothic" pitchFamily="34" charset="-120"/>
+              </a:rPr>
+              <a:t>다운스트림 서비스의 지연이 업스트림 스레드 풀을 고갈시켜</a:t>
+            </a:r>
+            <a:pPr algn="l" indent="0" marL="0">
+              <a:lnSpc>
+                <a:spcPts val="2630"/>
+              </a:lnSpc>
+              <a:buNone/>
+            </a:pPr>
+            <a:endParaRPr lang="en-US" sz="1697" dirty="0"/>
+          </a:p>
+          <a:p>
+            <a:pPr algn="l" indent="0" marL="0">
+              <a:lnSpc>
+                <a:spcPts val="2630"/>
+              </a:lnSpc>
+              <a:buNone/>
+            </a:pPr>
+            <a:r>
+              <a:rPr lang="en-US" sz="1697" spc="-54" kern="0" dirty="0">
+                <a:solidFill>
+                  <a:srgbClr val="94A3B8"/>
+                </a:solidFill>
+                <a:latin typeface="Malgun Gothic" pitchFamily="34" charset="0"/>
+                <a:ea typeface="Malgun Gothic" pitchFamily="34" charset="-122"/>
+                <a:cs typeface="Malgun Gothic" pitchFamily="34" charset="-120"/>
+              </a:rPr>
+              <a:t> </a:t>
+            </a:r>
+            <a:endParaRPr lang="en-US" sz="1697" dirty="0"/>
+          </a:p>
+          <a:p>
+            <a:pPr algn="l" indent="0" marL="0">
+              <a:lnSpc>
+                <a:spcPts val="2630"/>
+              </a:lnSpc>
+              <a:buNone/>
+            </a:pPr>
+            <a:r>
+              <a:rPr lang="en-US" sz="1697" b="1" spc="-54" kern="0" dirty="0">
+                <a:solidFill>
+                  <a:srgbClr val="FFFFFF"/>
+                </a:solidFill>
+                <a:latin typeface="Malgun Gothic" pitchFamily="34" charset="0"/>
+                <a:ea typeface="Malgun Gothic" pitchFamily="34" charset="-122"/>
+                <a:cs typeface="Malgun Gothic" pitchFamily="34" charset="-120"/>
+              </a:rPr>
+              <a:t>전체 인프라 타임아웃 셧다운</a:t>
+            </a:r>
+            <a:pPr algn="l" indent="0" marL="0">
+              <a:lnSpc>
+                <a:spcPts val="2630"/>
+              </a:lnSpc>
+              <a:buNone/>
+            </a:pPr>
+            <a:r>
+              <a:rPr lang="en-US" sz="1697" spc="-54" kern="0" dirty="0">
+                <a:solidFill>
+                  <a:srgbClr val="94A3B8"/>
+                </a:solidFill>
+                <a:latin typeface="Malgun Gothic" pitchFamily="34" charset="0"/>
+                <a:ea typeface="Malgun Gothic" pitchFamily="34" charset="-122"/>
+                <a:cs typeface="Malgun Gothic" pitchFamily="34" charset="-120"/>
+              </a:rPr>
+              <a:t>을 유발합니다.</a:t>
+            </a:r>
+            <a:endParaRPr lang="en-US" sz="1697" dirty="0"/>
+          </a:p>
+        </p:txBody>
+      </p:sp>
+      <p:sp>
+        <p:nvSpPr>
+          <p:cNvPr id="15" name="Shape 13"/>
+          <p:cNvSpPr/>
+          <p:nvPr/>
+        </p:nvSpPr>
+        <p:spPr>
+          <a:xfrm>
+            <a:off x="4298960" y="2916204"/>
+            <a:ext cx="3594049" cy="2948026"/>
+          </a:xfrm>
+          <a:prstGeom prst="roundRect">
+            <a:avLst>
+              <a:gd name="adj" fmla="val 4522"/>
+            </a:avLst>
+          </a:prstGeom>
+          <a:solidFill>
+            <a:srgbClr val="161E2E">
+              <a:alpha val="82000"/>
+            </a:srgbClr>
+          </a:solidFill>
+          <a:ln/>
+        </p:spPr>
+      </p:sp>
+      <p:sp>
+        <p:nvSpPr>
+          <p:cNvPr id="16" name="Shape 14"/>
+          <p:cNvSpPr/>
+          <p:nvPr/>
+        </p:nvSpPr>
+        <p:spPr>
+          <a:xfrm>
+            <a:off x="4298960" y="2916204"/>
+            <a:ext cx="3594049" cy="28621"/>
+          </a:xfrm>
+          <a:prstGeom prst="rect">
+            <a:avLst/>
+          </a:prstGeom>
+          <a:solidFill>
+            <a:srgbClr val="FACC15"/>
+          </a:solidFill>
+          <a:ln/>
+        </p:spPr>
+      </p:sp>
+      <p:sp>
+        <p:nvSpPr>
+          <p:cNvPr id="17" name="Shape 15"/>
+          <p:cNvSpPr/>
+          <p:nvPr/>
+        </p:nvSpPr>
+        <p:spPr>
+          <a:xfrm>
+            <a:off x="7883500" y="2916204"/>
+            <a:ext cx="9510" cy="2948026"/>
+          </a:xfrm>
+          <a:prstGeom prst="rect">
+            <a:avLst/>
+          </a:prstGeom>
+          <a:solidFill>
+            <a:srgbClr val="FFFFFF">
+              <a:alpha val="9000"/>
+            </a:srgbClr>
+          </a:solidFill>
+          <a:ln/>
+        </p:spPr>
+      </p:sp>
+      <p:sp>
+        <p:nvSpPr>
+          <p:cNvPr id="18" name="Shape 16"/>
+          <p:cNvSpPr/>
+          <p:nvPr/>
+        </p:nvSpPr>
+        <p:spPr>
+          <a:xfrm>
+            <a:off x="4298960" y="5854629"/>
+            <a:ext cx="3594049" cy="9510"/>
+          </a:xfrm>
+          <a:prstGeom prst="rect">
+            <a:avLst/>
+          </a:prstGeom>
+          <a:solidFill>
+            <a:srgbClr val="FFFFFF">
+              <a:alpha val="9000"/>
+            </a:srgbClr>
+          </a:solidFill>
+          <a:ln/>
+        </p:spPr>
+      </p:sp>
+      <p:sp>
+        <p:nvSpPr>
+          <p:cNvPr id="19" name="Shape 17"/>
+          <p:cNvSpPr/>
+          <p:nvPr/>
+        </p:nvSpPr>
+        <p:spPr>
+          <a:xfrm>
+            <a:off x="4298960" y="2916204"/>
+            <a:ext cx="9510" cy="2948026"/>
+          </a:xfrm>
+          <a:prstGeom prst="rect">
+            <a:avLst/>
+          </a:prstGeom>
+          <a:solidFill>
+            <a:srgbClr val="FFFFFF">
+              <a:alpha val="9000"/>
+            </a:srgbClr>
+          </a:solidFill>
+          <a:ln/>
+        </p:spPr>
+      </p:sp>
+      <p:sp>
+        <p:nvSpPr>
+          <p:cNvPr id="20" name="Shape 18"/>
+          <p:cNvSpPr/>
+          <p:nvPr/>
+        </p:nvSpPr>
+        <p:spPr>
+          <a:xfrm>
+            <a:off x="4517959" y="3135295"/>
+            <a:ext cx="247620" cy="247620"/>
+          </a:xfrm>
+          <a:prstGeom prst="roundRect">
+            <a:avLst>
+              <a:gd name="adj" fmla="val 50000"/>
+            </a:avLst>
+          </a:prstGeom>
+          <a:solidFill>
+            <a:srgbClr val="FACC15">
+              <a:alpha val="15000"/>
+            </a:srgbClr>
+          </a:solidFill>
+          <a:ln w="9525">
+            <a:solidFill>
+              <a:srgbClr val="FACC15">
+                <a:alpha val="40000"/>
+              </a:srgbClr>
+            </a:solidFill>
+            <a:prstDash val="solid"/>
+          </a:ln>
+        </p:spPr>
+      </p:sp>
+      <p:sp>
+        <p:nvSpPr>
+          <p:cNvPr id="21" name="Text 19"/>
+          <p:cNvSpPr txBox="1"/>
+          <p:nvPr/>
+        </p:nvSpPr>
+        <p:spPr>
+          <a:xfrm>
+            <a:off x="4508449" y="3100639"/>
+            <a:ext cx="304770" cy="310805"/>
+          </a:xfrm>
+          <a:prstGeom prst="rect">
+            <a:avLst/>
+          </a:prstGeom>
+          <a:noFill/>
+          <a:ln/>
+        </p:spPr>
+        <p:txBody>
+          <a:bodyPr wrap="none" lIns="0" tIns="0" rIns="0" bIns="0" rtlCol="0" anchor="t"/>
+          <a:lstStyle/>
+          <a:p>
+            <a:pPr algn="l" indent="0" marL="0">
+              <a:lnSpc>
+                <a:spcPts val="2447"/>
+              </a:lnSpc>
+              <a:buNone/>
+            </a:pPr>
+            <a:r>
+              <a:rPr lang="en-US" sz="1631" b="1" spc="-54" kern="0" dirty="0">
+                <a:solidFill>
+                  <a:srgbClr val="FACC15"/>
+                </a:solidFill>
+                <a:latin typeface="Malgun Gothic" pitchFamily="34" charset="0"/>
+                <a:ea typeface="Malgun Gothic" pitchFamily="34" charset="-122"/>
+                <a:cs typeface="Malgun Gothic" pitchFamily="34" charset="-120"/>
+              </a:rPr>
+              <a:t>02</a:t>
+            </a:r>
+            <a:endParaRPr lang="en-US" sz="1631" dirty="0"/>
+          </a:p>
+        </p:txBody>
+      </p:sp>
+      <p:sp>
+        <p:nvSpPr>
+          <p:cNvPr id="22" name="Text 20"/>
+          <p:cNvSpPr txBox="1"/>
+          <p:nvPr/>
+        </p:nvSpPr>
+        <p:spPr>
+          <a:xfrm>
+            <a:off x="4498939" y="3456066"/>
+            <a:ext cx="3427446" cy="406085"/>
+          </a:xfrm>
+          <a:prstGeom prst="rect">
+            <a:avLst/>
+          </a:prstGeom>
+          <a:noFill/>
+          <a:ln/>
+        </p:spPr>
+        <p:txBody>
+          <a:bodyPr wrap="none" lIns="0" tIns="0" rIns="0" bIns="0" rtlCol="0" anchor="t"/>
+          <a:lstStyle/>
+          <a:p>
+            <a:pPr algn="l" indent="0" marL="0">
+              <a:lnSpc>
+                <a:spcPts val="3197"/>
+              </a:lnSpc>
+              <a:buNone/>
+            </a:pPr>
+            <a:r>
+              <a:rPr lang="en-US" sz="2132" b="1" spc="-43" kern="0" dirty="0">
+                <a:solidFill>
+                  <a:srgbClr val="FFFFFF"/>
+                </a:solidFill>
+                <a:latin typeface="Malgun Gothic" pitchFamily="34" charset="0"/>
+                <a:ea typeface="Malgun Gothic" pitchFamily="34" charset="-122"/>
+                <a:cs typeface="Malgun Gothic" pitchFamily="34" charset="-120"/>
+              </a:rPr>
+              <a:t>2PC 분산 락 병목</a:t>
+            </a:r>
+            <a:endParaRPr lang="en-US" sz="2132" dirty="0"/>
+          </a:p>
+        </p:txBody>
+      </p:sp>
+      <p:sp>
+        <p:nvSpPr>
+          <p:cNvPr id="23" name="Text 21"/>
+          <p:cNvSpPr txBox="1"/>
+          <p:nvPr/>
+        </p:nvSpPr>
+        <p:spPr>
+          <a:xfrm>
+            <a:off x="4498939" y="3921953"/>
+            <a:ext cx="3193999" cy="1335756"/>
+          </a:xfrm>
+          <a:prstGeom prst="rect">
+            <a:avLst/>
+          </a:prstGeom>
+          <a:noFill/>
+          <a:ln/>
+        </p:spPr>
+        <p:txBody>
+          <a:bodyPr wrap="square" lIns="0" tIns="0" rIns="0" bIns="0" rtlCol="0" anchor="t"/>
+          <a:lstStyle/>
+          <a:p>
+            <a:pPr algn="l" indent="0" marL="0">
+              <a:lnSpc>
+                <a:spcPts val="2630"/>
+              </a:lnSpc>
+              <a:buNone/>
+            </a:pPr>
+            <a:r>
+              <a:rPr lang="en-US" sz="1697" spc="-54" kern="0" dirty="0">
+                <a:solidFill>
+                  <a:srgbClr val="94A3B8"/>
+                </a:solidFill>
+                <a:latin typeface="Malgun Gothic" pitchFamily="34" charset="0"/>
+                <a:ea typeface="Malgun Gothic" pitchFamily="34" charset="-122"/>
+                <a:cs typeface="Malgun Gothic" pitchFamily="34" charset="-120"/>
+              </a:rPr>
+              <a:t>2단계 커밋(2PC)의 글로벌 락으로 인해</a:t>
+            </a:r>
+            <a:pPr algn="l" indent="0" marL="0">
+              <a:lnSpc>
+                <a:spcPts val="2630"/>
+              </a:lnSpc>
+              <a:buNone/>
+            </a:pPr>
+            <a:endParaRPr lang="en-US" sz="1697" dirty="0"/>
+          </a:p>
+          <a:p>
+            <a:pPr algn="l" indent="0" marL="0">
+              <a:lnSpc>
+                <a:spcPts val="2630"/>
+              </a:lnSpc>
+              <a:buNone/>
+            </a:pPr>
+            <a:r>
+              <a:rPr lang="en-US" sz="1697" spc="-54" kern="0" dirty="0">
+                <a:solidFill>
+                  <a:srgbClr val="94A3B8"/>
+                </a:solidFill>
+                <a:latin typeface="Malgun Gothic" pitchFamily="34" charset="0"/>
+                <a:ea typeface="Malgun Gothic" pitchFamily="34" charset="-122"/>
+                <a:cs typeface="Malgun Gothic" pitchFamily="34" charset="-120"/>
+              </a:rPr>
+              <a:t> </a:t>
+            </a:r>
+            <a:endParaRPr lang="en-US" sz="1697" dirty="0"/>
+          </a:p>
+          <a:p>
+            <a:pPr algn="l" indent="0" marL="0">
+              <a:lnSpc>
+                <a:spcPts val="2630"/>
+              </a:lnSpc>
+              <a:buNone/>
+            </a:pPr>
+            <a:r>
+              <a:rPr lang="en-US" sz="1697" b="1" spc="-54" kern="0" dirty="0">
+                <a:solidFill>
+                  <a:srgbClr val="FFFFFF"/>
+                </a:solidFill>
+                <a:latin typeface="Malgun Gothic" pitchFamily="34" charset="0"/>
+                <a:ea typeface="Malgun Gothic" pitchFamily="34" charset="-122"/>
+                <a:cs typeface="Malgun Gothic" pitchFamily="34" charset="-120"/>
+              </a:rPr>
+              <a:t>트랜잭션 지연시간 8배 증가</a:t>
+            </a:r>
+            <a:pPr algn="l" indent="0" marL="0">
+              <a:lnSpc>
+                <a:spcPts val="2630"/>
+              </a:lnSpc>
+              <a:buNone/>
+            </a:pPr>
+            <a:r>
+              <a:rPr lang="en-US" sz="1697" spc="-54" kern="0" dirty="0">
+                <a:solidFill>
+                  <a:srgbClr val="94A3B8"/>
+                </a:solidFill>
+                <a:latin typeface="Malgun Gothic" pitchFamily="34" charset="0"/>
+                <a:ea typeface="Malgun Gothic" pitchFamily="34" charset="-122"/>
+                <a:cs typeface="Malgun Gothic" pitchFamily="34" charset="-120"/>
+              </a:rPr>
+              <a:t> 및 처리량 급락이 발생합니다.</a:t>
+            </a:r>
+            <a:endParaRPr lang="en-US" sz="1697" dirty="0"/>
+          </a:p>
+        </p:txBody>
+      </p:sp>
+      <p:sp>
+        <p:nvSpPr>
+          <p:cNvPr id="24" name="Shape 22"/>
+          <p:cNvSpPr/>
+          <p:nvPr/>
+        </p:nvSpPr>
+        <p:spPr>
+          <a:xfrm>
+            <a:off x="8045348" y="2916204"/>
+            <a:ext cx="3594141" cy="2948026"/>
+          </a:xfrm>
+          <a:prstGeom prst="roundRect">
+            <a:avLst>
+              <a:gd name="adj" fmla="val 4522"/>
+            </a:avLst>
+          </a:prstGeom>
+          <a:solidFill>
+            <a:srgbClr val="161E2E">
+              <a:alpha val="82000"/>
+            </a:srgbClr>
+          </a:solidFill>
+          <a:ln/>
+        </p:spPr>
+      </p:sp>
+      <p:sp>
+        <p:nvSpPr>
+          <p:cNvPr id="25" name="Shape 23"/>
+          <p:cNvSpPr/>
+          <p:nvPr/>
+        </p:nvSpPr>
+        <p:spPr>
+          <a:xfrm>
+            <a:off x="8045348" y="2916204"/>
+            <a:ext cx="3594141" cy="28621"/>
+          </a:xfrm>
+          <a:prstGeom prst="rect">
+            <a:avLst/>
+          </a:prstGeom>
+          <a:solidFill>
+            <a:srgbClr val="38BDF8"/>
+          </a:solidFill>
+          <a:ln/>
+        </p:spPr>
+      </p:sp>
+      <p:sp>
+        <p:nvSpPr>
+          <p:cNvPr id="26" name="Shape 24"/>
+          <p:cNvSpPr/>
+          <p:nvPr/>
+        </p:nvSpPr>
+        <p:spPr>
+          <a:xfrm>
+            <a:off x="11630071" y="2916204"/>
+            <a:ext cx="9510" cy="2948026"/>
+          </a:xfrm>
+          <a:prstGeom prst="rect">
+            <a:avLst/>
+          </a:prstGeom>
+          <a:solidFill>
+            <a:srgbClr val="FFFFFF">
+              <a:alpha val="9000"/>
+            </a:srgbClr>
+          </a:solidFill>
+          <a:ln/>
+        </p:spPr>
+      </p:sp>
+      <p:sp>
+        <p:nvSpPr>
+          <p:cNvPr id="27" name="Shape 25"/>
+          <p:cNvSpPr/>
+          <p:nvPr/>
+        </p:nvSpPr>
+        <p:spPr>
+          <a:xfrm>
+            <a:off x="8045348" y="5854629"/>
+            <a:ext cx="3594141" cy="9510"/>
+          </a:xfrm>
+          <a:prstGeom prst="rect">
+            <a:avLst/>
+          </a:prstGeom>
+          <a:solidFill>
+            <a:srgbClr val="FFFFFF">
+              <a:alpha val="9000"/>
+            </a:srgbClr>
+          </a:solidFill>
+          <a:ln/>
+        </p:spPr>
+      </p:sp>
+      <p:sp>
+        <p:nvSpPr>
+          <p:cNvPr id="28" name="Shape 26"/>
+          <p:cNvSpPr/>
+          <p:nvPr/>
+        </p:nvSpPr>
+        <p:spPr>
+          <a:xfrm>
+            <a:off x="8045348" y="2916204"/>
+            <a:ext cx="9510" cy="2948026"/>
+          </a:xfrm>
+          <a:prstGeom prst="rect">
+            <a:avLst/>
+          </a:prstGeom>
+          <a:solidFill>
+            <a:srgbClr val="FFFFFF">
+              <a:alpha val="9000"/>
+            </a:srgbClr>
+          </a:solidFill>
+          <a:ln/>
+        </p:spPr>
+      </p:sp>
+      <p:sp>
+        <p:nvSpPr>
+          <p:cNvPr id="29" name="Shape 27"/>
+          <p:cNvSpPr/>
+          <p:nvPr/>
+        </p:nvSpPr>
+        <p:spPr>
+          <a:xfrm>
+            <a:off x="8264439" y="3135295"/>
+            <a:ext cx="247620" cy="247620"/>
+          </a:xfrm>
+          <a:prstGeom prst="roundRect">
+            <a:avLst>
+              <a:gd name="adj" fmla="val 50000"/>
+            </a:avLst>
+          </a:prstGeom>
+          <a:solidFill>
+            <a:srgbClr val="38BDF8">
+              <a:alpha val="15000"/>
+            </a:srgbClr>
+          </a:solidFill>
+          <a:ln w="9525">
+            <a:solidFill>
+              <a:srgbClr val="38BDF8">
+                <a:alpha val="40000"/>
+              </a:srgbClr>
+            </a:solidFill>
+            <a:prstDash val="solid"/>
+          </a:ln>
+        </p:spPr>
+      </p:sp>
+      <p:sp>
+        <p:nvSpPr>
+          <p:cNvPr id="30" name="Text 28"/>
+          <p:cNvSpPr txBox="1"/>
+          <p:nvPr/>
+        </p:nvSpPr>
+        <p:spPr>
+          <a:xfrm>
+            <a:off x="8254929" y="3100639"/>
+            <a:ext cx="304770" cy="310805"/>
+          </a:xfrm>
+          <a:prstGeom prst="rect">
+            <a:avLst/>
+          </a:prstGeom>
+          <a:noFill/>
+          <a:ln/>
+        </p:spPr>
+        <p:txBody>
+          <a:bodyPr wrap="none" lIns="0" tIns="0" rIns="0" bIns="0" rtlCol="0" anchor="t"/>
+          <a:lstStyle/>
+          <a:p>
+            <a:pPr algn="l" indent="0" marL="0">
+              <a:lnSpc>
+                <a:spcPts val="2447"/>
+              </a:lnSpc>
+              <a:buNone/>
+            </a:pPr>
+            <a:r>
+              <a:rPr lang="en-US" sz="1631" b="1" spc="-54" kern="0" dirty="0">
+                <a:solidFill>
+                  <a:srgbClr val="38BDF8"/>
+                </a:solidFill>
+                <a:latin typeface="Malgun Gothic" pitchFamily="34" charset="0"/>
+                <a:ea typeface="Malgun Gothic" pitchFamily="34" charset="-122"/>
+                <a:cs typeface="Malgun Gothic" pitchFamily="34" charset="-120"/>
+              </a:rPr>
+              <a:t>03</a:t>
+            </a:r>
+            <a:endParaRPr lang="en-US" sz="1631" dirty="0"/>
+          </a:p>
+        </p:txBody>
+      </p:sp>
+      <p:sp>
+        <p:nvSpPr>
+          <p:cNvPr id="31" name="Text 29"/>
+          <p:cNvSpPr txBox="1"/>
+          <p:nvPr/>
+        </p:nvSpPr>
+        <p:spPr>
+          <a:xfrm>
+            <a:off x="8245419" y="3456066"/>
+            <a:ext cx="3427537" cy="406085"/>
+          </a:xfrm>
+          <a:prstGeom prst="rect">
+            <a:avLst/>
+          </a:prstGeom>
+          <a:noFill/>
+          <a:ln/>
+        </p:spPr>
+        <p:txBody>
+          <a:bodyPr wrap="none" lIns="0" tIns="0" rIns="0" bIns="0" rtlCol="0" anchor="t"/>
+          <a:lstStyle/>
+          <a:p>
+            <a:pPr algn="l" indent="0" marL="0">
+              <a:lnSpc>
+                <a:spcPts val="3197"/>
+              </a:lnSpc>
+              <a:buNone/>
+            </a:pPr>
+            <a:r>
+              <a:rPr lang="en-US" sz="2132" b="1" spc="-43" kern="0" dirty="0">
+                <a:solidFill>
+                  <a:srgbClr val="FFFFFF"/>
+                </a:solidFill>
+                <a:latin typeface="Malgun Gothic" pitchFamily="34" charset="0"/>
+                <a:ea typeface="Malgun Gothic" pitchFamily="34" charset="-122"/>
+                <a:cs typeface="Malgun Gothic" pitchFamily="34" charset="-120"/>
+              </a:rPr>
+              <a:t>데이터 정합성 파편화</a:t>
+            </a:r>
+            <a:endParaRPr lang="en-US" sz="2132" dirty="0"/>
+          </a:p>
+        </p:txBody>
+      </p:sp>
+      <p:sp>
+        <p:nvSpPr>
+          <p:cNvPr id="32" name="Text 30"/>
+          <p:cNvSpPr txBox="1"/>
+          <p:nvPr/>
+        </p:nvSpPr>
+        <p:spPr>
+          <a:xfrm>
+            <a:off x="8245419" y="3921953"/>
+            <a:ext cx="3194091" cy="1001817"/>
+          </a:xfrm>
+          <a:prstGeom prst="rect">
+            <a:avLst/>
+          </a:prstGeom>
+          <a:noFill/>
+          <a:ln/>
+        </p:spPr>
+        <p:txBody>
+          <a:bodyPr wrap="square" lIns="0" tIns="0" rIns="0" bIns="0" rtlCol="0" anchor="t"/>
+          <a:lstStyle/>
+          <a:p>
+            <a:pPr algn="l" indent="0" marL="0">
+              <a:lnSpc>
+                <a:spcPts val="2630"/>
+              </a:lnSpc>
+              <a:buNone/>
+            </a:pPr>
+            <a:r>
+              <a:rPr lang="en-US" sz="1697" spc="-54" kern="0" dirty="0">
+                <a:solidFill>
+                  <a:srgbClr val="94A3B8"/>
+                </a:solidFill>
+                <a:latin typeface="Malgun Gothic" pitchFamily="34" charset="0"/>
+                <a:ea typeface="Malgun Gothic" pitchFamily="34" charset="-122"/>
+                <a:cs typeface="Malgun Gothic" pitchFamily="34" charset="-120"/>
+              </a:rPr>
+              <a:t>네트워크 파티션 발생 시 롤백 실패로</a:t>
+            </a:r>
+            <a:pPr algn="l" indent="0" marL="0">
+              <a:lnSpc>
+                <a:spcPts val="2630"/>
+              </a:lnSpc>
+              <a:buNone/>
+            </a:pPr>
+            <a:endParaRPr lang="en-US" sz="1697" dirty="0"/>
+          </a:p>
+          <a:p>
+            <a:pPr algn="l" indent="0" marL="0">
+              <a:lnSpc>
+                <a:spcPts val="2630"/>
+              </a:lnSpc>
+              <a:buNone/>
+            </a:pPr>
+            <a:r>
+              <a:rPr lang="en-US" sz="1697" spc="-54" kern="0" dirty="0">
+                <a:solidFill>
+                  <a:srgbClr val="94A3B8"/>
+                </a:solidFill>
+                <a:latin typeface="Malgun Gothic" pitchFamily="34" charset="0"/>
+                <a:ea typeface="Malgun Gothic" pitchFamily="34" charset="-122"/>
+                <a:cs typeface="Malgun Gothic" pitchFamily="34" charset="-120"/>
+              </a:rPr>
+              <a:t> </a:t>
+            </a:r>
+            <a:endParaRPr lang="en-US" sz="1697" dirty="0"/>
+          </a:p>
+          <a:p>
+            <a:pPr algn="l" indent="0" marL="0">
+              <a:lnSpc>
+                <a:spcPts val="2630"/>
+              </a:lnSpc>
+              <a:buNone/>
+            </a:pPr>
+            <a:r>
+              <a:rPr lang="en-US" sz="1697" b="1" spc="-54" kern="0" dirty="0">
+                <a:solidFill>
+                  <a:srgbClr val="FFFFFF"/>
+                </a:solidFill>
+                <a:latin typeface="Malgun Gothic" pitchFamily="34" charset="0"/>
+                <a:ea typeface="Malgun Gothic" pitchFamily="34" charset="-122"/>
+                <a:cs typeface="Malgun Gothic" pitchFamily="34" charset="-120"/>
+              </a:rPr>
+              <a:t>DB 간 불일치 데이터 누적</a:t>
+            </a:r>
+            <a:pPr algn="l" indent="0" marL="0">
+              <a:lnSpc>
+                <a:spcPts val="2630"/>
+              </a:lnSpc>
+              <a:buNone/>
+            </a:pPr>
+            <a:r>
+              <a:rPr lang="en-US" sz="1697" spc="-54" kern="0" dirty="0">
+                <a:solidFill>
+                  <a:srgbClr val="94A3B8"/>
+                </a:solidFill>
+                <a:latin typeface="Malgun Gothic" pitchFamily="34" charset="0"/>
+                <a:ea typeface="Malgun Gothic" pitchFamily="34" charset="-122"/>
+                <a:cs typeface="Malgun Gothic" pitchFamily="34" charset="-120"/>
+              </a:rPr>
+              <a:t> 및 복구 비용이 발생합니다.</a:t>
+            </a:r>
+            <a:endParaRPr lang="en-US" sz="1697" dirty="0"/>
+          </a:p>
+        </p:txBody>
+      </p:sp>
     </p:spTree>
   </p:cSld>
   <p:clrMapOvr>
@@ -1424,16 +4313,9 @@
   <p:cSld name="Slide 4">
     <p:bg>
       <p:bgPr>
-        <a:blipFill dpi="0" rotWithShape="1">
-          <a:blip r:embed="rId1">
-            <a:lum/>
-          </a:blip>
-          <a:srcRect/>
-          <a:stretch>
-            <a:fillRect/>
-          </a:stretch>
-        </a:blipFill>
-        <a:effectLst/>
+        <a:solidFill>
+          <a:srgbClr val="4E92F5"/>
+        </a:solidFill>
       </p:bgPr>
     </p:bg>
     <p:spTree>
@@ -1450,6 +4332,1145 @@
           <a:chExt cx="0" cy="0"/>
         </a:xfrm>
       </p:grpSpPr>
+      <p:sp>
+        <p:nvSpPr>
+          <p:cNvPr id="2" name="Shape 0"/>
+          <p:cNvSpPr/>
+          <p:nvPr/>
+        </p:nvSpPr>
+        <p:spPr>
+          <a:xfrm>
+            <a:off x="552480" y="1571854"/>
+            <a:ext cx="2997678" cy="418521"/>
+          </a:xfrm>
+          <a:prstGeom prst="roundRect">
+            <a:avLst>
+              <a:gd name="adj" fmla="val 50011"/>
+            </a:avLst>
+          </a:prstGeom>
+          <a:solidFill>
+            <a:srgbClr val="38BDF8">
+              <a:alpha val="15000"/>
+            </a:srgbClr>
+          </a:solidFill>
+          <a:ln w="9525">
+            <a:solidFill>
+              <a:srgbClr val="38BDF8">
+                <a:alpha val="35000"/>
+              </a:srgbClr>
+            </a:solidFill>
+            <a:prstDash val="solid"/>
+          </a:ln>
+        </p:spPr>
+      </p:sp>
+      <p:sp>
+        <p:nvSpPr>
+          <p:cNvPr id="3" name="Text 1"/>
+          <p:cNvSpPr txBox="1"/>
+          <p:nvPr/>
+        </p:nvSpPr>
+        <p:spPr>
+          <a:xfrm>
+            <a:off x="676290" y="1614922"/>
+            <a:ext cx="2947934" cy="323149"/>
+          </a:xfrm>
+          <a:prstGeom prst="rect">
+            <a:avLst/>
+          </a:prstGeom>
+          <a:noFill/>
+          <a:ln/>
+        </p:spPr>
+        <p:txBody>
+          <a:bodyPr wrap="none" lIns="0" tIns="0" rIns="0" bIns="0" rtlCol="0" anchor="t"/>
+          <a:lstStyle/>
+          <a:p>
+            <a:pPr algn="l" indent="0" marL="0">
+              <a:lnSpc>
+                <a:spcPts val="2545"/>
+              </a:lnSpc>
+              <a:buNone/>
+            </a:pPr>
+            <a:r>
+              <a:rPr lang="en-US" sz="1697" b="1" spc="34" kern="0" dirty="0">
+                <a:solidFill>
+                  <a:srgbClr val="38BDF8"/>
+                </a:solidFill>
+                <a:latin typeface="Malgun Gothic" pitchFamily="34" charset="0"/>
+                <a:ea typeface="Malgun Gothic" pitchFamily="34" charset="-122"/>
+                <a:cs typeface="Malgun Gothic" pitchFamily="34" charset="-120"/>
+              </a:rPr>
+              <a:t>PIPELINE ARCHITECTURE</a:t>
+            </a:r>
+            <a:endParaRPr lang="en-US" sz="1697" dirty="0"/>
+          </a:p>
+        </p:txBody>
+      </p:sp>
+      <p:sp>
+        <p:nvSpPr>
+          <p:cNvPr id="4" name="Text 2"/>
+          <p:cNvSpPr txBox="1"/>
+          <p:nvPr/>
+        </p:nvSpPr>
+        <p:spPr>
+          <a:xfrm>
+            <a:off x="533370" y="2066453"/>
+            <a:ext cx="11993088" cy="590611"/>
+          </a:xfrm>
+          <a:prstGeom prst="rect">
+            <a:avLst/>
+          </a:prstGeom>
+          <a:noFill/>
+          <a:ln/>
+        </p:spPr>
+        <p:txBody>
+          <a:bodyPr wrap="none" lIns="0" tIns="0" rIns="0" bIns="0" rtlCol="0" anchor="t"/>
+          <a:lstStyle/>
+          <a:p>
+            <a:pPr algn="l" indent="0" marL="0">
+              <a:lnSpc>
+                <a:spcPts val="4651"/>
+              </a:lnSpc>
+              <a:buNone/>
+            </a:pPr>
+            <a:r>
+              <a:rPr lang="en-US" sz="3524" b="1" spc="-88" kern="0" dirty="0">
+                <a:solidFill>
+                  <a:srgbClr val="FFFFFF"/>
+                </a:solidFill>
+                <a:latin typeface="Malgun Gothic" pitchFamily="34" charset="0"/>
+                <a:ea typeface="Malgun Gothic" pitchFamily="34" charset="-122"/>
+                <a:cs typeface="Malgun Gothic" pitchFamily="34" charset="-120"/>
+              </a:rPr>
+              <a:t>이벤트 기반 비동기 스트리밍 및 Saga 오케스트레이션</a:t>
+            </a:r>
+            <a:endParaRPr lang="en-US" sz="3524" dirty="0"/>
+          </a:p>
+        </p:txBody>
+      </p:sp>
+      <p:sp>
+        <p:nvSpPr>
+          <p:cNvPr id="5" name="Text 3"/>
+          <p:cNvSpPr txBox="1"/>
+          <p:nvPr/>
+        </p:nvSpPr>
+        <p:spPr>
+          <a:xfrm>
+            <a:off x="533370" y="2840126"/>
+            <a:ext cx="11993088" cy="397764"/>
+          </a:xfrm>
+          <a:prstGeom prst="rect">
+            <a:avLst/>
+          </a:prstGeom>
+          <a:noFill/>
+          <a:ln/>
+        </p:spPr>
+        <p:txBody>
+          <a:bodyPr wrap="none" lIns="0" tIns="0" rIns="0" bIns="0" rtlCol="0" anchor="t"/>
+          <a:lstStyle/>
+          <a:p>
+            <a:pPr algn="l" indent="0" marL="0">
+              <a:lnSpc>
+                <a:spcPts val="3132"/>
+              </a:lnSpc>
+              <a:buNone/>
+            </a:pPr>
+            <a:r>
+              <a:rPr lang="en-US" sz="2088" spc="-54" kern="0" dirty="0">
+                <a:solidFill>
+                  <a:srgbClr val="94A3B8"/>
+                </a:solidFill>
+                <a:latin typeface="Malgun Gothic" pitchFamily="34" charset="0"/>
+                <a:ea typeface="Malgun Gothic" pitchFamily="34" charset="-122"/>
+                <a:cs typeface="Malgun Gothic" pitchFamily="34" charset="-120"/>
+              </a:rPr>
+              <a:t>이벤트를 불변 로그로 발행하고, 중앙 오케스트레이터를 통해 비동기 보상 트랜잭션을 제어합니다.</a:t>
+            </a:r>
+            <a:endParaRPr lang="en-US" sz="2088" dirty="0"/>
+          </a:p>
+        </p:txBody>
+      </p:sp>
+      <p:sp>
+        <p:nvSpPr>
+          <p:cNvPr id="6" name="Shape 4"/>
+          <p:cNvSpPr/>
+          <p:nvPr/>
+        </p:nvSpPr>
+        <p:spPr>
+          <a:xfrm>
+            <a:off x="552480" y="3474994"/>
+            <a:ext cx="2372502" cy="912754"/>
+          </a:xfrm>
+          <a:prstGeom prst="roundRect">
+            <a:avLst>
+              <a:gd name="adj" fmla="val 12523"/>
+            </a:avLst>
+          </a:prstGeom>
+          <a:solidFill>
+            <a:srgbClr val="161E2E">
+              <a:alpha val="82000"/>
+            </a:srgbClr>
+          </a:solidFill>
+          <a:ln w="9525">
+            <a:solidFill>
+              <a:srgbClr val="FFFFFF">
+                <a:alpha val="9000"/>
+              </a:srgbClr>
+            </a:solidFill>
+            <a:prstDash val="solid"/>
+          </a:ln>
+        </p:spPr>
+      </p:sp>
+      <p:sp>
+        <p:nvSpPr>
+          <p:cNvPr id="7" name="Text 5"/>
+          <p:cNvSpPr txBox="1"/>
+          <p:nvPr/>
+        </p:nvSpPr>
+        <p:spPr>
+          <a:xfrm>
+            <a:off x="506303" y="3636935"/>
+            <a:ext cx="2464857" cy="171450"/>
+          </a:xfrm>
+          <a:prstGeom prst="rect">
+            <a:avLst/>
+          </a:prstGeom>
+          <a:noFill/>
+          <a:ln/>
+        </p:spPr>
+        <p:txBody>
+          <a:bodyPr wrap="none" lIns="0" tIns="0" rIns="0" bIns="0" rtlCol="0" anchor="t"/>
+          <a:lstStyle/>
+          <a:p>
+            <a:pPr algn="ctr" indent="0" marL="0">
+              <a:lnSpc>
+                <a:spcPts val="1350"/>
+              </a:lnSpc>
+              <a:buNone/>
+            </a:pPr>
+            <a:r>
+              <a:rPr lang="en-US" sz="900" b="1" spc="-54" kern="0" dirty="0">
+                <a:solidFill>
+                  <a:srgbClr val="38BDF8"/>
+                </a:solidFill>
+                <a:latin typeface="Malgun Gothic" pitchFamily="34" charset="0"/>
+                <a:ea typeface="Malgun Gothic" pitchFamily="34" charset="-122"/>
+                <a:cs typeface="Malgun Gothic" pitchFamily="34" charset="-120"/>
+              </a:rPr>
+              <a:t>PRODUCER</a:t>
+            </a:r>
+            <a:endParaRPr lang="en-US" sz="900" dirty="0"/>
+          </a:p>
+        </p:txBody>
+      </p:sp>
+      <p:sp>
+        <p:nvSpPr>
+          <p:cNvPr id="8" name="Text 6"/>
+          <p:cNvSpPr txBox="1"/>
+          <p:nvPr/>
+        </p:nvSpPr>
+        <p:spPr>
+          <a:xfrm>
+            <a:off x="506303" y="3824752"/>
+            <a:ext cx="2464857" cy="214884"/>
+          </a:xfrm>
+          <a:prstGeom prst="rect">
+            <a:avLst/>
+          </a:prstGeom>
+          <a:noFill/>
+          <a:ln/>
+        </p:spPr>
+        <p:txBody>
+          <a:bodyPr wrap="none" lIns="0" tIns="0" rIns="0" bIns="0" rtlCol="0" anchor="t"/>
+          <a:lstStyle/>
+          <a:p>
+            <a:pPr algn="ctr" indent="0" marL="0">
+              <a:lnSpc>
+                <a:spcPts val="1692"/>
+              </a:lnSpc>
+              <a:buNone/>
+            </a:pPr>
+            <a:r>
+              <a:rPr lang="en-US" sz="1128" b="1" spc="-54" kern="0" dirty="0">
+                <a:solidFill>
+                  <a:srgbClr val="FFFFFF"/>
+                </a:solidFill>
+                <a:latin typeface="Malgun Gothic" pitchFamily="34" charset="0"/>
+                <a:ea typeface="Malgun Gothic" pitchFamily="34" charset="-122"/>
+                <a:cs typeface="Malgun Gothic" pitchFamily="34" charset="-120"/>
+              </a:rPr>
+              <a:t>주문 요청 접수</a:t>
+            </a:r>
+            <a:endParaRPr lang="en-US" sz="1128" dirty="0"/>
+          </a:p>
+        </p:txBody>
+      </p:sp>
+      <p:sp>
+        <p:nvSpPr>
+          <p:cNvPr id="9" name="Text 7"/>
+          <p:cNvSpPr txBox="1"/>
+          <p:nvPr/>
+        </p:nvSpPr>
+        <p:spPr>
+          <a:xfrm>
+            <a:off x="506303" y="4055273"/>
+            <a:ext cx="2464857" cy="164592"/>
+          </a:xfrm>
+          <a:prstGeom prst="rect">
+            <a:avLst/>
+          </a:prstGeom>
+          <a:noFill/>
+          <a:ln/>
+        </p:spPr>
+        <p:txBody>
+          <a:bodyPr wrap="none" lIns="0" tIns="0" rIns="0" bIns="0" rtlCol="0" anchor="t"/>
+          <a:lstStyle/>
+          <a:p>
+            <a:pPr algn="ctr" indent="0" marL="0">
+              <a:lnSpc>
+                <a:spcPts val="1296"/>
+              </a:lnSpc>
+              <a:buNone/>
+            </a:pPr>
+            <a:r>
+              <a:rPr lang="en-US" sz="864" spc="-54" kern="0" dirty="0">
+                <a:solidFill>
+                  <a:srgbClr val="94A3B8"/>
+                </a:solidFill>
+                <a:latin typeface="Malgun Gothic" pitchFamily="34" charset="0"/>
+                <a:ea typeface="Malgun Gothic" pitchFamily="34" charset="-122"/>
+                <a:cs typeface="Malgun Gothic" pitchFamily="34" charset="-120"/>
+              </a:rPr>
+              <a:t>Outbox DB 적재</a:t>
+            </a:r>
+            <a:endParaRPr lang="en-US" sz="864" dirty="0"/>
+          </a:p>
+        </p:txBody>
+      </p:sp>
+      <p:sp>
+        <p:nvSpPr>
+          <p:cNvPr id="10" name="Text 8"/>
+          <p:cNvSpPr txBox="1"/>
+          <p:nvPr/>
+        </p:nvSpPr>
+        <p:spPr>
+          <a:xfrm>
+            <a:off x="3020172" y="3654674"/>
+            <a:ext cx="379933" cy="538673"/>
+          </a:xfrm>
+          <a:prstGeom prst="rect">
+            <a:avLst/>
+          </a:prstGeom>
+          <a:noFill/>
+          <a:ln/>
+        </p:spPr>
+        <p:txBody>
+          <a:bodyPr wrap="none" lIns="0" tIns="0" rIns="0" bIns="0" rtlCol="0" anchor="t"/>
+          <a:lstStyle/>
+          <a:p>
+            <a:pPr algn="l" indent="0" marL="0">
+              <a:lnSpc>
+                <a:spcPts val="4241"/>
+              </a:lnSpc>
+              <a:buNone/>
+            </a:pPr>
+            <a:r>
+              <a:rPr lang="en-US" sz="2828" b="1" spc="-54" kern="0" dirty="0">
+                <a:solidFill>
+                  <a:srgbClr val="38BDF8"/>
+                </a:solidFill>
+                <a:latin typeface="Malgun Gothic" pitchFamily="34" charset="0"/>
+                <a:ea typeface="Malgun Gothic" pitchFamily="34" charset="-122"/>
+                <a:cs typeface="Malgun Gothic" pitchFamily="34" charset="-120"/>
+              </a:rPr>
+              <a:t>➔</a:t>
+            </a:r>
+            <a:endParaRPr lang="en-US" sz="2828" dirty="0"/>
+          </a:p>
+        </p:txBody>
+      </p:sp>
+      <p:sp>
+        <p:nvSpPr>
+          <p:cNvPr id="11" name="Shape 9"/>
+          <p:cNvSpPr/>
+          <p:nvPr/>
+        </p:nvSpPr>
+        <p:spPr>
+          <a:xfrm>
+            <a:off x="3457255" y="3474994"/>
+            <a:ext cx="2372594" cy="912754"/>
+          </a:xfrm>
+          <a:prstGeom prst="roundRect">
+            <a:avLst>
+              <a:gd name="adj" fmla="val 12523"/>
+            </a:avLst>
+          </a:prstGeom>
+          <a:solidFill>
+            <a:srgbClr val="161E2E">
+              <a:alpha val="82000"/>
+            </a:srgbClr>
+          </a:solidFill>
+          <a:ln w="9525">
+            <a:solidFill>
+              <a:srgbClr val="6366F1">
+                <a:alpha val="40000"/>
+              </a:srgbClr>
+            </a:solidFill>
+            <a:prstDash val="solid"/>
+          </a:ln>
+        </p:spPr>
+      </p:sp>
+      <p:sp>
+        <p:nvSpPr>
+          <p:cNvPr id="12" name="Text 10"/>
+          <p:cNvSpPr txBox="1"/>
+          <p:nvPr/>
+        </p:nvSpPr>
+        <p:spPr>
+          <a:xfrm>
+            <a:off x="3411078" y="3636935"/>
+            <a:ext cx="2464948" cy="171450"/>
+          </a:xfrm>
+          <a:prstGeom prst="rect">
+            <a:avLst/>
+          </a:prstGeom>
+          <a:noFill/>
+          <a:ln/>
+        </p:spPr>
+        <p:txBody>
+          <a:bodyPr wrap="none" lIns="0" tIns="0" rIns="0" bIns="0" rtlCol="0" anchor="t"/>
+          <a:lstStyle/>
+          <a:p>
+            <a:pPr algn="ctr" indent="0" marL="0">
+              <a:lnSpc>
+                <a:spcPts val="1350"/>
+              </a:lnSpc>
+              <a:buNone/>
+            </a:pPr>
+            <a:r>
+              <a:rPr lang="en-US" sz="900" b="1" spc="-54" kern="0" dirty="0">
+                <a:solidFill>
+                  <a:srgbClr val="818CF8"/>
+                </a:solidFill>
+                <a:latin typeface="Malgun Gothic" pitchFamily="34" charset="0"/>
+                <a:ea typeface="Malgun Gothic" pitchFamily="34" charset="-122"/>
+                <a:cs typeface="Malgun Gothic" pitchFamily="34" charset="-120"/>
+              </a:rPr>
+              <a:t>CDC RELAY</a:t>
+            </a:r>
+            <a:endParaRPr lang="en-US" sz="900" dirty="0"/>
+          </a:p>
+        </p:txBody>
+      </p:sp>
+      <p:sp>
+        <p:nvSpPr>
+          <p:cNvPr id="13" name="Text 11"/>
+          <p:cNvSpPr txBox="1"/>
+          <p:nvPr/>
+        </p:nvSpPr>
+        <p:spPr>
+          <a:xfrm>
+            <a:off x="3411078" y="3824752"/>
+            <a:ext cx="2464948" cy="214884"/>
+          </a:xfrm>
+          <a:prstGeom prst="rect">
+            <a:avLst/>
+          </a:prstGeom>
+          <a:noFill/>
+          <a:ln/>
+        </p:spPr>
+        <p:txBody>
+          <a:bodyPr wrap="none" lIns="0" tIns="0" rIns="0" bIns="0" rtlCol="0" anchor="t"/>
+          <a:lstStyle/>
+          <a:p>
+            <a:pPr algn="ctr" indent="0" marL="0">
+              <a:lnSpc>
+                <a:spcPts val="1692"/>
+              </a:lnSpc>
+              <a:buNone/>
+            </a:pPr>
+            <a:r>
+              <a:rPr lang="en-US" sz="1128" b="1" spc="-54" kern="0" dirty="0">
+                <a:solidFill>
+                  <a:srgbClr val="FFFFFF"/>
+                </a:solidFill>
+                <a:latin typeface="Malgun Gothic" pitchFamily="34" charset="0"/>
+                <a:ea typeface="Malgun Gothic" pitchFamily="34" charset="-122"/>
+                <a:cs typeface="Malgun Gothic" pitchFamily="34" charset="-120"/>
+              </a:rPr>
+              <a:t>Debezium 캡처</a:t>
+            </a:r>
+            <a:endParaRPr lang="en-US" sz="1128" dirty="0"/>
+          </a:p>
+        </p:txBody>
+      </p:sp>
+      <p:sp>
+        <p:nvSpPr>
+          <p:cNvPr id="14" name="Text 12"/>
+          <p:cNvSpPr txBox="1"/>
+          <p:nvPr/>
+        </p:nvSpPr>
+        <p:spPr>
+          <a:xfrm>
+            <a:off x="3411078" y="4055273"/>
+            <a:ext cx="2464948" cy="164592"/>
+          </a:xfrm>
+          <a:prstGeom prst="rect">
+            <a:avLst/>
+          </a:prstGeom>
+          <a:noFill/>
+          <a:ln/>
+        </p:spPr>
+        <p:txBody>
+          <a:bodyPr wrap="none" lIns="0" tIns="0" rIns="0" bIns="0" rtlCol="0" anchor="t"/>
+          <a:lstStyle/>
+          <a:p>
+            <a:pPr algn="ctr" indent="0" marL="0">
+              <a:lnSpc>
+                <a:spcPts val="1296"/>
+              </a:lnSpc>
+              <a:buNone/>
+            </a:pPr>
+            <a:r>
+              <a:rPr lang="en-US" sz="864" spc="-54" kern="0" dirty="0">
+                <a:solidFill>
+                  <a:srgbClr val="94A3B8"/>
+                </a:solidFill>
+                <a:latin typeface="Malgun Gothic" pitchFamily="34" charset="0"/>
+                <a:ea typeface="Malgun Gothic" pitchFamily="34" charset="-122"/>
+                <a:cs typeface="Malgun Gothic" pitchFamily="34" charset="-120"/>
+              </a:rPr>
+              <a:t>Kafka 토픽 발행</a:t>
+            </a:r>
+            <a:endParaRPr lang="en-US" sz="864" dirty="0"/>
+          </a:p>
+        </p:txBody>
+      </p:sp>
+      <p:sp>
+        <p:nvSpPr>
+          <p:cNvPr id="15" name="Text 13"/>
+          <p:cNvSpPr txBox="1"/>
+          <p:nvPr/>
+        </p:nvSpPr>
+        <p:spPr>
+          <a:xfrm>
+            <a:off x="5925129" y="3654674"/>
+            <a:ext cx="379933" cy="538673"/>
+          </a:xfrm>
+          <a:prstGeom prst="rect">
+            <a:avLst/>
+          </a:prstGeom>
+          <a:noFill/>
+          <a:ln/>
+        </p:spPr>
+        <p:txBody>
+          <a:bodyPr wrap="none" lIns="0" tIns="0" rIns="0" bIns="0" rtlCol="0" anchor="t"/>
+          <a:lstStyle/>
+          <a:p>
+            <a:pPr algn="l" indent="0" marL="0">
+              <a:lnSpc>
+                <a:spcPts val="4241"/>
+              </a:lnSpc>
+              <a:buNone/>
+            </a:pPr>
+            <a:r>
+              <a:rPr lang="en-US" sz="2828" b="1" spc="-54" kern="0" dirty="0">
+                <a:solidFill>
+                  <a:srgbClr val="38BDF8"/>
+                </a:solidFill>
+                <a:latin typeface="Malgun Gothic" pitchFamily="34" charset="0"/>
+                <a:ea typeface="Malgun Gothic" pitchFamily="34" charset="-122"/>
+                <a:cs typeface="Malgun Gothic" pitchFamily="34" charset="-120"/>
+              </a:rPr>
+              <a:t>➔</a:t>
+            </a:r>
+            <a:endParaRPr lang="en-US" sz="2828" dirty="0"/>
+          </a:p>
+        </p:txBody>
+      </p:sp>
+      <p:sp>
+        <p:nvSpPr>
+          <p:cNvPr id="16" name="Shape 14"/>
+          <p:cNvSpPr/>
+          <p:nvPr/>
+        </p:nvSpPr>
+        <p:spPr>
+          <a:xfrm>
+            <a:off x="6362212" y="3474994"/>
+            <a:ext cx="2372502" cy="912754"/>
+          </a:xfrm>
+          <a:prstGeom prst="roundRect">
+            <a:avLst>
+              <a:gd name="adj" fmla="val 12523"/>
+            </a:avLst>
+          </a:prstGeom>
+          <a:solidFill>
+            <a:srgbClr val="1E1B4B">
+              <a:alpha val="85000"/>
+            </a:srgbClr>
+          </a:solidFill>
+          <a:ln w="9525">
+            <a:solidFill>
+              <a:srgbClr val="6366F1"/>
+            </a:solidFill>
+            <a:prstDash val="solid"/>
+          </a:ln>
+        </p:spPr>
+      </p:sp>
+      <p:sp>
+        <p:nvSpPr>
+          <p:cNvPr id="17" name="Text 15"/>
+          <p:cNvSpPr txBox="1"/>
+          <p:nvPr/>
+        </p:nvSpPr>
+        <p:spPr>
+          <a:xfrm>
+            <a:off x="6316035" y="3636935"/>
+            <a:ext cx="2464857" cy="171450"/>
+          </a:xfrm>
+          <a:prstGeom prst="rect">
+            <a:avLst/>
+          </a:prstGeom>
+          <a:noFill/>
+          <a:ln/>
+        </p:spPr>
+        <p:txBody>
+          <a:bodyPr wrap="none" lIns="0" tIns="0" rIns="0" bIns="0" rtlCol="0" anchor="t"/>
+          <a:lstStyle/>
+          <a:p>
+            <a:pPr algn="ctr" indent="0" marL="0">
+              <a:lnSpc>
+                <a:spcPts val="1350"/>
+              </a:lnSpc>
+              <a:buNone/>
+            </a:pPr>
+            <a:r>
+              <a:rPr lang="en-US" sz="900" b="1" spc="-54" kern="0" dirty="0">
+                <a:solidFill>
+                  <a:srgbClr val="A5B4FC"/>
+                </a:solidFill>
+                <a:latin typeface="Malgun Gothic" pitchFamily="34" charset="0"/>
+                <a:ea typeface="Malgun Gothic" pitchFamily="34" charset="-122"/>
+                <a:cs typeface="Malgun Gothic" pitchFamily="34" charset="-120"/>
+              </a:rPr>
+              <a:t>SAGA ENGINE</a:t>
+            </a:r>
+            <a:endParaRPr lang="en-US" sz="900" dirty="0"/>
+          </a:p>
+        </p:txBody>
+      </p:sp>
+      <p:sp>
+        <p:nvSpPr>
+          <p:cNvPr id="18" name="Text 16"/>
+          <p:cNvSpPr txBox="1"/>
+          <p:nvPr/>
+        </p:nvSpPr>
+        <p:spPr>
+          <a:xfrm>
+            <a:off x="6316035" y="3824752"/>
+            <a:ext cx="2464857" cy="214884"/>
+          </a:xfrm>
+          <a:prstGeom prst="rect">
+            <a:avLst/>
+          </a:prstGeom>
+          <a:noFill/>
+          <a:ln/>
+        </p:spPr>
+        <p:txBody>
+          <a:bodyPr wrap="none" lIns="0" tIns="0" rIns="0" bIns="0" rtlCol="0" anchor="t"/>
+          <a:lstStyle/>
+          <a:p>
+            <a:pPr algn="ctr" indent="0" marL="0">
+              <a:lnSpc>
+                <a:spcPts val="1692"/>
+              </a:lnSpc>
+              <a:buNone/>
+            </a:pPr>
+            <a:r>
+              <a:rPr lang="en-US" sz="1128" b="1" spc="-54" kern="0" dirty="0">
+                <a:solidFill>
+                  <a:srgbClr val="FFFFFF"/>
+                </a:solidFill>
+                <a:latin typeface="Malgun Gothic" pitchFamily="34" charset="0"/>
+                <a:ea typeface="Malgun Gothic" pitchFamily="34" charset="-122"/>
+                <a:cs typeface="Malgun Gothic" pitchFamily="34" charset="-120"/>
+              </a:rPr>
+              <a:t>단계별 상태 전이</a:t>
+            </a:r>
+            <a:endParaRPr lang="en-US" sz="1128" dirty="0"/>
+          </a:p>
+        </p:txBody>
+      </p:sp>
+      <p:sp>
+        <p:nvSpPr>
+          <p:cNvPr id="19" name="Text 17"/>
+          <p:cNvSpPr txBox="1"/>
+          <p:nvPr/>
+        </p:nvSpPr>
+        <p:spPr>
+          <a:xfrm>
+            <a:off x="6316035" y="4055273"/>
+            <a:ext cx="2464857" cy="164592"/>
+          </a:xfrm>
+          <a:prstGeom prst="rect">
+            <a:avLst/>
+          </a:prstGeom>
+          <a:noFill/>
+          <a:ln/>
+        </p:spPr>
+        <p:txBody>
+          <a:bodyPr wrap="none" lIns="0" tIns="0" rIns="0" bIns="0" rtlCol="0" anchor="t"/>
+          <a:lstStyle/>
+          <a:p>
+            <a:pPr algn="ctr" indent="0" marL="0">
+              <a:lnSpc>
+                <a:spcPts val="1296"/>
+              </a:lnSpc>
+              <a:buNone/>
+            </a:pPr>
+            <a:r>
+              <a:rPr lang="en-US" sz="864" spc="-54" kern="0" dirty="0">
+                <a:solidFill>
+                  <a:srgbClr val="C7D2FE"/>
+                </a:solidFill>
+                <a:latin typeface="Malgun Gothic" pitchFamily="34" charset="0"/>
+                <a:ea typeface="Malgun Gothic" pitchFamily="34" charset="-122"/>
+                <a:cs typeface="Malgun Gothic" pitchFamily="34" charset="-120"/>
+              </a:rPr>
+              <a:t>결제/재고 이벤트</a:t>
+            </a:r>
+            <a:endParaRPr lang="en-US" sz="864" dirty="0"/>
+          </a:p>
+        </p:txBody>
+      </p:sp>
+      <p:sp>
+        <p:nvSpPr>
+          <p:cNvPr id="20" name="Text 18"/>
+          <p:cNvSpPr txBox="1"/>
+          <p:nvPr/>
+        </p:nvSpPr>
+        <p:spPr>
+          <a:xfrm>
+            <a:off x="8829995" y="3654674"/>
+            <a:ext cx="379933" cy="538673"/>
+          </a:xfrm>
+          <a:prstGeom prst="rect">
+            <a:avLst/>
+          </a:prstGeom>
+          <a:noFill/>
+          <a:ln/>
+        </p:spPr>
+        <p:txBody>
+          <a:bodyPr wrap="none" lIns="0" tIns="0" rIns="0" bIns="0" rtlCol="0" anchor="t"/>
+          <a:lstStyle/>
+          <a:p>
+            <a:pPr algn="l" indent="0" marL="0">
+              <a:lnSpc>
+                <a:spcPts val="4241"/>
+              </a:lnSpc>
+              <a:buNone/>
+            </a:pPr>
+            <a:r>
+              <a:rPr lang="en-US" sz="2828" b="1" spc="-54" kern="0" dirty="0">
+                <a:solidFill>
+                  <a:srgbClr val="38BDF8"/>
+                </a:solidFill>
+                <a:latin typeface="Malgun Gothic" pitchFamily="34" charset="0"/>
+                <a:ea typeface="Malgun Gothic" pitchFamily="34" charset="-122"/>
+                <a:cs typeface="Malgun Gothic" pitchFamily="34" charset="-120"/>
+              </a:rPr>
+              <a:t>➔</a:t>
+            </a:r>
+            <a:endParaRPr lang="en-US" sz="2828" dirty="0"/>
+          </a:p>
+        </p:txBody>
+      </p:sp>
+      <p:sp>
+        <p:nvSpPr>
+          <p:cNvPr id="21" name="Shape 19"/>
+          <p:cNvSpPr/>
+          <p:nvPr/>
+        </p:nvSpPr>
+        <p:spPr>
+          <a:xfrm>
+            <a:off x="9267078" y="3474994"/>
+            <a:ext cx="2372502" cy="912754"/>
+          </a:xfrm>
+          <a:prstGeom prst="roundRect">
+            <a:avLst>
+              <a:gd name="adj" fmla="val 12523"/>
+            </a:avLst>
+          </a:prstGeom>
+          <a:solidFill>
+            <a:srgbClr val="161E2E">
+              <a:alpha val="82000"/>
+            </a:srgbClr>
+          </a:solidFill>
+          <a:ln w="9525">
+            <a:solidFill>
+              <a:srgbClr val="34D399">
+                <a:alpha val="40000"/>
+              </a:srgbClr>
+            </a:solidFill>
+            <a:prstDash val="solid"/>
+          </a:ln>
+        </p:spPr>
+      </p:sp>
+      <p:sp>
+        <p:nvSpPr>
+          <p:cNvPr id="22" name="Text 20"/>
+          <p:cNvSpPr txBox="1"/>
+          <p:nvPr/>
+        </p:nvSpPr>
+        <p:spPr>
+          <a:xfrm>
+            <a:off x="9220901" y="3636935"/>
+            <a:ext cx="2464857" cy="171450"/>
+          </a:xfrm>
+          <a:prstGeom prst="rect">
+            <a:avLst/>
+          </a:prstGeom>
+          <a:noFill/>
+          <a:ln/>
+        </p:spPr>
+        <p:txBody>
+          <a:bodyPr wrap="none" lIns="0" tIns="0" rIns="0" bIns="0" rtlCol="0" anchor="t"/>
+          <a:lstStyle/>
+          <a:p>
+            <a:pPr algn="ctr" indent="0" marL="0">
+              <a:lnSpc>
+                <a:spcPts val="1350"/>
+              </a:lnSpc>
+              <a:buNone/>
+            </a:pPr>
+            <a:r>
+              <a:rPr lang="en-US" sz="900" b="1" spc="-54" kern="0" dirty="0">
+                <a:solidFill>
+                  <a:srgbClr val="34D399"/>
+                </a:solidFill>
+                <a:latin typeface="Malgun Gothic" pitchFamily="34" charset="0"/>
+                <a:ea typeface="Malgun Gothic" pitchFamily="34" charset="-122"/>
+                <a:cs typeface="Malgun Gothic" pitchFamily="34" charset="-120"/>
+              </a:rPr>
+              <a:t>CONSUMER</a:t>
+            </a:r>
+            <a:endParaRPr lang="en-US" sz="900" dirty="0"/>
+          </a:p>
+        </p:txBody>
+      </p:sp>
+      <p:sp>
+        <p:nvSpPr>
+          <p:cNvPr id="23" name="Text 21"/>
+          <p:cNvSpPr txBox="1"/>
+          <p:nvPr/>
+        </p:nvSpPr>
+        <p:spPr>
+          <a:xfrm>
+            <a:off x="9220901" y="3824752"/>
+            <a:ext cx="2464857" cy="214884"/>
+          </a:xfrm>
+          <a:prstGeom prst="rect">
+            <a:avLst/>
+          </a:prstGeom>
+          <a:noFill/>
+          <a:ln/>
+        </p:spPr>
+        <p:txBody>
+          <a:bodyPr wrap="none" lIns="0" tIns="0" rIns="0" bIns="0" rtlCol="0" anchor="t"/>
+          <a:lstStyle/>
+          <a:p>
+            <a:pPr algn="ctr" indent="0" marL="0">
+              <a:lnSpc>
+                <a:spcPts val="1692"/>
+              </a:lnSpc>
+              <a:buNone/>
+            </a:pPr>
+            <a:r>
+              <a:rPr lang="en-US" sz="1128" b="1" spc="-54" kern="0" dirty="0">
+                <a:solidFill>
+                  <a:srgbClr val="FFFFFF"/>
+                </a:solidFill>
+                <a:latin typeface="Malgun Gothic" pitchFamily="34" charset="0"/>
+                <a:ea typeface="Malgun Gothic" pitchFamily="34" charset="-122"/>
+                <a:cs typeface="Malgun Gothic" pitchFamily="34" charset="-120"/>
+              </a:rPr>
+              <a:t>Idempotent 처리</a:t>
+            </a:r>
+            <a:endParaRPr lang="en-US" sz="1128" dirty="0"/>
+          </a:p>
+        </p:txBody>
+      </p:sp>
+      <p:sp>
+        <p:nvSpPr>
+          <p:cNvPr id="24" name="Text 22"/>
+          <p:cNvSpPr txBox="1"/>
+          <p:nvPr/>
+        </p:nvSpPr>
+        <p:spPr>
+          <a:xfrm>
+            <a:off x="9220901" y="4055273"/>
+            <a:ext cx="2464857" cy="164592"/>
+          </a:xfrm>
+          <a:prstGeom prst="rect">
+            <a:avLst/>
+          </a:prstGeom>
+          <a:noFill/>
+          <a:ln/>
+        </p:spPr>
+        <p:txBody>
+          <a:bodyPr wrap="none" lIns="0" tIns="0" rIns="0" bIns="0" rtlCol="0" anchor="t"/>
+          <a:lstStyle/>
+          <a:p>
+            <a:pPr algn="ctr" indent="0" marL="0">
+              <a:lnSpc>
+                <a:spcPts val="1296"/>
+              </a:lnSpc>
+              <a:buNone/>
+            </a:pPr>
+            <a:r>
+              <a:rPr lang="en-US" sz="864" spc="-54" kern="0" dirty="0">
+                <a:solidFill>
+                  <a:srgbClr val="94A3B8"/>
+                </a:solidFill>
+                <a:latin typeface="Malgun Gothic" pitchFamily="34" charset="0"/>
+                <a:ea typeface="Malgun Gothic" pitchFamily="34" charset="-122"/>
+                <a:cs typeface="Malgun Gothic" pitchFamily="34" charset="-120"/>
+              </a:rPr>
+              <a:t>최종 일관성 달성</a:t>
+            </a:r>
+            <a:endParaRPr lang="en-US" sz="864" dirty="0"/>
+          </a:p>
+        </p:txBody>
+      </p:sp>
+      <p:sp>
+        <p:nvSpPr>
+          <p:cNvPr id="25" name="Shape 23"/>
+          <p:cNvSpPr/>
+          <p:nvPr/>
+        </p:nvSpPr>
+        <p:spPr>
+          <a:xfrm>
+            <a:off x="552480" y="4559198"/>
+            <a:ext cx="5467380" cy="746059"/>
+          </a:xfrm>
+          <a:prstGeom prst="roundRect">
+            <a:avLst>
+              <a:gd name="adj" fmla="val 17870"/>
+            </a:avLst>
+          </a:prstGeom>
+          <a:solidFill>
+            <a:srgbClr val="161E2E">
+              <a:alpha val="82000"/>
+            </a:srgbClr>
+          </a:solidFill>
+          <a:ln w="9525">
+            <a:solidFill>
+              <a:srgbClr val="FFFFFF">
+                <a:alpha val="9000"/>
+              </a:srgbClr>
+            </a:solidFill>
+            <a:prstDash val="solid"/>
+          </a:ln>
+        </p:spPr>
+      </p:sp>
+      <p:sp>
+        <p:nvSpPr>
+          <p:cNvPr id="26" name="Text 24"/>
+          <p:cNvSpPr txBox="1"/>
+          <p:nvPr/>
+        </p:nvSpPr>
+        <p:spPr>
+          <a:xfrm>
+            <a:off x="733440" y="4718304"/>
+            <a:ext cx="5491704" cy="205740"/>
+          </a:xfrm>
+          <a:prstGeom prst="rect">
+            <a:avLst/>
+          </a:prstGeom>
+          <a:noFill/>
+          <a:ln/>
+        </p:spPr>
+        <p:txBody>
+          <a:bodyPr wrap="none" lIns="0" tIns="0" rIns="0" bIns="0" rtlCol="0" anchor="t"/>
+          <a:lstStyle/>
+          <a:p>
+            <a:pPr algn="l" indent="0" marL="0">
+              <a:lnSpc>
+                <a:spcPts val="1620"/>
+              </a:lnSpc>
+              <a:buNone/>
+            </a:pPr>
+            <a:r>
+              <a:rPr lang="en-US" sz="1080" b="1" spc="-54" kern="0" dirty="0">
+                <a:solidFill>
+                  <a:srgbClr val="38BDF8"/>
+                </a:solidFill>
+                <a:latin typeface="Malgun Gothic" pitchFamily="34" charset="0"/>
+                <a:ea typeface="Malgun Gothic" pitchFamily="34" charset="-122"/>
+                <a:cs typeface="Malgun Gothic" pitchFamily="34" charset="-120"/>
+              </a:rPr>
+              <a:t>✓ Transactional Outbox 패턴</a:t>
+            </a:r>
+            <a:endParaRPr lang="en-US" sz="1080" dirty="0"/>
+          </a:p>
+        </p:txBody>
+      </p:sp>
+      <p:sp>
+        <p:nvSpPr>
+          <p:cNvPr id="27" name="Text 25"/>
+          <p:cNvSpPr txBox="1"/>
+          <p:nvPr/>
+        </p:nvSpPr>
+        <p:spPr>
+          <a:xfrm>
+            <a:off x="733440" y="4956871"/>
+            <a:ext cx="5491704" cy="178308"/>
+          </a:xfrm>
+          <a:prstGeom prst="rect">
+            <a:avLst/>
+          </a:prstGeom>
+          <a:noFill/>
+          <a:ln/>
+        </p:spPr>
+        <p:txBody>
+          <a:bodyPr wrap="none" lIns="0" tIns="0" rIns="0" bIns="0" rtlCol="0" anchor="t"/>
+          <a:lstStyle/>
+          <a:p>
+            <a:pPr algn="l" indent="0" marL="0">
+              <a:lnSpc>
+                <a:spcPts val="1404"/>
+              </a:lnSpc>
+              <a:buNone/>
+            </a:pPr>
+            <a:r>
+              <a:rPr lang="en-US" sz="936" spc="-54" kern="0" dirty="0">
+                <a:solidFill>
+                  <a:srgbClr val="E2E8F0"/>
+                </a:solidFill>
+                <a:latin typeface="Malgun Gothic" pitchFamily="34" charset="0"/>
+                <a:ea typeface="Malgun Gothic" pitchFamily="34" charset="-122"/>
+                <a:cs typeface="Malgun Gothic" pitchFamily="34" charset="-120"/>
+              </a:rPr>
+              <a:t>로컬 트랜잭션 내에서 비즈니스 데이터와 이벤트 테이블을 동시 커밋하여 메시지 유실 0% 달성</a:t>
+            </a:r>
+            <a:endParaRPr lang="en-US" sz="936" dirty="0"/>
+          </a:p>
+        </p:txBody>
+      </p:sp>
+      <p:sp>
+        <p:nvSpPr>
+          <p:cNvPr id="28" name="Shape 26"/>
+          <p:cNvSpPr/>
+          <p:nvPr/>
+        </p:nvSpPr>
+        <p:spPr>
+          <a:xfrm>
+            <a:off x="6172200" y="4559198"/>
+            <a:ext cx="5467380" cy="746059"/>
+          </a:xfrm>
+          <a:prstGeom prst="roundRect">
+            <a:avLst>
+              <a:gd name="adj" fmla="val 17870"/>
+            </a:avLst>
+          </a:prstGeom>
+          <a:solidFill>
+            <a:srgbClr val="161E2E">
+              <a:alpha val="82000"/>
+            </a:srgbClr>
+          </a:solidFill>
+          <a:ln w="9525">
+            <a:solidFill>
+              <a:srgbClr val="FFFFFF">
+                <a:alpha val="9000"/>
+              </a:srgbClr>
+            </a:solidFill>
+            <a:prstDash val="solid"/>
+          </a:ln>
+        </p:spPr>
+      </p:sp>
+      <p:sp>
+        <p:nvSpPr>
+          <p:cNvPr id="29" name="Text 27"/>
+          <p:cNvSpPr txBox="1"/>
+          <p:nvPr/>
+        </p:nvSpPr>
+        <p:spPr>
+          <a:xfrm>
+            <a:off x="6353160" y="4718304"/>
+            <a:ext cx="5491704" cy="205740"/>
+          </a:xfrm>
+          <a:prstGeom prst="rect">
+            <a:avLst/>
+          </a:prstGeom>
+          <a:noFill/>
+          <a:ln/>
+        </p:spPr>
+        <p:txBody>
+          <a:bodyPr wrap="none" lIns="0" tIns="0" rIns="0" bIns="0" rtlCol="0" anchor="t"/>
+          <a:lstStyle/>
+          <a:p>
+            <a:pPr algn="l" indent="0" marL="0">
+              <a:lnSpc>
+                <a:spcPts val="1620"/>
+              </a:lnSpc>
+              <a:buNone/>
+            </a:pPr>
+            <a:r>
+              <a:rPr lang="en-US" sz="1080" b="1" spc="-54" kern="0" dirty="0">
+                <a:solidFill>
+                  <a:srgbClr val="34D399"/>
+                </a:solidFill>
+                <a:latin typeface="Malgun Gothic" pitchFamily="34" charset="0"/>
+                <a:ea typeface="Malgun Gothic" pitchFamily="34" charset="-122"/>
+                <a:cs typeface="Malgun Gothic" pitchFamily="34" charset="-120"/>
+              </a:rPr>
+              <a:t>✓ 자동 보상 트랜잭션(Compensation)</a:t>
+            </a:r>
+            <a:endParaRPr lang="en-US" sz="1080" dirty="0"/>
+          </a:p>
+        </p:txBody>
+      </p:sp>
+      <p:sp>
+        <p:nvSpPr>
+          <p:cNvPr id="30" name="Text 28"/>
+          <p:cNvSpPr txBox="1"/>
+          <p:nvPr/>
+        </p:nvSpPr>
+        <p:spPr>
+          <a:xfrm>
+            <a:off x="6353160" y="4956871"/>
+            <a:ext cx="5491704" cy="178308"/>
+          </a:xfrm>
+          <a:prstGeom prst="rect">
+            <a:avLst/>
+          </a:prstGeom>
+          <a:noFill/>
+          <a:ln/>
+        </p:spPr>
+        <p:txBody>
+          <a:bodyPr wrap="none" lIns="0" tIns="0" rIns="0" bIns="0" rtlCol="0" anchor="t"/>
+          <a:lstStyle/>
+          <a:p>
+            <a:pPr algn="l" indent="0" marL="0">
+              <a:lnSpc>
+                <a:spcPts val="1404"/>
+              </a:lnSpc>
+              <a:buNone/>
+            </a:pPr>
+            <a:r>
+              <a:rPr lang="en-US" sz="936" spc="-54" kern="0" dirty="0">
+                <a:solidFill>
+                  <a:srgbClr val="E2E8F0"/>
+                </a:solidFill>
+                <a:latin typeface="Malgun Gothic" pitchFamily="34" charset="0"/>
+                <a:ea typeface="Malgun Gothic" pitchFamily="34" charset="-122"/>
+                <a:cs typeface="Malgun Gothic" pitchFamily="34" charset="-120"/>
+              </a:rPr>
+              <a:t>중간 단계 실패 시 역순으로 롤백 이벤트를 발행하여 글로벌 락 없이 완벽한 최종 일관성 보장</a:t>
+            </a:r>
+            <a:endParaRPr lang="en-US" sz="936" dirty="0"/>
+          </a:p>
+        </p:txBody>
+      </p:sp>
     </p:spTree>
   </p:cSld>
   <p:clrMapOvr>
@@ -1463,16 +5484,9 @@
   <p:cSld name="Slide 5">
     <p:bg>
       <p:bgPr>
-        <a:blipFill dpi="0" rotWithShape="1">
-          <a:blip r:embed="rId1">
-            <a:lum/>
-          </a:blip>
-          <a:srcRect/>
-          <a:stretch>
-            <a:fillRect/>
-          </a:stretch>
-        </a:blipFill>
-        <a:effectLst/>
+        <a:solidFill>
+          <a:srgbClr val="4E92F5"/>
+        </a:solidFill>
       </p:bgPr>
     </p:bg>
     <p:spTree>
@@ -1489,6 +5503,1090 @@
           <a:chExt cx="0" cy="0"/>
         </a:xfrm>
       </p:grpSpPr>
+      <p:sp>
+        <p:nvSpPr>
+          <p:cNvPr id="2" name="Shape 0"/>
+          <p:cNvSpPr/>
+          <p:nvPr/>
+        </p:nvSpPr>
+        <p:spPr>
+          <a:xfrm>
+            <a:off x="4741347" y="1124986"/>
+            <a:ext cx="2709093" cy="418521"/>
+          </a:xfrm>
+          <a:prstGeom prst="roundRect">
+            <a:avLst>
+              <a:gd name="adj" fmla="val 50011"/>
+            </a:avLst>
+          </a:prstGeom>
+          <a:solidFill>
+            <a:srgbClr val="FACC15">
+              <a:alpha val="15000"/>
+            </a:srgbClr>
+          </a:solidFill>
+          <a:ln w="9525">
+            <a:solidFill>
+              <a:srgbClr val="FACC15">
+                <a:alpha val="35000"/>
+              </a:srgbClr>
+            </a:solidFill>
+            <a:prstDash val="solid"/>
+          </a:ln>
+        </p:spPr>
+      </p:sp>
+      <p:sp>
+        <p:nvSpPr>
+          <p:cNvPr id="3" name="Text 1"/>
+          <p:cNvSpPr txBox="1"/>
+          <p:nvPr/>
+        </p:nvSpPr>
+        <p:spPr>
+          <a:xfrm>
+            <a:off x="4690323" y="1168146"/>
+            <a:ext cx="2811048" cy="323149"/>
+          </a:xfrm>
+          <a:prstGeom prst="rect">
+            <a:avLst/>
+          </a:prstGeom>
+          <a:noFill/>
+          <a:ln/>
+        </p:spPr>
+        <p:txBody>
+          <a:bodyPr wrap="none" lIns="0" tIns="0" rIns="0" bIns="0" rtlCol="0" anchor="t"/>
+          <a:lstStyle/>
+          <a:p>
+            <a:pPr algn="ctr" indent="0" marL="0">
+              <a:lnSpc>
+                <a:spcPts val="2545"/>
+              </a:lnSpc>
+              <a:buNone/>
+            </a:pPr>
+            <a:r>
+              <a:rPr lang="en-US" sz="1697" b="1" spc="34" kern="0" dirty="0">
+                <a:solidFill>
+                  <a:srgbClr val="FACC15"/>
+                </a:solidFill>
+                <a:latin typeface="Malgun Gothic" pitchFamily="34" charset="0"/>
+                <a:ea typeface="Malgun Gothic" pitchFamily="34" charset="-122"/>
+                <a:cs typeface="Malgun Gothic" pitchFamily="34" charset="-120"/>
+              </a:rPr>
+              <a:t>BENCHMARK RESULTS</a:t>
+            </a:r>
+            <a:endParaRPr lang="en-US" sz="1697" dirty="0"/>
+          </a:p>
+        </p:txBody>
+      </p:sp>
+      <p:sp>
+        <p:nvSpPr>
+          <p:cNvPr id="4" name="Text 2"/>
+          <p:cNvSpPr txBox="1"/>
+          <p:nvPr/>
+        </p:nvSpPr>
+        <p:spPr>
+          <a:xfrm>
+            <a:off x="-334488" y="1619677"/>
+            <a:ext cx="12861036" cy="590611"/>
+          </a:xfrm>
+          <a:prstGeom prst="rect">
+            <a:avLst/>
+          </a:prstGeom>
+          <a:noFill/>
+          <a:ln/>
+        </p:spPr>
+        <p:txBody>
+          <a:bodyPr wrap="none" lIns="0" tIns="0" rIns="0" bIns="0" rtlCol="0" anchor="t"/>
+          <a:lstStyle/>
+          <a:p>
+            <a:pPr algn="ctr" indent="0" marL="0">
+              <a:lnSpc>
+                <a:spcPts val="4651"/>
+              </a:lnSpc>
+              <a:buNone/>
+            </a:pPr>
+            <a:r>
+              <a:rPr lang="en-US" sz="3524" b="1" spc="-88" kern="0" dirty="0">
+                <a:solidFill>
+                  <a:srgbClr val="FFFFFF"/>
+                </a:solidFill>
+                <a:latin typeface="Malgun Gothic" pitchFamily="34" charset="0"/>
+                <a:ea typeface="Malgun Gothic" pitchFamily="34" charset="-122"/>
+                <a:cs typeface="Malgun Gothic" pitchFamily="34" charset="-120"/>
+              </a:rPr>
+              <a:t>아키텍처 전환 후 달성한 3대 엔지니어링 성과</a:t>
+            </a:r>
+            <a:endParaRPr lang="en-US" sz="3524" dirty="0"/>
+          </a:p>
+        </p:txBody>
+      </p:sp>
+      <p:sp>
+        <p:nvSpPr>
+          <p:cNvPr id="5" name="Text 3"/>
+          <p:cNvSpPr txBox="1"/>
+          <p:nvPr/>
+        </p:nvSpPr>
+        <p:spPr>
+          <a:xfrm>
+            <a:off x="-334488" y="2393442"/>
+            <a:ext cx="12861036" cy="397764"/>
+          </a:xfrm>
+          <a:prstGeom prst="rect">
+            <a:avLst/>
+          </a:prstGeom>
+          <a:noFill/>
+          <a:ln/>
+        </p:spPr>
+        <p:txBody>
+          <a:bodyPr wrap="none" lIns="0" tIns="0" rIns="0" bIns="0" rtlCol="0" anchor="t"/>
+          <a:lstStyle/>
+          <a:p>
+            <a:pPr algn="ctr" indent="0" marL="0">
+              <a:lnSpc>
+                <a:spcPts val="3132"/>
+              </a:lnSpc>
+              <a:buNone/>
+            </a:pPr>
+            <a:r>
+              <a:rPr lang="en-US" sz="2088" spc="-54" kern="0" dirty="0">
+                <a:solidFill>
+                  <a:srgbClr val="94A3B8"/>
+                </a:solidFill>
+                <a:latin typeface="Malgun Gothic" pitchFamily="34" charset="0"/>
+                <a:ea typeface="Malgun Gothic" pitchFamily="34" charset="-122"/>
+                <a:cs typeface="Malgun Gothic" pitchFamily="34" charset="-120"/>
+              </a:rPr>
+              <a:t>동일 하드웨어 스펙에서 동기 호출 대비 처리량 10배 증가 및 P99 응답시간 85% 단축</a:t>
+            </a:r>
+            <a:endParaRPr lang="en-US" sz="2088" dirty="0"/>
+          </a:p>
+        </p:txBody>
+      </p:sp>
+      <p:sp>
+        <p:nvSpPr>
+          <p:cNvPr id="6" name="Shape 4"/>
+          <p:cNvSpPr/>
+          <p:nvPr/>
+        </p:nvSpPr>
+        <p:spPr>
+          <a:xfrm>
+            <a:off x="552480" y="3028218"/>
+            <a:ext cx="3594049" cy="2723632"/>
+          </a:xfrm>
+          <a:prstGeom prst="roundRect">
+            <a:avLst>
+              <a:gd name="adj" fmla="val 4895"/>
+            </a:avLst>
+          </a:prstGeom>
+          <a:solidFill>
+            <a:srgbClr val="161E2E">
+              <a:alpha val="82000"/>
+            </a:srgbClr>
+          </a:solidFill>
+          <a:ln/>
+        </p:spPr>
+      </p:sp>
+      <p:sp>
+        <p:nvSpPr>
+          <p:cNvPr id="7" name="Shape 5"/>
+          <p:cNvSpPr/>
+          <p:nvPr/>
+        </p:nvSpPr>
+        <p:spPr>
+          <a:xfrm>
+            <a:off x="552480" y="3028218"/>
+            <a:ext cx="3594049" cy="28621"/>
+          </a:xfrm>
+          <a:prstGeom prst="rect">
+            <a:avLst/>
+          </a:prstGeom>
+          <a:solidFill>
+            <a:srgbClr val="FACC15"/>
+          </a:solidFill>
+          <a:ln/>
+        </p:spPr>
+      </p:sp>
+      <p:sp>
+        <p:nvSpPr>
+          <p:cNvPr id="8" name="Shape 6"/>
+          <p:cNvSpPr/>
+          <p:nvPr/>
+        </p:nvSpPr>
+        <p:spPr>
+          <a:xfrm>
+            <a:off x="4137020" y="3028218"/>
+            <a:ext cx="9510" cy="2723632"/>
+          </a:xfrm>
+          <a:prstGeom prst="rect">
+            <a:avLst/>
+          </a:prstGeom>
+          <a:solidFill>
+            <a:srgbClr val="FFFFFF">
+              <a:alpha val="9000"/>
+            </a:srgbClr>
+          </a:solidFill>
+          <a:ln/>
+        </p:spPr>
+      </p:sp>
+      <p:sp>
+        <p:nvSpPr>
+          <p:cNvPr id="9" name="Shape 7"/>
+          <p:cNvSpPr/>
+          <p:nvPr/>
+        </p:nvSpPr>
+        <p:spPr>
+          <a:xfrm>
+            <a:off x="552480" y="5742341"/>
+            <a:ext cx="3594049" cy="9510"/>
+          </a:xfrm>
+          <a:prstGeom prst="rect">
+            <a:avLst/>
+          </a:prstGeom>
+          <a:solidFill>
+            <a:srgbClr val="FFFFFF">
+              <a:alpha val="9000"/>
+            </a:srgbClr>
+          </a:solidFill>
+          <a:ln/>
+        </p:spPr>
+      </p:sp>
+      <p:sp>
+        <p:nvSpPr>
+          <p:cNvPr id="10" name="Shape 8"/>
+          <p:cNvSpPr/>
+          <p:nvPr/>
+        </p:nvSpPr>
+        <p:spPr>
+          <a:xfrm>
+            <a:off x="552480" y="3028218"/>
+            <a:ext cx="9510" cy="2723632"/>
+          </a:xfrm>
+          <a:prstGeom prst="rect">
+            <a:avLst/>
+          </a:prstGeom>
+          <a:solidFill>
+            <a:srgbClr val="FFFFFF">
+              <a:alpha val="9000"/>
+            </a:srgbClr>
+          </a:solidFill>
+          <a:ln/>
+        </p:spPr>
+      </p:sp>
+      <p:sp>
+        <p:nvSpPr>
+          <p:cNvPr id="11" name="Shape 9"/>
+          <p:cNvSpPr/>
+          <p:nvPr/>
+        </p:nvSpPr>
+        <p:spPr>
+          <a:xfrm>
+            <a:off x="2225650" y="3266328"/>
+            <a:ext cx="247620" cy="247620"/>
+          </a:xfrm>
+          <a:prstGeom prst="roundRect">
+            <a:avLst>
+              <a:gd name="adj" fmla="val 50000"/>
+            </a:avLst>
+          </a:prstGeom>
+          <a:solidFill>
+            <a:srgbClr val="FACC15">
+              <a:alpha val="15000"/>
+            </a:srgbClr>
+          </a:solidFill>
+          <a:ln w="9525">
+            <a:solidFill>
+              <a:srgbClr val="FACC15">
+                <a:alpha val="40000"/>
+              </a:srgbClr>
+            </a:solidFill>
+            <a:prstDash val="solid"/>
+          </a:ln>
+        </p:spPr>
+      </p:sp>
+      <p:sp>
+        <p:nvSpPr>
+          <p:cNvPr id="12" name="Text 10"/>
+          <p:cNvSpPr txBox="1"/>
+          <p:nvPr/>
+        </p:nvSpPr>
+        <p:spPr>
+          <a:xfrm>
+            <a:off x="2178009" y="3231855"/>
+            <a:ext cx="342900" cy="310805"/>
+          </a:xfrm>
+          <a:prstGeom prst="rect">
+            <a:avLst/>
+          </a:prstGeom>
+          <a:noFill/>
+          <a:ln/>
+        </p:spPr>
+        <p:txBody>
+          <a:bodyPr wrap="none" lIns="0" tIns="0" rIns="0" bIns="0" rtlCol="0" anchor="t"/>
+          <a:lstStyle/>
+          <a:p>
+            <a:pPr algn="ctr" indent="0" marL="0">
+              <a:lnSpc>
+                <a:spcPts val="2447"/>
+              </a:lnSpc>
+              <a:buNone/>
+            </a:pPr>
+            <a:r>
+              <a:rPr lang="en-US" sz="1631" b="1" spc="-54" kern="0" dirty="0">
+                <a:solidFill>
+                  <a:srgbClr val="FACC15"/>
+                </a:solidFill>
+                <a:latin typeface="Malgun Gothic" pitchFamily="34" charset="0"/>
+                <a:ea typeface="Malgun Gothic" pitchFamily="34" charset="-122"/>
+                <a:cs typeface="Malgun Gothic" pitchFamily="34" charset="-120"/>
+              </a:rPr>
+              <a:t>01</a:t>
+            </a:r>
+            <a:endParaRPr lang="en-US" sz="1631" dirty="0"/>
+          </a:p>
+        </p:txBody>
+      </p:sp>
+      <p:sp>
+        <p:nvSpPr>
+          <p:cNvPr id="13" name="Text 11"/>
+          <p:cNvSpPr txBox="1"/>
+          <p:nvPr/>
+        </p:nvSpPr>
+        <p:spPr>
+          <a:xfrm>
+            <a:off x="474848" y="3570183"/>
+            <a:ext cx="3749223" cy="773400"/>
+          </a:xfrm>
+          <a:prstGeom prst="rect">
+            <a:avLst/>
+          </a:prstGeom>
+          <a:noFill/>
+          <a:ln/>
+        </p:spPr>
+        <p:txBody>
+          <a:bodyPr wrap="none" lIns="0" tIns="0" rIns="0" bIns="0" rtlCol="0" anchor="t"/>
+          <a:lstStyle/>
+          <a:p>
+            <a:pPr algn="ctr" indent="0" marL="0">
+              <a:lnSpc>
+                <a:spcPts val="6090"/>
+              </a:lnSpc>
+              <a:buNone/>
+            </a:pPr>
+            <a:r>
+              <a:rPr lang="en-US" sz="6090" b="1" spc="-54" kern="0" dirty="0">
+                <a:solidFill>
+                  <a:srgbClr val="FACC15"/>
+                </a:solidFill>
+                <a:latin typeface="Malgun Gothic" pitchFamily="34" charset="0"/>
+                <a:ea typeface="Malgun Gothic" pitchFamily="34" charset="-122"/>
+                <a:cs typeface="Malgun Gothic" pitchFamily="34" charset="-120"/>
+              </a:rPr>
+              <a:t>120K</a:t>
+            </a:r>
+            <a:endParaRPr lang="en-US" sz="6090" dirty="0"/>
+          </a:p>
+        </p:txBody>
+      </p:sp>
+      <p:sp>
+        <p:nvSpPr>
+          <p:cNvPr id="14" name="Text 12"/>
+          <p:cNvSpPr txBox="1"/>
+          <p:nvPr/>
+        </p:nvSpPr>
+        <p:spPr>
+          <a:xfrm>
+            <a:off x="474848" y="4398721"/>
+            <a:ext cx="3749223" cy="406085"/>
+          </a:xfrm>
+          <a:prstGeom prst="rect">
+            <a:avLst/>
+          </a:prstGeom>
+          <a:noFill/>
+          <a:ln/>
+        </p:spPr>
+        <p:txBody>
+          <a:bodyPr wrap="none" lIns="0" tIns="0" rIns="0" bIns="0" rtlCol="0" anchor="t"/>
+          <a:lstStyle/>
+          <a:p>
+            <a:pPr algn="ctr" indent="0" marL="0">
+              <a:lnSpc>
+                <a:spcPts val="3197"/>
+              </a:lnSpc>
+              <a:buNone/>
+            </a:pPr>
+            <a:r>
+              <a:rPr lang="en-US" sz="2132" b="1" spc="-43" kern="0" dirty="0">
+                <a:solidFill>
+                  <a:srgbClr val="FFFFFF"/>
+                </a:solidFill>
+                <a:latin typeface="Malgun Gothic" pitchFamily="34" charset="0"/>
+                <a:ea typeface="Malgun Gothic" pitchFamily="34" charset="-122"/>
+                <a:cs typeface="Malgun Gothic" pitchFamily="34" charset="-120"/>
+              </a:rPr>
+              <a:t>초당 트랜잭션 (TPS)</a:t>
+            </a:r>
+            <a:endParaRPr lang="en-US" sz="2132" dirty="0"/>
+          </a:p>
+        </p:txBody>
+      </p:sp>
+      <p:sp>
+        <p:nvSpPr>
+          <p:cNvPr id="15" name="Text 13"/>
+          <p:cNvSpPr txBox="1"/>
+          <p:nvPr/>
+        </p:nvSpPr>
+        <p:spPr>
+          <a:xfrm>
+            <a:off x="714421" y="4864608"/>
+            <a:ext cx="3270260" cy="667878"/>
+          </a:xfrm>
+          <a:prstGeom prst="rect">
+            <a:avLst/>
+          </a:prstGeom>
+          <a:noFill/>
+          <a:ln/>
+        </p:spPr>
+        <p:txBody>
+          <a:bodyPr wrap="square" lIns="0" tIns="0" rIns="0" bIns="0" rtlCol="0" anchor="t"/>
+          <a:lstStyle/>
+          <a:p>
+            <a:pPr algn="ctr" indent="0" marL="0">
+              <a:lnSpc>
+                <a:spcPts val="2630"/>
+              </a:lnSpc>
+              <a:buNone/>
+            </a:pPr>
+            <a:r>
+              <a:rPr lang="en-US" sz="1697" spc="-54" kern="0" dirty="0">
+                <a:solidFill>
+                  <a:srgbClr val="94A3B8"/>
+                </a:solidFill>
+                <a:latin typeface="Malgun Gothic" pitchFamily="34" charset="0"/>
+                <a:ea typeface="Malgun Gothic" pitchFamily="34" charset="-122"/>
+                <a:cs typeface="Malgun Gothic" pitchFamily="34" charset="-120"/>
+              </a:rPr>
+              <a:t>기존 12K TPS 대비 10배 처리량 확장 달성</a:t>
+            </a:r>
+            <a:endParaRPr lang="en-US" sz="1697" dirty="0"/>
+          </a:p>
+        </p:txBody>
+      </p:sp>
+      <p:sp>
+        <p:nvSpPr>
+          <p:cNvPr id="16" name="Shape 14"/>
+          <p:cNvSpPr/>
+          <p:nvPr/>
+        </p:nvSpPr>
+        <p:spPr>
+          <a:xfrm>
+            <a:off x="4298960" y="3028218"/>
+            <a:ext cx="3594049" cy="2723632"/>
+          </a:xfrm>
+          <a:prstGeom prst="roundRect">
+            <a:avLst>
+              <a:gd name="adj" fmla="val 4895"/>
+            </a:avLst>
+          </a:prstGeom>
+          <a:solidFill>
+            <a:srgbClr val="161E2E">
+              <a:alpha val="82000"/>
+            </a:srgbClr>
+          </a:solidFill>
+          <a:ln/>
+        </p:spPr>
+      </p:sp>
+      <p:sp>
+        <p:nvSpPr>
+          <p:cNvPr id="17" name="Shape 15"/>
+          <p:cNvSpPr/>
+          <p:nvPr/>
+        </p:nvSpPr>
+        <p:spPr>
+          <a:xfrm>
+            <a:off x="4298960" y="3028218"/>
+            <a:ext cx="3594049" cy="28621"/>
+          </a:xfrm>
+          <a:prstGeom prst="rect">
+            <a:avLst/>
+          </a:prstGeom>
+          <a:solidFill>
+            <a:srgbClr val="38BDF8"/>
+          </a:solidFill>
+          <a:ln/>
+        </p:spPr>
+      </p:sp>
+      <p:sp>
+        <p:nvSpPr>
+          <p:cNvPr id="18" name="Shape 16"/>
+          <p:cNvSpPr/>
+          <p:nvPr/>
+        </p:nvSpPr>
+        <p:spPr>
+          <a:xfrm>
+            <a:off x="7883500" y="3028218"/>
+            <a:ext cx="9510" cy="2723632"/>
+          </a:xfrm>
+          <a:prstGeom prst="rect">
+            <a:avLst/>
+          </a:prstGeom>
+          <a:solidFill>
+            <a:srgbClr val="FFFFFF">
+              <a:alpha val="9000"/>
+            </a:srgbClr>
+          </a:solidFill>
+          <a:ln/>
+        </p:spPr>
+      </p:sp>
+      <p:sp>
+        <p:nvSpPr>
+          <p:cNvPr id="19" name="Shape 17"/>
+          <p:cNvSpPr/>
+          <p:nvPr/>
+        </p:nvSpPr>
+        <p:spPr>
+          <a:xfrm>
+            <a:off x="4298960" y="5742341"/>
+            <a:ext cx="3594049" cy="9510"/>
+          </a:xfrm>
+          <a:prstGeom prst="rect">
+            <a:avLst/>
+          </a:prstGeom>
+          <a:solidFill>
+            <a:srgbClr val="FFFFFF">
+              <a:alpha val="9000"/>
+            </a:srgbClr>
+          </a:solidFill>
+          <a:ln/>
+        </p:spPr>
+      </p:sp>
+      <p:sp>
+        <p:nvSpPr>
+          <p:cNvPr id="20" name="Shape 18"/>
+          <p:cNvSpPr/>
+          <p:nvPr/>
+        </p:nvSpPr>
+        <p:spPr>
+          <a:xfrm>
+            <a:off x="4298960" y="3028218"/>
+            <a:ext cx="9510" cy="2723632"/>
+          </a:xfrm>
+          <a:prstGeom prst="rect">
+            <a:avLst/>
+          </a:prstGeom>
+          <a:solidFill>
+            <a:srgbClr val="FFFFFF">
+              <a:alpha val="9000"/>
+            </a:srgbClr>
+          </a:solidFill>
+          <a:ln/>
+        </p:spPr>
+      </p:sp>
+      <p:sp>
+        <p:nvSpPr>
+          <p:cNvPr id="21" name="Shape 19"/>
+          <p:cNvSpPr/>
+          <p:nvPr/>
+        </p:nvSpPr>
+        <p:spPr>
+          <a:xfrm>
+            <a:off x="5971946" y="3266328"/>
+            <a:ext cx="247620" cy="247620"/>
+          </a:xfrm>
+          <a:prstGeom prst="roundRect">
+            <a:avLst>
+              <a:gd name="adj" fmla="val 50000"/>
+            </a:avLst>
+          </a:prstGeom>
+          <a:solidFill>
+            <a:srgbClr val="38BDF8">
+              <a:alpha val="15000"/>
+            </a:srgbClr>
+          </a:solidFill>
+          <a:ln w="9525">
+            <a:solidFill>
+              <a:srgbClr val="38BDF8">
+                <a:alpha val="40000"/>
+              </a:srgbClr>
+            </a:solidFill>
+            <a:prstDash val="solid"/>
+          </a:ln>
+        </p:spPr>
+      </p:sp>
+      <p:sp>
+        <p:nvSpPr>
+          <p:cNvPr id="22" name="Text 20"/>
+          <p:cNvSpPr txBox="1"/>
+          <p:nvPr/>
+        </p:nvSpPr>
+        <p:spPr>
+          <a:xfrm>
+            <a:off x="5924398" y="3231855"/>
+            <a:ext cx="342900" cy="310805"/>
+          </a:xfrm>
+          <a:prstGeom prst="rect">
+            <a:avLst/>
+          </a:prstGeom>
+          <a:noFill/>
+          <a:ln/>
+        </p:spPr>
+        <p:txBody>
+          <a:bodyPr wrap="none" lIns="0" tIns="0" rIns="0" bIns="0" rtlCol="0" anchor="t"/>
+          <a:lstStyle/>
+          <a:p>
+            <a:pPr algn="ctr" indent="0" marL="0">
+              <a:lnSpc>
+                <a:spcPts val="2447"/>
+              </a:lnSpc>
+              <a:buNone/>
+            </a:pPr>
+            <a:r>
+              <a:rPr lang="en-US" sz="1631" b="1" spc="-54" kern="0" dirty="0">
+                <a:solidFill>
+                  <a:srgbClr val="38BDF8"/>
+                </a:solidFill>
+                <a:latin typeface="Malgun Gothic" pitchFamily="34" charset="0"/>
+                <a:ea typeface="Malgun Gothic" pitchFamily="34" charset="-122"/>
+                <a:cs typeface="Malgun Gothic" pitchFamily="34" charset="-120"/>
+              </a:rPr>
+              <a:t>02</a:t>
+            </a:r>
+            <a:endParaRPr lang="en-US" sz="1631" dirty="0"/>
+          </a:p>
+        </p:txBody>
+      </p:sp>
+      <p:sp>
+        <p:nvSpPr>
+          <p:cNvPr id="23" name="Text 21"/>
+          <p:cNvSpPr txBox="1"/>
+          <p:nvPr/>
+        </p:nvSpPr>
+        <p:spPr>
+          <a:xfrm>
+            <a:off x="4221328" y="3570183"/>
+            <a:ext cx="3749223" cy="773400"/>
+          </a:xfrm>
+          <a:prstGeom prst="rect">
+            <a:avLst/>
+          </a:prstGeom>
+          <a:noFill/>
+          <a:ln/>
+        </p:spPr>
+        <p:txBody>
+          <a:bodyPr wrap="none" lIns="0" tIns="0" rIns="0" bIns="0" rtlCol="0" anchor="t"/>
+          <a:lstStyle/>
+          <a:p>
+            <a:pPr algn="ctr" indent="0" marL="0">
+              <a:lnSpc>
+                <a:spcPts val="6090"/>
+              </a:lnSpc>
+              <a:buNone/>
+            </a:pPr>
+            <a:r>
+              <a:rPr lang="en-US" sz="6090" b="1" spc="-54" kern="0" dirty="0">
+                <a:solidFill>
+                  <a:srgbClr val="00F0FF"/>
+                </a:solidFill>
+                <a:latin typeface="Malgun Gothic" pitchFamily="34" charset="0"/>
+                <a:ea typeface="Malgun Gothic" pitchFamily="34" charset="-122"/>
+                <a:cs typeface="Malgun Gothic" pitchFamily="34" charset="-120"/>
+              </a:rPr>
+              <a:t>18 ms</a:t>
+            </a:r>
+            <a:endParaRPr lang="en-US" sz="6090" dirty="0"/>
+          </a:p>
+        </p:txBody>
+      </p:sp>
+      <p:sp>
+        <p:nvSpPr>
+          <p:cNvPr id="24" name="Text 22"/>
+          <p:cNvSpPr txBox="1"/>
+          <p:nvPr/>
+        </p:nvSpPr>
+        <p:spPr>
+          <a:xfrm>
+            <a:off x="4221328" y="4398721"/>
+            <a:ext cx="3749223" cy="406085"/>
+          </a:xfrm>
+          <a:prstGeom prst="rect">
+            <a:avLst/>
+          </a:prstGeom>
+          <a:noFill/>
+          <a:ln/>
+        </p:spPr>
+        <p:txBody>
+          <a:bodyPr wrap="none" lIns="0" tIns="0" rIns="0" bIns="0" rtlCol="0" anchor="t"/>
+          <a:lstStyle/>
+          <a:p>
+            <a:pPr algn="ctr" indent="0" marL="0">
+              <a:lnSpc>
+                <a:spcPts val="3197"/>
+              </a:lnSpc>
+              <a:buNone/>
+            </a:pPr>
+            <a:r>
+              <a:rPr lang="en-US" sz="2132" b="1" spc="-43" kern="0" dirty="0">
+                <a:solidFill>
+                  <a:srgbClr val="FFFFFF"/>
+                </a:solidFill>
+                <a:latin typeface="Malgun Gothic" pitchFamily="34" charset="0"/>
+                <a:ea typeface="Malgun Gothic" pitchFamily="34" charset="-122"/>
+                <a:cs typeface="Malgun Gothic" pitchFamily="34" charset="-120"/>
+              </a:rPr>
+              <a:t>P99 응답 지연시간</a:t>
+            </a:r>
+            <a:endParaRPr lang="en-US" sz="2132" dirty="0"/>
+          </a:p>
+        </p:txBody>
+      </p:sp>
+      <p:sp>
+        <p:nvSpPr>
+          <p:cNvPr id="25" name="Text 23"/>
+          <p:cNvSpPr txBox="1"/>
+          <p:nvPr/>
+        </p:nvSpPr>
+        <p:spPr>
+          <a:xfrm>
+            <a:off x="4460809" y="4864608"/>
+            <a:ext cx="3270260" cy="667878"/>
+          </a:xfrm>
+          <a:prstGeom prst="rect">
+            <a:avLst/>
+          </a:prstGeom>
+          <a:noFill/>
+          <a:ln/>
+        </p:spPr>
+        <p:txBody>
+          <a:bodyPr wrap="square" lIns="0" tIns="0" rIns="0" bIns="0" rtlCol="0" anchor="t"/>
+          <a:lstStyle/>
+          <a:p>
+            <a:pPr algn="ctr" indent="0" marL="0">
+              <a:lnSpc>
+                <a:spcPts val="2630"/>
+              </a:lnSpc>
+              <a:buNone/>
+            </a:pPr>
+            <a:r>
+              <a:rPr lang="en-US" sz="1697" spc="-54" kern="0" dirty="0">
+                <a:solidFill>
+                  <a:srgbClr val="94A3B8"/>
+                </a:solidFill>
+                <a:latin typeface="Malgun Gothic" pitchFamily="34" charset="0"/>
+                <a:ea typeface="Malgun Gothic" pitchFamily="34" charset="-122"/>
+                <a:cs typeface="Malgun Gothic" pitchFamily="34" charset="-120"/>
+              </a:rPr>
+              <a:t>비동기 큐잉을 통해 클라이언트 체감 85% 단축</a:t>
+            </a:r>
+            <a:endParaRPr lang="en-US" sz="1697" dirty="0"/>
+          </a:p>
+        </p:txBody>
+      </p:sp>
+      <p:sp>
+        <p:nvSpPr>
+          <p:cNvPr id="26" name="Shape 24"/>
+          <p:cNvSpPr/>
+          <p:nvPr/>
+        </p:nvSpPr>
+        <p:spPr>
+          <a:xfrm>
+            <a:off x="8045348" y="3028218"/>
+            <a:ext cx="3594141" cy="2723632"/>
+          </a:xfrm>
+          <a:prstGeom prst="roundRect">
+            <a:avLst>
+              <a:gd name="adj" fmla="val 4895"/>
+            </a:avLst>
+          </a:prstGeom>
+          <a:solidFill>
+            <a:srgbClr val="161E2E">
+              <a:alpha val="82000"/>
+            </a:srgbClr>
+          </a:solidFill>
+          <a:ln/>
+        </p:spPr>
+      </p:sp>
+      <p:sp>
+        <p:nvSpPr>
+          <p:cNvPr id="27" name="Shape 25"/>
+          <p:cNvSpPr/>
+          <p:nvPr/>
+        </p:nvSpPr>
+        <p:spPr>
+          <a:xfrm>
+            <a:off x="8045348" y="3028218"/>
+            <a:ext cx="3594141" cy="28621"/>
+          </a:xfrm>
+          <a:prstGeom prst="rect">
+            <a:avLst/>
+          </a:prstGeom>
+          <a:solidFill>
+            <a:srgbClr val="A78BFA"/>
+          </a:solidFill>
+          <a:ln/>
+        </p:spPr>
+      </p:sp>
+      <p:sp>
+        <p:nvSpPr>
+          <p:cNvPr id="28" name="Shape 26"/>
+          <p:cNvSpPr/>
+          <p:nvPr/>
+        </p:nvSpPr>
+        <p:spPr>
+          <a:xfrm>
+            <a:off x="11630071" y="3028218"/>
+            <a:ext cx="9510" cy="2723632"/>
+          </a:xfrm>
+          <a:prstGeom prst="rect">
+            <a:avLst/>
+          </a:prstGeom>
+          <a:solidFill>
+            <a:srgbClr val="FFFFFF">
+              <a:alpha val="9000"/>
+            </a:srgbClr>
+          </a:solidFill>
+          <a:ln/>
+        </p:spPr>
+      </p:sp>
+      <p:sp>
+        <p:nvSpPr>
+          <p:cNvPr id="29" name="Shape 27"/>
+          <p:cNvSpPr/>
+          <p:nvPr/>
+        </p:nvSpPr>
+        <p:spPr>
+          <a:xfrm>
+            <a:off x="8045348" y="5742341"/>
+            <a:ext cx="3594141" cy="9510"/>
+          </a:xfrm>
+          <a:prstGeom prst="rect">
+            <a:avLst/>
+          </a:prstGeom>
+          <a:solidFill>
+            <a:srgbClr val="FFFFFF">
+              <a:alpha val="9000"/>
+            </a:srgbClr>
+          </a:solidFill>
+          <a:ln/>
+        </p:spPr>
+      </p:sp>
+      <p:sp>
+        <p:nvSpPr>
+          <p:cNvPr id="30" name="Shape 28"/>
+          <p:cNvSpPr/>
+          <p:nvPr/>
+        </p:nvSpPr>
+        <p:spPr>
+          <a:xfrm>
+            <a:off x="8045348" y="3028218"/>
+            <a:ext cx="9510" cy="2723632"/>
+          </a:xfrm>
+          <a:prstGeom prst="rect">
+            <a:avLst/>
+          </a:prstGeom>
+          <a:solidFill>
+            <a:srgbClr val="FFFFFF">
+              <a:alpha val="9000"/>
+            </a:srgbClr>
+          </a:solidFill>
+          <a:ln/>
+        </p:spPr>
+      </p:sp>
+      <p:sp>
+        <p:nvSpPr>
+          <p:cNvPr id="31" name="Shape 29"/>
+          <p:cNvSpPr/>
+          <p:nvPr/>
+        </p:nvSpPr>
+        <p:spPr>
+          <a:xfrm>
+            <a:off x="9718609" y="3266328"/>
+            <a:ext cx="247620" cy="247620"/>
+          </a:xfrm>
+          <a:prstGeom prst="roundRect">
+            <a:avLst>
+              <a:gd name="adj" fmla="val 50000"/>
+            </a:avLst>
+          </a:prstGeom>
+          <a:solidFill>
+            <a:srgbClr val="A78BFA">
+              <a:alpha val="15000"/>
+            </a:srgbClr>
+          </a:solidFill>
+          <a:ln w="9525">
+            <a:solidFill>
+              <a:srgbClr val="A78BFA">
+                <a:alpha val="40000"/>
+              </a:srgbClr>
+            </a:solidFill>
+            <a:prstDash val="solid"/>
+          </a:ln>
+        </p:spPr>
+      </p:sp>
+      <p:sp>
+        <p:nvSpPr>
+          <p:cNvPr id="32" name="Text 30"/>
+          <p:cNvSpPr txBox="1"/>
+          <p:nvPr/>
+        </p:nvSpPr>
+        <p:spPr>
+          <a:xfrm>
+            <a:off x="9671060" y="3231855"/>
+            <a:ext cx="342900" cy="310805"/>
+          </a:xfrm>
+          <a:prstGeom prst="rect">
+            <a:avLst/>
+          </a:prstGeom>
+          <a:noFill/>
+          <a:ln/>
+        </p:spPr>
+        <p:txBody>
+          <a:bodyPr wrap="none" lIns="0" tIns="0" rIns="0" bIns="0" rtlCol="0" anchor="t"/>
+          <a:lstStyle/>
+          <a:p>
+            <a:pPr algn="ctr" indent="0" marL="0">
+              <a:lnSpc>
+                <a:spcPts val="2447"/>
+              </a:lnSpc>
+              <a:buNone/>
+            </a:pPr>
+            <a:r>
+              <a:rPr lang="en-US" sz="1631" b="1" spc="-54" kern="0" dirty="0">
+                <a:solidFill>
+                  <a:srgbClr val="A78BFA"/>
+                </a:solidFill>
+                <a:latin typeface="Malgun Gothic" pitchFamily="34" charset="0"/>
+                <a:ea typeface="Malgun Gothic" pitchFamily="34" charset="-122"/>
+                <a:cs typeface="Malgun Gothic" pitchFamily="34" charset="-120"/>
+              </a:rPr>
+              <a:t>03</a:t>
+            </a:r>
+            <a:endParaRPr lang="en-US" sz="1631" dirty="0"/>
+          </a:p>
+        </p:txBody>
+      </p:sp>
+      <p:sp>
+        <p:nvSpPr>
+          <p:cNvPr id="33" name="Text 31"/>
+          <p:cNvSpPr txBox="1"/>
+          <p:nvPr/>
+        </p:nvSpPr>
+        <p:spPr>
+          <a:xfrm>
+            <a:off x="7967807" y="3570183"/>
+            <a:ext cx="3749406" cy="773400"/>
+          </a:xfrm>
+          <a:prstGeom prst="rect">
+            <a:avLst/>
+          </a:prstGeom>
+          <a:noFill/>
+          <a:ln/>
+        </p:spPr>
+        <p:txBody>
+          <a:bodyPr wrap="none" lIns="0" tIns="0" rIns="0" bIns="0" rtlCol="0" anchor="t"/>
+          <a:lstStyle/>
+          <a:p>
+            <a:pPr algn="ctr" indent="0" marL="0">
+              <a:lnSpc>
+                <a:spcPts val="6090"/>
+              </a:lnSpc>
+              <a:buNone/>
+            </a:pPr>
+            <a:r>
+              <a:rPr lang="en-US" sz="6090" b="1" spc="-54" kern="0" dirty="0">
+                <a:solidFill>
+                  <a:srgbClr val="A78BFA"/>
+                </a:solidFill>
+                <a:latin typeface="Malgun Gothic" pitchFamily="34" charset="0"/>
+                <a:ea typeface="Malgun Gothic" pitchFamily="34" charset="-122"/>
+                <a:cs typeface="Malgun Gothic" pitchFamily="34" charset="-120"/>
+              </a:rPr>
+              <a:t>99.99%</a:t>
+            </a:r>
+            <a:endParaRPr lang="en-US" sz="6090" dirty="0"/>
+          </a:p>
+        </p:txBody>
+      </p:sp>
+      <p:sp>
+        <p:nvSpPr>
+          <p:cNvPr id="34" name="Text 32"/>
+          <p:cNvSpPr txBox="1"/>
+          <p:nvPr/>
+        </p:nvSpPr>
+        <p:spPr>
+          <a:xfrm>
+            <a:off x="7967807" y="4398721"/>
+            <a:ext cx="3749406" cy="406085"/>
+          </a:xfrm>
+          <a:prstGeom prst="rect">
+            <a:avLst/>
+          </a:prstGeom>
+          <a:noFill/>
+          <a:ln/>
+        </p:spPr>
+        <p:txBody>
+          <a:bodyPr wrap="none" lIns="0" tIns="0" rIns="0" bIns="0" rtlCol="0" anchor="t"/>
+          <a:lstStyle/>
+          <a:p>
+            <a:pPr algn="ctr" indent="0" marL="0">
+              <a:lnSpc>
+                <a:spcPts val="3197"/>
+              </a:lnSpc>
+              <a:buNone/>
+            </a:pPr>
+            <a:r>
+              <a:rPr lang="en-US" sz="2132" b="1" spc="-43" kern="0" dirty="0">
+                <a:solidFill>
+                  <a:srgbClr val="FFFFFF"/>
+                </a:solidFill>
+                <a:latin typeface="Malgun Gothic" pitchFamily="34" charset="0"/>
+                <a:ea typeface="Malgun Gothic" pitchFamily="34" charset="-122"/>
+                <a:cs typeface="Malgun Gothic" pitchFamily="34" charset="-120"/>
+              </a:rPr>
+              <a:t>서비스 가용성 (SLA)</a:t>
+            </a:r>
+            <a:endParaRPr lang="en-US" sz="2132" dirty="0"/>
+          </a:p>
+        </p:txBody>
+      </p:sp>
+      <p:sp>
+        <p:nvSpPr>
+          <p:cNvPr id="35" name="Text 33"/>
+          <p:cNvSpPr txBox="1"/>
+          <p:nvPr/>
+        </p:nvSpPr>
+        <p:spPr>
+          <a:xfrm>
+            <a:off x="8207289" y="4864608"/>
+            <a:ext cx="3270352" cy="667878"/>
+          </a:xfrm>
+          <a:prstGeom prst="rect">
+            <a:avLst/>
+          </a:prstGeom>
+          <a:noFill/>
+          <a:ln/>
+        </p:spPr>
+        <p:txBody>
+          <a:bodyPr wrap="square" lIns="0" tIns="0" rIns="0" bIns="0" rtlCol="0" anchor="t"/>
+          <a:lstStyle/>
+          <a:p>
+            <a:pPr algn="ctr" indent="0" marL="0">
+              <a:lnSpc>
+                <a:spcPts val="2630"/>
+              </a:lnSpc>
+              <a:buNone/>
+            </a:pPr>
+            <a:r>
+              <a:rPr lang="en-US" sz="1697" spc="-54" kern="0" dirty="0">
+                <a:solidFill>
+                  <a:srgbClr val="94A3B8"/>
+                </a:solidFill>
+                <a:latin typeface="Malgun Gothic" pitchFamily="34" charset="0"/>
+                <a:ea typeface="Malgun Gothic" pitchFamily="34" charset="-122"/>
+                <a:cs typeface="Malgun Gothic" pitchFamily="34" charset="-120"/>
+              </a:rPr>
+              <a:t>단일 서비스 장애 시에도 전체 중단 없는 격리 달성</a:t>
+            </a:r>
+            <a:endParaRPr lang="en-US" sz="1697" dirty="0"/>
+          </a:p>
+        </p:txBody>
+      </p:sp>
     </p:spTree>
   </p:cSld>
   <p:clrMapOvr>
@@ -1502,16 +6600,9 @@
   <p:cSld name="Slide 6">
     <p:bg>
       <p:bgPr>
-        <a:blipFill dpi="0" rotWithShape="1">
-          <a:blip r:embed="rId1">
-            <a:lum/>
-          </a:blip>
-          <a:srcRect/>
-          <a:stretch>
-            <a:fillRect/>
-          </a:stretch>
-        </a:blipFill>
-        <a:effectLst/>
+        <a:solidFill>
+          <a:srgbClr val="4E92F5"/>
+        </a:solidFill>
       </p:bgPr>
     </p:bg>
     <p:spTree>
@@ -1528,6 +6619,1092 @@
           <a:chExt cx="0" cy="0"/>
         </a:xfrm>
       </p:grpSpPr>
+      <p:sp>
+        <p:nvSpPr>
+          <p:cNvPr id="2" name="Shape 0"/>
+          <p:cNvSpPr/>
+          <p:nvPr/>
+        </p:nvSpPr>
+        <p:spPr>
+          <a:xfrm>
+            <a:off x="552480" y="955182"/>
+            <a:ext cx="3032059" cy="418521"/>
+          </a:xfrm>
+          <a:prstGeom prst="roundRect">
+            <a:avLst>
+              <a:gd name="adj" fmla="val 50011"/>
+            </a:avLst>
+          </a:prstGeom>
+          <a:solidFill>
+            <a:srgbClr val="38BDF8">
+              <a:alpha val="15000"/>
+            </a:srgbClr>
+          </a:solidFill>
+          <a:ln w="9525">
+            <a:solidFill>
+              <a:srgbClr val="38BDF8">
+                <a:alpha val="35000"/>
+              </a:srgbClr>
+            </a:solidFill>
+            <a:prstDash val="solid"/>
+          </a:ln>
+        </p:spPr>
+      </p:sp>
+      <p:sp>
+        <p:nvSpPr>
+          <p:cNvPr id="3" name="Text 1"/>
+          <p:cNvSpPr txBox="1"/>
+          <p:nvPr/>
+        </p:nvSpPr>
+        <p:spPr>
+          <a:xfrm>
+            <a:off x="676290" y="998433"/>
+            <a:ext cx="2985059" cy="323149"/>
+          </a:xfrm>
+          <a:prstGeom prst="rect">
+            <a:avLst/>
+          </a:prstGeom>
+          <a:noFill/>
+          <a:ln/>
+        </p:spPr>
+        <p:txBody>
+          <a:bodyPr wrap="none" lIns="0" tIns="0" rIns="0" bIns="0" rtlCol="0" anchor="t"/>
+          <a:lstStyle/>
+          <a:p>
+            <a:pPr algn="l" indent="0" marL="0">
+              <a:lnSpc>
+                <a:spcPts val="2545"/>
+              </a:lnSpc>
+              <a:buNone/>
+            </a:pPr>
+            <a:r>
+              <a:rPr lang="en-US" sz="1697" b="1" spc="34" kern="0" dirty="0">
+                <a:solidFill>
+                  <a:srgbClr val="38BDF8"/>
+                </a:solidFill>
+                <a:latin typeface="Malgun Gothic" pitchFamily="34" charset="0"/>
+                <a:ea typeface="Malgun Gothic" pitchFamily="34" charset="-122"/>
+                <a:cs typeface="Malgun Gothic" pitchFamily="34" charset="-120"/>
+              </a:rPr>
+              <a:t>SUMMARY &amp; NEXT STEPS</a:t>
+            </a:r>
+            <a:endParaRPr lang="en-US" sz="1697" dirty="0"/>
+          </a:p>
+        </p:txBody>
+      </p:sp>
+      <p:sp>
+        <p:nvSpPr>
+          <p:cNvPr id="4" name="Text 2"/>
+          <p:cNvSpPr txBox="1"/>
+          <p:nvPr/>
+        </p:nvSpPr>
+        <p:spPr>
+          <a:xfrm>
+            <a:off x="533370" y="1449781"/>
+            <a:ext cx="11993088" cy="590611"/>
+          </a:xfrm>
+          <a:prstGeom prst="rect">
+            <a:avLst/>
+          </a:prstGeom>
+          <a:noFill/>
+          <a:ln/>
+        </p:spPr>
+        <p:txBody>
+          <a:bodyPr wrap="none" lIns="0" tIns="0" rIns="0" bIns="0" rtlCol="0" anchor="t"/>
+          <a:lstStyle/>
+          <a:p>
+            <a:pPr algn="l" indent="0" marL="0">
+              <a:lnSpc>
+                <a:spcPts val="4651"/>
+              </a:lnSpc>
+              <a:buNone/>
+            </a:pPr>
+            <a:r>
+              <a:rPr lang="en-US" sz="3524" b="1" spc="-88" kern="0" dirty="0">
+                <a:solidFill>
+                  <a:srgbClr val="FFFFFF"/>
+                </a:solidFill>
+                <a:latin typeface="Malgun Gothic" pitchFamily="34" charset="0"/>
+                <a:ea typeface="Malgun Gothic" pitchFamily="34" charset="-122"/>
+                <a:cs typeface="Malgun Gothic" pitchFamily="34" charset="-120"/>
+              </a:rPr>
+              <a:t>핵심 요약 및 질의응답 (Q&amp;A)</a:t>
+            </a:r>
+            <a:endParaRPr lang="en-US" sz="3524" dirty="0"/>
+          </a:p>
+        </p:txBody>
+      </p:sp>
+      <p:sp>
+        <p:nvSpPr>
+          <p:cNvPr id="5" name="Text 3"/>
+          <p:cNvSpPr txBox="1"/>
+          <p:nvPr/>
+        </p:nvSpPr>
+        <p:spPr>
+          <a:xfrm>
+            <a:off x="533370" y="2223638"/>
+            <a:ext cx="11993088" cy="397764"/>
+          </a:xfrm>
+          <a:prstGeom prst="rect">
+            <a:avLst/>
+          </a:prstGeom>
+          <a:noFill/>
+          <a:ln/>
+        </p:spPr>
+        <p:txBody>
+          <a:bodyPr wrap="none" lIns="0" tIns="0" rIns="0" bIns="0" rtlCol="0" anchor="t"/>
+          <a:lstStyle/>
+          <a:p>
+            <a:pPr algn="l" indent="0" marL="0">
+              <a:lnSpc>
+                <a:spcPts val="3132"/>
+              </a:lnSpc>
+              <a:buNone/>
+            </a:pPr>
+            <a:r>
+              <a:rPr lang="en-US" sz="2088" spc="-54" kern="0" dirty="0">
+                <a:solidFill>
+                  <a:srgbClr val="94A3B8"/>
+                </a:solidFill>
+                <a:latin typeface="Malgun Gothic" pitchFamily="34" charset="0"/>
+                <a:ea typeface="Malgun Gothic" pitchFamily="34" charset="-122"/>
+                <a:cs typeface="Malgun Gothic" pitchFamily="34" charset="-120"/>
+              </a:rPr>
+              <a:t>이벤트 기반 분산 아키텍처로 고가용성 엔터프라이즈 시스템을 구축하세요.</a:t>
+            </a:r>
+            <a:endParaRPr lang="en-US" sz="2088" dirty="0"/>
+          </a:p>
+        </p:txBody>
+      </p:sp>
+      <p:sp>
+        <p:nvSpPr>
+          <p:cNvPr id="6" name="Shape 4"/>
+          <p:cNvSpPr/>
+          <p:nvPr/>
+        </p:nvSpPr>
+        <p:spPr>
+          <a:xfrm>
+            <a:off x="552480" y="2782153"/>
+            <a:ext cx="6029919" cy="810981"/>
+          </a:xfrm>
+          <a:prstGeom prst="roundRect">
+            <a:avLst>
+              <a:gd name="adj" fmla="val 16439"/>
+            </a:avLst>
+          </a:prstGeom>
+          <a:solidFill>
+            <a:srgbClr val="161E2E">
+              <a:alpha val="82000"/>
+            </a:srgbClr>
+          </a:solidFill>
+          <a:ln/>
+        </p:spPr>
+      </p:sp>
+      <p:sp>
+        <p:nvSpPr>
+          <p:cNvPr id="7" name="Shape 5"/>
+          <p:cNvSpPr/>
+          <p:nvPr/>
+        </p:nvSpPr>
+        <p:spPr>
+          <a:xfrm>
+            <a:off x="552480" y="2782153"/>
+            <a:ext cx="6029919" cy="9510"/>
+          </a:xfrm>
+          <a:prstGeom prst="rect">
+            <a:avLst/>
+          </a:prstGeom>
+          <a:solidFill>
+            <a:srgbClr val="FFFFFF">
+              <a:alpha val="9000"/>
+            </a:srgbClr>
+          </a:solidFill>
+          <a:ln/>
+        </p:spPr>
+      </p:sp>
+      <p:sp>
+        <p:nvSpPr>
+          <p:cNvPr id="8" name="Shape 6"/>
+          <p:cNvSpPr/>
+          <p:nvPr/>
+        </p:nvSpPr>
+        <p:spPr>
+          <a:xfrm>
+            <a:off x="6572799" y="2782153"/>
+            <a:ext cx="9510" cy="810981"/>
+          </a:xfrm>
+          <a:prstGeom prst="rect">
+            <a:avLst/>
+          </a:prstGeom>
+          <a:solidFill>
+            <a:srgbClr val="FFFFFF">
+              <a:alpha val="9000"/>
+            </a:srgbClr>
+          </a:solidFill>
+          <a:ln/>
+        </p:spPr>
+      </p:sp>
+      <p:sp>
+        <p:nvSpPr>
+          <p:cNvPr id="9" name="Shape 7"/>
+          <p:cNvSpPr/>
+          <p:nvPr/>
+        </p:nvSpPr>
+        <p:spPr>
+          <a:xfrm>
+            <a:off x="552480" y="3583625"/>
+            <a:ext cx="6029919" cy="9510"/>
+          </a:xfrm>
+          <a:prstGeom prst="rect">
+            <a:avLst/>
+          </a:prstGeom>
+          <a:solidFill>
+            <a:srgbClr val="FFFFFF">
+              <a:alpha val="9000"/>
+            </a:srgbClr>
+          </a:solidFill>
+          <a:ln/>
+        </p:spPr>
+      </p:sp>
+      <p:sp>
+        <p:nvSpPr>
+          <p:cNvPr id="10" name="Shape 8"/>
+          <p:cNvSpPr/>
+          <p:nvPr/>
+        </p:nvSpPr>
+        <p:spPr>
+          <a:xfrm>
+            <a:off x="552480" y="2782153"/>
+            <a:ext cx="28621" cy="810981"/>
+          </a:xfrm>
+          <a:prstGeom prst="rect">
+            <a:avLst/>
+          </a:prstGeom>
+          <a:solidFill>
+            <a:srgbClr val="38BDF8"/>
+          </a:solidFill>
+          <a:ln/>
+        </p:spPr>
+      </p:sp>
+      <p:sp>
+        <p:nvSpPr>
+          <p:cNvPr id="11" name="Text 9"/>
+          <p:cNvSpPr txBox="1"/>
+          <p:nvPr/>
+        </p:nvSpPr>
+        <p:spPr>
+          <a:xfrm>
+            <a:off x="714421" y="2905597"/>
+            <a:ext cx="6161044" cy="210312"/>
+          </a:xfrm>
+          <a:prstGeom prst="rect">
+            <a:avLst/>
+          </a:prstGeom>
+          <a:noFill/>
+          <a:ln/>
+        </p:spPr>
+        <p:txBody>
+          <a:bodyPr wrap="none" lIns="0" tIns="0" rIns="0" bIns="0" rtlCol="0" anchor="t"/>
+          <a:lstStyle/>
+          <a:p>
+            <a:pPr algn="l" indent="0" marL="0">
+              <a:lnSpc>
+                <a:spcPts val="1656"/>
+              </a:lnSpc>
+              <a:buNone/>
+            </a:pPr>
+            <a:r>
+              <a:rPr lang="en-US" sz="1104" b="1" spc="-54" kern="0" dirty="0">
+                <a:solidFill>
+                  <a:srgbClr val="FFFFFF"/>
+                </a:solidFill>
+                <a:latin typeface="Malgun Gothic" pitchFamily="34" charset="0"/>
+                <a:ea typeface="Malgun Gothic" pitchFamily="34" charset="-122"/>
+                <a:cs typeface="Malgun Gothic" pitchFamily="34" charset="-120"/>
+              </a:rPr>
+              <a:t>01. Transactional Outbox로 유실 방지</a:t>
+            </a:r>
+            <a:endParaRPr lang="en-US" sz="1104" dirty="0"/>
+          </a:p>
+        </p:txBody>
+      </p:sp>
+      <p:sp>
+        <p:nvSpPr>
+          <p:cNvPr id="12" name="Text 10"/>
+          <p:cNvSpPr txBox="1"/>
+          <p:nvPr/>
+        </p:nvSpPr>
+        <p:spPr>
+          <a:xfrm>
+            <a:off x="714421" y="3135020"/>
+            <a:ext cx="6161044" cy="333939"/>
+          </a:xfrm>
+          <a:prstGeom prst="rect">
+            <a:avLst/>
+          </a:prstGeom>
+          <a:noFill/>
+          <a:ln/>
+        </p:spPr>
+        <p:txBody>
+          <a:bodyPr wrap="none" lIns="0" tIns="0" rIns="0" bIns="0" rtlCol="0" anchor="t"/>
+          <a:lstStyle/>
+          <a:p>
+            <a:pPr algn="l" indent="0" marL="0">
+              <a:lnSpc>
+                <a:spcPts val="2630"/>
+              </a:lnSpc>
+              <a:buNone/>
+            </a:pPr>
+            <a:r>
+              <a:rPr lang="en-US" sz="1697" spc="-54" kern="0" dirty="0">
+                <a:solidFill>
+                  <a:srgbClr val="94A3B8"/>
+                </a:solidFill>
+                <a:latin typeface="Malgun Gothic" pitchFamily="34" charset="0"/>
+                <a:ea typeface="Malgun Gothic" pitchFamily="34" charset="-122"/>
+                <a:cs typeface="Malgun Gothic" pitchFamily="34" charset="-120"/>
+              </a:rPr>
+              <a:t>DB 커밋과 메시지 발행을 원자적으로 묶어 100% 신뢰성 보장</a:t>
+            </a:r>
+            <a:endParaRPr lang="en-US" sz="1697" dirty="0"/>
+          </a:p>
+        </p:txBody>
+      </p:sp>
+      <p:sp>
+        <p:nvSpPr>
+          <p:cNvPr id="13" name="Shape 11"/>
+          <p:cNvSpPr/>
+          <p:nvPr/>
+        </p:nvSpPr>
+        <p:spPr>
+          <a:xfrm>
+            <a:off x="552480" y="3688324"/>
+            <a:ext cx="6029919" cy="810981"/>
+          </a:xfrm>
+          <a:prstGeom prst="roundRect">
+            <a:avLst>
+              <a:gd name="adj" fmla="val 16439"/>
+            </a:avLst>
+          </a:prstGeom>
+          <a:solidFill>
+            <a:srgbClr val="161E2E">
+              <a:alpha val="82000"/>
+            </a:srgbClr>
+          </a:solidFill>
+          <a:ln/>
+        </p:spPr>
+      </p:sp>
+      <p:sp>
+        <p:nvSpPr>
+          <p:cNvPr id="14" name="Shape 12"/>
+          <p:cNvSpPr/>
+          <p:nvPr/>
+        </p:nvSpPr>
+        <p:spPr>
+          <a:xfrm>
+            <a:off x="552480" y="3688324"/>
+            <a:ext cx="6029919" cy="9510"/>
+          </a:xfrm>
+          <a:prstGeom prst="rect">
+            <a:avLst/>
+          </a:prstGeom>
+          <a:solidFill>
+            <a:srgbClr val="FFFFFF">
+              <a:alpha val="9000"/>
+            </a:srgbClr>
+          </a:solidFill>
+          <a:ln/>
+        </p:spPr>
+      </p:sp>
+      <p:sp>
+        <p:nvSpPr>
+          <p:cNvPr id="15" name="Shape 13"/>
+          <p:cNvSpPr/>
+          <p:nvPr/>
+        </p:nvSpPr>
+        <p:spPr>
+          <a:xfrm>
+            <a:off x="6572799" y="3688324"/>
+            <a:ext cx="9510" cy="810981"/>
+          </a:xfrm>
+          <a:prstGeom prst="rect">
+            <a:avLst/>
+          </a:prstGeom>
+          <a:solidFill>
+            <a:srgbClr val="FFFFFF">
+              <a:alpha val="9000"/>
+            </a:srgbClr>
+          </a:solidFill>
+          <a:ln/>
+        </p:spPr>
+      </p:sp>
+      <p:sp>
+        <p:nvSpPr>
+          <p:cNvPr id="16" name="Shape 14"/>
+          <p:cNvSpPr/>
+          <p:nvPr/>
+        </p:nvSpPr>
+        <p:spPr>
+          <a:xfrm>
+            <a:off x="552480" y="4489795"/>
+            <a:ext cx="6029919" cy="9510"/>
+          </a:xfrm>
+          <a:prstGeom prst="rect">
+            <a:avLst/>
+          </a:prstGeom>
+          <a:solidFill>
+            <a:srgbClr val="FFFFFF">
+              <a:alpha val="9000"/>
+            </a:srgbClr>
+          </a:solidFill>
+          <a:ln/>
+        </p:spPr>
+      </p:sp>
+      <p:sp>
+        <p:nvSpPr>
+          <p:cNvPr id="17" name="Shape 15"/>
+          <p:cNvSpPr/>
+          <p:nvPr/>
+        </p:nvSpPr>
+        <p:spPr>
+          <a:xfrm>
+            <a:off x="552480" y="3688324"/>
+            <a:ext cx="28621" cy="810981"/>
+          </a:xfrm>
+          <a:prstGeom prst="rect">
+            <a:avLst/>
+          </a:prstGeom>
+          <a:solidFill>
+            <a:srgbClr val="FACC15"/>
+          </a:solidFill>
+          <a:ln/>
+        </p:spPr>
+      </p:sp>
+      <p:sp>
+        <p:nvSpPr>
+          <p:cNvPr id="18" name="Text 16"/>
+          <p:cNvSpPr txBox="1"/>
+          <p:nvPr/>
+        </p:nvSpPr>
+        <p:spPr>
+          <a:xfrm>
+            <a:off x="714421" y="3811768"/>
+            <a:ext cx="6161044" cy="210312"/>
+          </a:xfrm>
+          <a:prstGeom prst="rect">
+            <a:avLst/>
+          </a:prstGeom>
+          <a:noFill/>
+          <a:ln/>
+        </p:spPr>
+        <p:txBody>
+          <a:bodyPr wrap="none" lIns="0" tIns="0" rIns="0" bIns="0" rtlCol="0" anchor="t"/>
+          <a:lstStyle/>
+          <a:p>
+            <a:pPr algn="l" indent="0" marL="0">
+              <a:lnSpc>
+                <a:spcPts val="1656"/>
+              </a:lnSpc>
+              <a:buNone/>
+            </a:pPr>
+            <a:r>
+              <a:rPr lang="en-US" sz="1104" b="1" spc="-54" kern="0" dirty="0">
+                <a:solidFill>
+                  <a:srgbClr val="FFFFFF"/>
+                </a:solidFill>
+                <a:latin typeface="Malgun Gothic" pitchFamily="34" charset="0"/>
+                <a:ea typeface="Malgun Gothic" pitchFamily="34" charset="-122"/>
+                <a:cs typeface="Malgun Gothic" pitchFamily="34" charset="-120"/>
+              </a:rPr>
+              <a:t>02. Saga 엔진 기반 분산 트랜잭션</a:t>
+            </a:r>
+            <a:endParaRPr lang="en-US" sz="1104" dirty="0"/>
+          </a:p>
+        </p:txBody>
+      </p:sp>
+      <p:sp>
+        <p:nvSpPr>
+          <p:cNvPr id="19" name="Text 17"/>
+          <p:cNvSpPr txBox="1"/>
+          <p:nvPr/>
+        </p:nvSpPr>
+        <p:spPr>
+          <a:xfrm>
+            <a:off x="714421" y="4041282"/>
+            <a:ext cx="6161044" cy="333939"/>
+          </a:xfrm>
+          <a:prstGeom prst="rect">
+            <a:avLst/>
+          </a:prstGeom>
+          <a:noFill/>
+          <a:ln/>
+        </p:spPr>
+        <p:txBody>
+          <a:bodyPr wrap="none" lIns="0" tIns="0" rIns="0" bIns="0" rtlCol="0" anchor="t"/>
+          <a:lstStyle/>
+          <a:p>
+            <a:pPr algn="l" indent="0" marL="0">
+              <a:lnSpc>
+                <a:spcPts val="2630"/>
+              </a:lnSpc>
+              <a:buNone/>
+            </a:pPr>
+            <a:r>
+              <a:rPr lang="en-US" sz="1697" spc="-54" kern="0" dirty="0">
+                <a:solidFill>
+                  <a:srgbClr val="94A3B8"/>
+                </a:solidFill>
+                <a:latin typeface="Malgun Gothic" pitchFamily="34" charset="0"/>
+                <a:ea typeface="Malgun Gothic" pitchFamily="34" charset="-122"/>
+                <a:cs typeface="Malgun Gothic" pitchFamily="34" charset="-120"/>
+              </a:rPr>
+              <a:t>글로벌 락 없는 보상 트랜잭션으로 시스템 전체 처리량 극대화</a:t>
+            </a:r>
+            <a:endParaRPr lang="en-US" sz="1697" dirty="0"/>
+          </a:p>
+        </p:txBody>
+      </p:sp>
+      <p:sp>
+        <p:nvSpPr>
+          <p:cNvPr id="20" name="Shape 18"/>
+          <p:cNvSpPr/>
+          <p:nvPr/>
+        </p:nvSpPr>
+        <p:spPr>
+          <a:xfrm>
+            <a:off x="552480" y="4594677"/>
+            <a:ext cx="6029919" cy="810981"/>
+          </a:xfrm>
+          <a:prstGeom prst="roundRect">
+            <a:avLst>
+              <a:gd name="adj" fmla="val 16439"/>
+            </a:avLst>
+          </a:prstGeom>
+          <a:solidFill>
+            <a:srgbClr val="161E2E">
+              <a:alpha val="82000"/>
+            </a:srgbClr>
+          </a:solidFill>
+          <a:ln/>
+        </p:spPr>
+      </p:sp>
+      <p:sp>
+        <p:nvSpPr>
+          <p:cNvPr id="21" name="Shape 19"/>
+          <p:cNvSpPr/>
+          <p:nvPr/>
+        </p:nvSpPr>
+        <p:spPr>
+          <a:xfrm>
+            <a:off x="552480" y="4594677"/>
+            <a:ext cx="6029919" cy="9510"/>
+          </a:xfrm>
+          <a:prstGeom prst="rect">
+            <a:avLst/>
+          </a:prstGeom>
+          <a:solidFill>
+            <a:srgbClr val="FFFFFF">
+              <a:alpha val="9000"/>
+            </a:srgbClr>
+          </a:solidFill>
+          <a:ln/>
+        </p:spPr>
+      </p:sp>
+      <p:sp>
+        <p:nvSpPr>
+          <p:cNvPr id="22" name="Shape 20"/>
+          <p:cNvSpPr/>
+          <p:nvPr/>
+        </p:nvSpPr>
+        <p:spPr>
+          <a:xfrm>
+            <a:off x="6572799" y="4594677"/>
+            <a:ext cx="9510" cy="810981"/>
+          </a:xfrm>
+          <a:prstGeom prst="rect">
+            <a:avLst/>
+          </a:prstGeom>
+          <a:solidFill>
+            <a:srgbClr val="FFFFFF">
+              <a:alpha val="9000"/>
+            </a:srgbClr>
+          </a:solidFill>
+          <a:ln/>
+        </p:spPr>
+      </p:sp>
+      <p:sp>
+        <p:nvSpPr>
+          <p:cNvPr id="23" name="Shape 21"/>
+          <p:cNvSpPr/>
+          <p:nvPr/>
+        </p:nvSpPr>
+        <p:spPr>
+          <a:xfrm>
+            <a:off x="552480" y="5396149"/>
+            <a:ext cx="6029919" cy="9510"/>
+          </a:xfrm>
+          <a:prstGeom prst="rect">
+            <a:avLst/>
+          </a:prstGeom>
+          <a:solidFill>
+            <a:srgbClr val="FFFFFF">
+              <a:alpha val="9000"/>
+            </a:srgbClr>
+          </a:solidFill>
+          <a:ln/>
+        </p:spPr>
+      </p:sp>
+      <p:sp>
+        <p:nvSpPr>
+          <p:cNvPr id="24" name="Shape 22"/>
+          <p:cNvSpPr/>
+          <p:nvPr/>
+        </p:nvSpPr>
+        <p:spPr>
+          <a:xfrm>
+            <a:off x="552480" y="4594677"/>
+            <a:ext cx="28621" cy="810981"/>
+          </a:xfrm>
+          <a:prstGeom prst="rect">
+            <a:avLst/>
+          </a:prstGeom>
+          <a:solidFill>
+            <a:srgbClr val="A78BFA"/>
+          </a:solidFill>
+          <a:ln/>
+        </p:spPr>
+      </p:sp>
+      <p:sp>
+        <p:nvSpPr>
+          <p:cNvPr id="25" name="Text 23"/>
+          <p:cNvSpPr txBox="1"/>
+          <p:nvPr/>
+        </p:nvSpPr>
+        <p:spPr>
+          <a:xfrm>
+            <a:off x="714421" y="4718121"/>
+            <a:ext cx="6161044" cy="210312"/>
+          </a:xfrm>
+          <a:prstGeom prst="rect">
+            <a:avLst/>
+          </a:prstGeom>
+          <a:noFill/>
+          <a:ln/>
+        </p:spPr>
+        <p:txBody>
+          <a:bodyPr wrap="none" lIns="0" tIns="0" rIns="0" bIns="0" rtlCol="0" anchor="t"/>
+          <a:lstStyle/>
+          <a:p>
+            <a:pPr algn="l" indent="0" marL="0">
+              <a:lnSpc>
+                <a:spcPts val="1656"/>
+              </a:lnSpc>
+              <a:buNone/>
+            </a:pPr>
+            <a:r>
+              <a:rPr lang="en-US" sz="1104" b="1" spc="-54" kern="0" dirty="0">
+                <a:solidFill>
+                  <a:srgbClr val="FFFFFF"/>
+                </a:solidFill>
+                <a:latin typeface="Malgun Gothic" pitchFamily="34" charset="0"/>
+                <a:ea typeface="Malgun Gothic" pitchFamily="34" charset="-122"/>
+                <a:cs typeface="Malgun Gothic" pitchFamily="34" charset="-120"/>
+              </a:rPr>
+              <a:t>03. OpenTelemetry 기반 분산 가시성</a:t>
+            </a:r>
+            <a:endParaRPr lang="en-US" sz="1104" dirty="0"/>
+          </a:p>
+        </p:txBody>
+      </p:sp>
+      <p:sp>
+        <p:nvSpPr>
+          <p:cNvPr id="26" name="Text 24"/>
+          <p:cNvSpPr txBox="1"/>
+          <p:nvPr/>
+        </p:nvSpPr>
+        <p:spPr>
+          <a:xfrm>
+            <a:off x="714421" y="4947453"/>
+            <a:ext cx="6161044" cy="333939"/>
+          </a:xfrm>
+          <a:prstGeom prst="rect">
+            <a:avLst/>
+          </a:prstGeom>
+          <a:noFill/>
+          <a:ln/>
+        </p:spPr>
+        <p:txBody>
+          <a:bodyPr wrap="none" lIns="0" tIns="0" rIns="0" bIns="0" rtlCol="0" anchor="t"/>
+          <a:lstStyle/>
+          <a:p>
+            <a:pPr algn="l" indent="0" marL="0">
+              <a:lnSpc>
+                <a:spcPts val="2630"/>
+              </a:lnSpc>
+              <a:buNone/>
+            </a:pPr>
+            <a:r>
+              <a:rPr lang="en-US" sz="1697" spc="-54" kern="0" dirty="0">
+                <a:solidFill>
+                  <a:srgbClr val="94A3B8"/>
+                </a:solidFill>
+                <a:latin typeface="Malgun Gothic" pitchFamily="34" charset="0"/>
+                <a:ea typeface="Malgun Gothic" pitchFamily="34" charset="-122"/>
+                <a:cs typeface="Malgun Gothic" pitchFamily="34" charset="-120"/>
+              </a:rPr>
+              <a:t>이벤트 체인 전 구간 추적으로 장애 원인 1분 내 격리 및 해결</a:t>
+            </a:r>
+            <a:endParaRPr lang="en-US" sz="1697" dirty="0"/>
+          </a:p>
+        </p:txBody>
+      </p:sp>
+      <p:sp>
+        <p:nvSpPr>
+          <p:cNvPr id="27" name="Shape 25"/>
+          <p:cNvSpPr/>
+          <p:nvPr/>
+        </p:nvSpPr>
+        <p:spPr>
+          <a:xfrm>
+            <a:off x="6772869" y="2782153"/>
+            <a:ext cx="4866711" cy="3139684"/>
+          </a:xfrm>
+          <a:prstGeom prst="roundRect">
+            <a:avLst>
+              <a:gd name="adj" fmla="val 4246"/>
+            </a:avLst>
+          </a:prstGeom>
+          <a:solidFill>
+            <a:srgbClr val="172033">
+              <a:alpha val="82000"/>
+            </a:srgbClr>
+          </a:solidFill>
+          <a:ln w="9525">
+            <a:solidFill>
+              <a:srgbClr val="38BDF8">
+                <a:alpha val="40000"/>
+              </a:srgbClr>
+            </a:solidFill>
+            <a:prstDash val="solid"/>
+          </a:ln>
+        </p:spPr>
+      </p:sp>
+      <p:sp>
+        <p:nvSpPr>
+          <p:cNvPr id="28" name="Text 26"/>
+          <p:cNvSpPr txBox="1"/>
+          <p:nvPr/>
+        </p:nvSpPr>
+        <p:spPr>
+          <a:xfrm>
+            <a:off x="6953829" y="2961650"/>
+            <a:ext cx="4843028" cy="298369"/>
+          </a:xfrm>
+          <a:prstGeom prst="rect">
+            <a:avLst/>
+          </a:prstGeom>
+          <a:noFill/>
+          <a:ln/>
+        </p:spPr>
+        <p:txBody>
+          <a:bodyPr wrap="none" lIns="0" tIns="0" rIns="0" bIns="0" rtlCol="0" anchor="t"/>
+          <a:lstStyle/>
+          <a:p>
+            <a:pPr algn="l" indent="0" marL="0">
+              <a:lnSpc>
+                <a:spcPts val="2349"/>
+              </a:lnSpc>
+              <a:buNone/>
+            </a:pPr>
+            <a:r>
+              <a:rPr lang="en-US" sz="1566" b="1" spc="125" kern="0" dirty="0">
+                <a:solidFill>
+                  <a:srgbClr val="00F0FF"/>
+                </a:solidFill>
+                <a:latin typeface="Malgun Gothic" pitchFamily="34" charset="0"/>
+                <a:ea typeface="Malgun Gothic" pitchFamily="34" charset="-122"/>
+                <a:cs typeface="Malgun Gothic" pitchFamily="34" charset="-120"/>
+              </a:rPr>
+              <a:t>OPEN FOR DISCUSSION</a:t>
+            </a:r>
+            <a:endParaRPr lang="en-US" sz="1566" dirty="0"/>
+          </a:p>
+        </p:txBody>
+      </p:sp>
+      <p:sp>
+        <p:nvSpPr>
+          <p:cNvPr id="29" name="Text 27"/>
+          <p:cNvSpPr txBox="1"/>
+          <p:nvPr/>
+        </p:nvSpPr>
+        <p:spPr>
+          <a:xfrm>
+            <a:off x="6953829" y="3278490"/>
+            <a:ext cx="4843028" cy="546903"/>
+          </a:xfrm>
+          <a:prstGeom prst="rect">
+            <a:avLst/>
+          </a:prstGeom>
+          <a:noFill/>
+          <a:ln/>
+        </p:spPr>
+        <p:txBody>
+          <a:bodyPr wrap="none" lIns="0" tIns="0" rIns="0" bIns="0" rtlCol="0" anchor="t"/>
+          <a:lstStyle/>
+          <a:p>
+            <a:pPr algn="l" indent="0" marL="0">
+              <a:lnSpc>
+                <a:spcPts val="4307"/>
+              </a:lnSpc>
+              <a:buNone/>
+            </a:pPr>
+            <a:r>
+              <a:rPr lang="en-US" sz="3915" b="1" spc="-54" kern="0" dirty="0">
+                <a:solidFill>
+                  <a:srgbClr val="FFFFFF"/>
+                </a:solidFill>
+                <a:latin typeface="Malgun Gothic" pitchFamily="34" charset="0"/>
+                <a:ea typeface="Malgun Gothic" pitchFamily="34" charset="-122"/>
+                <a:cs typeface="Malgun Gothic" pitchFamily="34" charset="-120"/>
+              </a:rPr>
+              <a:t>Q &amp; A</a:t>
+            </a:r>
+            <a:endParaRPr lang="en-US" sz="3915" dirty="0"/>
+          </a:p>
+        </p:txBody>
+      </p:sp>
+      <p:sp>
+        <p:nvSpPr>
+          <p:cNvPr id="30" name="Text 28"/>
+          <p:cNvSpPr txBox="1"/>
+          <p:nvPr/>
+        </p:nvSpPr>
+        <p:spPr>
+          <a:xfrm>
+            <a:off x="6953829" y="3881354"/>
+            <a:ext cx="4843028" cy="301661"/>
+          </a:xfrm>
+          <a:prstGeom prst="rect">
+            <a:avLst/>
+          </a:prstGeom>
+          <a:noFill/>
+          <a:ln/>
+        </p:spPr>
+        <p:txBody>
+          <a:bodyPr wrap="none" lIns="0" tIns="0" rIns="0" bIns="0" rtlCol="0" anchor="t"/>
+          <a:lstStyle/>
+          <a:p>
+            <a:pPr algn="l" indent="0" marL="0">
+              <a:lnSpc>
+                <a:spcPts val="2375"/>
+              </a:lnSpc>
+              <a:buNone/>
+            </a:pPr>
+            <a:r>
+              <a:rPr lang="en-US" sz="1697" spc="-54" kern="0" dirty="0">
+                <a:solidFill>
+                  <a:srgbClr val="94A3B8"/>
+                </a:solidFill>
+                <a:latin typeface="Malgun Gothic" pitchFamily="34" charset="0"/>
+                <a:ea typeface="Malgun Gothic" pitchFamily="34" charset="-122"/>
+                <a:cs typeface="Malgun Gothic" pitchFamily="34" charset="-120"/>
+              </a:rPr>
+              <a:t>궁금하신 점이나 아키텍처 도입 논의를 환영합니다.</a:t>
+            </a:r>
+            <a:endParaRPr lang="en-US" sz="1697" dirty="0"/>
+          </a:p>
+        </p:txBody>
+      </p:sp>
+      <p:sp>
+        <p:nvSpPr>
+          <p:cNvPr id="31" name="Shape 29"/>
+          <p:cNvSpPr/>
+          <p:nvPr/>
+        </p:nvSpPr>
+        <p:spPr>
+          <a:xfrm>
+            <a:off x="6972849" y="4281495"/>
+            <a:ext cx="4466661" cy="9510"/>
+          </a:xfrm>
+          <a:prstGeom prst="rect">
+            <a:avLst/>
+          </a:prstGeom>
+          <a:solidFill>
+            <a:srgbClr val="FFFFFF">
+              <a:alpha val="8000"/>
+            </a:srgbClr>
+          </a:solidFill>
+          <a:ln/>
+        </p:spPr>
+      </p:sp>
+      <p:sp>
+        <p:nvSpPr>
+          <p:cNvPr id="32" name="Text 30"/>
+          <p:cNvSpPr txBox="1"/>
+          <p:nvPr/>
+        </p:nvSpPr>
+        <p:spPr>
+          <a:xfrm>
+            <a:off x="6953829" y="4378696"/>
+            <a:ext cx="4843028" cy="281727"/>
+          </a:xfrm>
+          <a:prstGeom prst="rect">
+            <a:avLst/>
+          </a:prstGeom>
+          <a:noFill/>
+          <a:ln/>
+        </p:spPr>
+        <p:txBody>
+          <a:bodyPr wrap="none" lIns="0" tIns="0" rIns="0" bIns="0" rtlCol="0" anchor="t"/>
+          <a:lstStyle/>
+          <a:p>
+            <a:pPr algn="l" indent="0" marL="0">
+              <a:lnSpc>
+                <a:spcPts val="2219"/>
+              </a:lnSpc>
+              <a:buNone/>
+            </a:pPr>
+            <a:r>
+              <a:rPr lang="en-US" sz="1479" spc="-54" kern="0" dirty="0">
+                <a:solidFill>
+                  <a:srgbClr val="94A3B8"/>
+                </a:solidFill>
+                <a:latin typeface="Malgun Gothic" pitchFamily="34" charset="0"/>
+                <a:ea typeface="Malgun Gothic" pitchFamily="34" charset="-122"/>
+                <a:cs typeface="Malgun Gothic" pitchFamily="34" charset="-120"/>
+              </a:rPr>
+              <a:t>GITHUB &amp; DOCS HUB</a:t>
+            </a:r>
+            <a:endParaRPr lang="en-US" sz="1479" dirty="0"/>
+          </a:p>
+        </p:txBody>
+      </p:sp>
+      <p:sp>
+        <p:nvSpPr>
+          <p:cNvPr id="33" name="Text 31"/>
+          <p:cNvSpPr txBox="1"/>
+          <p:nvPr/>
+        </p:nvSpPr>
+        <p:spPr>
+          <a:xfrm>
+            <a:off x="6953829" y="4679716"/>
+            <a:ext cx="4843028" cy="348021"/>
+          </a:xfrm>
+          <a:prstGeom prst="rect">
+            <a:avLst/>
+          </a:prstGeom>
+          <a:noFill/>
+          <a:ln/>
+        </p:spPr>
+        <p:txBody>
+          <a:bodyPr wrap="none" lIns="0" tIns="0" rIns="0" bIns="0" rtlCol="0" anchor="t"/>
+          <a:lstStyle/>
+          <a:p>
+            <a:pPr algn="l" indent="0" marL="0">
+              <a:lnSpc>
+                <a:spcPts val="2741"/>
+              </a:lnSpc>
+              <a:buNone/>
+            </a:pPr>
+            <a:r>
+              <a:rPr lang="en-US" sz="1827" b="1" spc="-54" kern="0" dirty="0">
+                <a:solidFill>
+                  <a:srgbClr val="38BDF8"/>
+                </a:solidFill>
+                <a:latin typeface="Malgun Gothic" pitchFamily="34" charset="0"/>
+                <a:ea typeface="Malgun Gothic" pitchFamily="34" charset="-122"/>
+                <a:cs typeface="Malgun Gothic" pitchFamily="34" charset="-120"/>
+              </a:rPr>
+              <a:t>github.com/company/architecture</a:t>
+            </a:r>
+            <a:endParaRPr lang="en-US" sz="1827" dirty="0"/>
+          </a:p>
+        </p:txBody>
+      </p:sp>
+      <p:sp>
+        <p:nvSpPr>
+          <p:cNvPr id="34" name="Text 32"/>
+          <p:cNvSpPr txBox="1"/>
+          <p:nvPr/>
+        </p:nvSpPr>
+        <p:spPr>
+          <a:xfrm>
+            <a:off x="6953829" y="5084613"/>
+            <a:ext cx="4843028" cy="281727"/>
+          </a:xfrm>
+          <a:prstGeom prst="rect">
+            <a:avLst/>
+          </a:prstGeom>
+          <a:noFill/>
+          <a:ln/>
+        </p:spPr>
+        <p:txBody>
+          <a:bodyPr wrap="none" lIns="0" tIns="0" rIns="0" bIns="0" rtlCol="0" anchor="t"/>
+          <a:lstStyle/>
+          <a:p>
+            <a:pPr algn="l" indent="0" marL="0">
+              <a:lnSpc>
+                <a:spcPts val="2219"/>
+              </a:lnSpc>
+              <a:buNone/>
+            </a:pPr>
+            <a:r>
+              <a:rPr lang="en-US" sz="1479" spc="-54" kern="0" dirty="0">
+                <a:solidFill>
+                  <a:srgbClr val="94A3B8"/>
+                </a:solidFill>
+                <a:latin typeface="Malgun Gothic" pitchFamily="34" charset="0"/>
+                <a:ea typeface="Malgun Gothic" pitchFamily="34" charset="-122"/>
+                <a:cs typeface="Malgun Gothic" pitchFamily="34" charset="-120"/>
+              </a:rPr>
+              <a:t>CONTACT</a:t>
+            </a:r>
+            <a:endParaRPr lang="en-US" sz="1479" dirty="0"/>
+          </a:p>
+        </p:txBody>
+      </p:sp>
+      <p:sp>
+        <p:nvSpPr>
+          <p:cNvPr id="35" name="Text 33"/>
+          <p:cNvSpPr txBox="1"/>
+          <p:nvPr/>
+        </p:nvSpPr>
+        <p:spPr>
+          <a:xfrm>
+            <a:off x="6953829" y="5385633"/>
+            <a:ext cx="4843028" cy="348021"/>
+          </a:xfrm>
+          <a:prstGeom prst="rect">
+            <a:avLst/>
+          </a:prstGeom>
+          <a:noFill/>
+          <a:ln/>
+        </p:spPr>
+        <p:txBody>
+          <a:bodyPr wrap="none" lIns="0" tIns="0" rIns="0" bIns="0" rtlCol="0" anchor="t"/>
+          <a:lstStyle/>
+          <a:p>
+            <a:pPr algn="l" indent="0" marL="0">
+              <a:lnSpc>
+                <a:spcPts val="2741"/>
+              </a:lnSpc>
+              <a:buNone/>
+            </a:pPr>
+            <a:r>
+              <a:rPr lang="en-US" sz="1827" spc="-54" kern="0" dirty="0">
+                <a:solidFill>
+                  <a:srgbClr val="E2E8F0"/>
+                </a:solidFill>
+                <a:latin typeface="Malgun Gothic" pitchFamily="34" charset="0"/>
+                <a:ea typeface="Malgun Gothic" pitchFamily="34" charset="-122"/>
+                <a:cs typeface="Malgun Gothic" pitchFamily="34" charset="-120"/>
+              </a:rPr>
+              <a:t>platform-lead@company.com</a:t>
+            </a:r>
+            <a:endParaRPr lang="en-US" sz="1827" dirty="0"/>
+          </a:p>
+        </p:txBody>
+      </p:sp>
     </p:spTree>
   </p:cSld>
   <p:clrMapOvr>
